--- a/docs/proposals/lotte-ultraman-category-proposal.pptx
+++ b/docs/proposals/lotte-ultraman-category-proposal.pptx
@@ -2423,9 +2423,9 @@
                 <a:solidFill>
                   <a:srgbClr val="333333"/>
                 </a:solidFill>
-                <a:latin typeface="Yu Gothic" pitchFamily="34" charset="0"/>
-                <a:ea typeface="Yu Gothic" pitchFamily="34" charset="-122"/>
-                <a:cs typeface="Yu Gothic" pitchFamily="34" charset="-120"/>
+                <a:latin typeface="游ゴシック" pitchFamily="34" charset="0"/>
+                <a:ea typeface="游ゴシック" pitchFamily="34" charset="-122"/>
+                <a:cs typeface="游ゴシック" pitchFamily="34" charset="-120"/>
               </a:rPr>
               <a:t>ご提案資料</a:t>
             </a:r>
@@ -2462,9 +2462,9 @@
                 <a:solidFill>
                   <a:srgbClr val="404040"/>
                 </a:solidFill>
-                <a:latin typeface="Yu Gothic" pitchFamily="34" charset="0"/>
-                <a:ea typeface="Yu Gothic" pitchFamily="34" charset="-122"/>
-                <a:cs typeface="Yu Gothic" pitchFamily="34" charset="-120"/>
+                <a:latin typeface="游ゴシック" pitchFamily="34" charset="0"/>
+                <a:ea typeface="游ゴシック" pitchFamily="34" charset="-122"/>
+                <a:cs typeface="游ゴシック" pitchFamily="34" charset="-120"/>
               </a:rPr>
               <a:t>── 「変身を、たべよう。」 ウルトラマン × ロッテ 新カテゴリー創造の検討 ──</a:t>
             </a:r>
@@ -2501,9 +2501,9 @@
                 <a:solidFill>
                   <a:srgbClr val="404040"/>
                 </a:solidFill>
-                <a:latin typeface="Yu Gothic" pitchFamily="34" charset="0"/>
-                <a:ea typeface="Yu Gothic" pitchFamily="34" charset="-122"/>
-                <a:cs typeface="Yu Gothic" pitchFamily="34" charset="-120"/>
+                <a:latin typeface="游ゴシック" pitchFamily="34" charset="0"/>
+                <a:ea typeface="游ゴシック" pitchFamily="34" charset="-122"/>
+                <a:cs typeface="游ゴシック" pitchFamily="34" charset="-120"/>
               </a:rPr>
               <a:t>ロッテホールディングス 玉塚社長 御中  | 2026年8月</a:t>
             </a:r>
@@ -2580,9 +2580,9 @@
                 <a:solidFill>
                   <a:srgbClr val="595959"/>
                 </a:solidFill>
-                <a:latin typeface="Yu Gothic" pitchFamily="34" charset="0"/>
-                <a:ea typeface="Yu Gothic" pitchFamily="34" charset="-122"/>
-                <a:cs typeface="Yu Gothic" pitchFamily="34" charset="-120"/>
+                <a:latin typeface="游ゴシック" pitchFamily="34" charset="0"/>
+                <a:ea typeface="游ゴシック" pitchFamily="34" charset="-122"/>
+                <a:cs typeface="游ゴシック" pitchFamily="34" charset="-120"/>
               </a:rPr>
               <a:t>対 外 厳 秘</a:t>
             </a:r>
@@ -2671,9 +2671,9 @@
                 <a:solidFill>
                   <a:srgbClr val="FFFFFF"/>
                 </a:solidFill>
-                <a:latin typeface="Yu Gothic" pitchFamily="34" charset="0"/>
-                <a:ea typeface="Yu Gothic" pitchFamily="34" charset="-122"/>
-                <a:cs typeface="Yu Gothic" pitchFamily="34" charset="-120"/>
+                <a:latin typeface="游ゴシック" pitchFamily="34" charset="0"/>
+                <a:ea typeface="游ゴシック" pitchFamily="34" charset="-122"/>
+                <a:cs typeface="游ゴシック" pitchFamily="34" charset="-120"/>
               </a:rPr>
               <a:t>4．本命コンセプト</a:t>
             </a:r>
@@ -2730,9 +2730,9 @@
                 <a:solidFill>
                   <a:srgbClr val="595959"/>
                 </a:solidFill>
-                <a:latin typeface="Yu Gothic" pitchFamily="34" charset="0"/>
-                <a:ea typeface="Yu Gothic" pitchFamily="34" charset="-122"/>
-                <a:cs typeface="Yu Gothic" pitchFamily="34" charset="-120"/>
+                <a:latin typeface="游ゴシック" pitchFamily="34" charset="0"/>
+                <a:ea typeface="游ゴシック" pitchFamily="34" charset="-122"/>
+                <a:cs typeface="游ゴシック" pitchFamily="34" charset="-120"/>
               </a:rPr>
               <a:t>極　秘</a:t>
             </a:r>
@@ -2769,9 +2769,9 @@
                 <a:solidFill>
                   <a:srgbClr val="333333"/>
                 </a:solidFill>
-                <a:latin typeface="Yu Gothic" pitchFamily="34" charset="0"/>
-                <a:ea typeface="Yu Gothic" pitchFamily="34" charset="-122"/>
-                <a:cs typeface="Yu Gothic" pitchFamily="34" charset="-120"/>
+                <a:latin typeface="游ゴシック" pitchFamily="34" charset="0"/>
+                <a:ea typeface="游ゴシック" pitchFamily="34" charset="-122"/>
+                <a:cs typeface="游ゴシック" pitchFamily="34" charset="-120"/>
               </a:rPr>
               <a:t>収集の仕掛け ── ビックリマンの遺伝子 × ウルトラの資産</a:t>
             </a:r>
@@ -2811,9 +2811,9 @@
                 <a:solidFill>
                   <a:srgbClr val="404040"/>
                 </a:solidFill>
-                <a:latin typeface="Yu Gothic" pitchFamily="34" charset="0"/>
-                <a:ea typeface="Yu Gothic" pitchFamily="34" charset="-122"/>
-                <a:cs typeface="Yu Gothic" pitchFamily="34" charset="-120"/>
+                <a:latin typeface="游ゴシック" pitchFamily="34" charset="0"/>
+                <a:ea typeface="游ゴシック" pitchFamily="34" charset="-122"/>
+                <a:cs typeface="游ゴシック" pitchFamily="34" charset="-120"/>
               </a:rPr>
               <a:t>御社が発明した「開封のドキドキ」を、60年分のキャラクター資産で正統進化させる</a:t>
             </a:r>
@@ -2976,16 +2976,16 @@
                           <a:solidFill>
                             <a:srgbClr val="333333"/>
                           </a:solidFill>
-                          <a:latin typeface="Yu Gothic" pitchFamily="34" charset="0"/>
-                          <a:ea typeface="Yu Gothic" pitchFamily="34" charset="-122"/>
-                          <a:cs typeface="Yu Gothic" pitchFamily="34" charset="-120"/>
+                          <a:latin typeface="游ゴシック" pitchFamily="34" charset="0"/>
+                          <a:ea typeface="游ゴシック" pitchFamily="34" charset="-122"/>
+                          <a:cs typeface="游ゴシック" pitchFamily="34" charset="-120"/>
                         </a:rPr>
                         <a:t>変身ホロシール 全60種</a:t>
                       </a:r>
                       <a:endParaRPr lang="en-US" sz="1100" dirty="0">
-                        <a:latin typeface="Yu Gothic" charset="0"/>
-                        <a:ea typeface="Yu Gothic" charset="0"/>
-                        <a:cs typeface="Yu Gothic" charset="0"/>
+                        <a:latin typeface="游ゴシック" charset="0"/>
+                        <a:ea typeface="游ゴシック" charset="0"/>
+                        <a:cs typeface="游ゴシック" charset="0"/>
                       </a:endParaRPr>
                     </a:p>
                   </a:txBody>
@@ -3044,16 +3044,16 @@
                           <a:solidFill>
                             <a:srgbClr val="404040"/>
                           </a:solidFill>
-                          <a:latin typeface="Yu Gothic" pitchFamily="34" charset="0"/>
-                          <a:ea typeface="Yu Gothic" pitchFamily="34" charset="-122"/>
-                          <a:cs typeface="Yu Gothic" pitchFamily="34" charset="-120"/>
+                          <a:latin typeface="游ゴシック" pitchFamily="34" charset="0"/>
+                          <a:ea typeface="游ゴシック" pitchFamily="34" charset="-122"/>
+                          <a:cs typeface="游ゴシック" pitchFamily="34" charset="-120"/>
                         </a:rPr>
                         <a:t>60周年にちなんだ全60種。傾けると「変身前 → 変身後」が切り替わるホログラム仕様。シール文化の正統進化形</a:t>
                       </a:r>
                       <a:endParaRPr lang="en-US" sz="1100" dirty="0">
-                        <a:latin typeface="Yu Gothic" charset="0"/>
-                        <a:ea typeface="Yu Gothic" charset="0"/>
-                        <a:cs typeface="Yu Gothic" charset="0"/>
+                        <a:latin typeface="游ゴシック" charset="0"/>
+                        <a:ea typeface="游ゴシック" charset="0"/>
+                        <a:cs typeface="游ゴシック" charset="0"/>
                       </a:endParaRPr>
                     </a:p>
                   </a:txBody>
@@ -3111,16 +3111,16 @@
                           <a:solidFill>
                             <a:srgbClr val="333333"/>
                           </a:solidFill>
-                          <a:latin typeface="Yu Gothic" pitchFamily="34" charset="0"/>
-                          <a:ea typeface="Yu Gothic" pitchFamily="34" charset="-122"/>
-                          <a:cs typeface="Yu Gothic" pitchFamily="34" charset="-120"/>
+                          <a:latin typeface="游ゴシック" pitchFamily="34" charset="0"/>
+                          <a:ea typeface="游ゴシック" pitchFamily="34" charset="-122"/>
+                          <a:cs typeface="游ゴシック" pitchFamily="34" charset="-120"/>
                         </a:rPr>
                         <a:t>数百体のキャラクター資産</a:t>
                       </a:r>
                       <a:endParaRPr lang="en-US" sz="1100" dirty="0">
-                        <a:latin typeface="Yu Gothic" charset="0"/>
-                        <a:ea typeface="Yu Gothic" charset="0"/>
-                        <a:cs typeface="Yu Gothic" charset="0"/>
+                        <a:latin typeface="游ゴシック" charset="0"/>
+                        <a:ea typeface="游ゴシック" charset="0"/>
+                        <a:cs typeface="游ゴシック" charset="0"/>
                       </a:endParaRPr>
                     </a:p>
                   </a:txBody>
@@ -3179,16 +3179,16 @@
                           <a:solidFill>
                             <a:srgbClr val="404040"/>
                           </a:solidFill>
-                          <a:latin typeface="Yu Gothic" pitchFamily="34" charset="0"/>
-                          <a:ea typeface="Yu Gothic" pitchFamily="34" charset="-122"/>
-                          <a:cs typeface="Yu Gothic" pitchFamily="34" charset="-120"/>
+                          <a:latin typeface="游ゴシック" pitchFamily="34" charset="0"/>
+                          <a:ea typeface="游ゴシック" pitchFamily="34" charset="-122"/>
+                          <a:cs typeface="游ゴシック" pitchFamily="34" charset="-120"/>
                         </a:rPr>
                         <a:t>ヒーローに加え、ゼットン、バルタン星人など大人が名前を言える怪獣文化はウルトラマン固有の資産。悪魔VS天使と同じ「善と悪の宇宙」を最初から持っている</a:t>
                       </a:r>
                       <a:endParaRPr lang="en-US" sz="1100" dirty="0">
-                        <a:latin typeface="Yu Gothic" charset="0"/>
-                        <a:ea typeface="Yu Gothic" charset="0"/>
-                        <a:cs typeface="Yu Gothic" charset="0"/>
+                        <a:latin typeface="游ゴシック" charset="0"/>
+                        <a:ea typeface="游ゴシック" charset="0"/>
+                        <a:cs typeface="游ゴシック" charset="0"/>
                       </a:endParaRPr>
                     </a:p>
                   </a:txBody>
@@ -3246,16 +3246,16 @@
                           <a:solidFill>
                             <a:srgbClr val="333333"/>
                           </a:solidFill>
-                          <a:latin typeface="Yu Gothic" pitchFamily="34" charset="0"/>
-                          <a:ea typeface="Yu Gothic" pitchFamily="34" charset="-122"/>
-                          <a:cs typeface="Yu Gothic" pitchFamily="34" charset="-120"/>
+                          <a:latin typeface="游ゴシック" pitchFamily="34" charset="0"/>
+                          <a:ea typeface="游ゴシック" pitchFamily="34" charset="-122"/>
+                          <a:cs typeface="游ゴシック" pitchFamily="34" charset="-120"/>
                         </a:rPr>
                         <a:t>レア設計と二世代購買</a:t>
                       </a:r>
                       <a:endParaRPr lang="en-US" sz="1100" dirty="0">
-                        <a:latin typeface="Yu Gothic" charset="0"/>
-                        <a:ea typeface="Yu Gothic" charset="0"/>
-                        <a:cs typeface="Yu Gothic" charset="0"/>
+                        <a:latin typeface="游ゴシック" charset="0"/>
+                        <a:ea typeface="游ゴシック" charset="0"/>
+                        <a:cs typeface="游ゴシック" charset="0"/>
                       </a:endParaRPr>
                     </a:p>
                   </a:txBody>
@@ -3314,16 +3314,16 @@
                           <a:solidFill>
                             <a:srgbClr val="404040"/>
                           </a:solidFill>
-                          <a:latin typeface="Yu Gothic" pitchFamily="34" charset="0"/>
-                          <a:ea typeface="Yu Gothic" pitchFamily="34" charset="-122"/>
-                          <a:cs typeface="Yu Gothic" pitchFamily="34" charset="-120"/>
+                          <a:latin typeface="游ゴシック" pitchFamily="34" charset="0"/>
+                          <a:ea typeface="游ゴシック" pitchFamily="34" charset="-122"/>
+                          <a:cs typeface="游ゴシック" pitchFamily="34" charset="-120"/>
                         </a:rPr>
                         <a:t>シークレット枠に「ゾフィー」「ウルトラの父」。買うのは直撃世代の40〜60代の親、集めるのは子。ビックリマン同様の親子二世代構造を最初から狙える</a:t>
                       </a:r>
                       <a:endParaRPr lang="en-US" sz="1100" dirty="0">
-                        <a:latin typeface="Yu Gothic" charset="0"/>
-                        <a:ea typeface="Yu Gothic" charset="0"/>
-                        <a:cs typeface="Yu Gothic" charset="0"/>
+                        <a:latin typeface="游ゴシック" charset="0"/>
+                        <a:ea typeface="游ゴシック" charset="0"/>
+                        <a:cs typeface="游ゴシック" charset="0"/>
                       </a:endParaRPr>
                     </a:p>
                   </a:txBody>
@@ -3420,9 +3420,9 @@
                 <a:solidFill>
                   <a:srgbClr val="17828F"/>
                 </a:solidFill>
-                <a:latin typeface="Yu Gothic" pitchFamily="34" charset="0"/>
-                <a:ea typeface="Yu Gothic" pitchFamily="34" charset="-122"/>
-                <a:cs typeface="Yu Gothic" pitchFamily="34" charset="-120"/>
+                <a:latin typeface="游ゴシック" pitchFamily="34" charset="0"/>
+                <a:ea typeface="游ゴシック" pitchFamily="34" charset="-122"/>
+                <a:cs typeface="游ゴシック" pitchFamily="34" charset="-120"/>
               </a:rPr>
               <a:t>健全設計：</a:t>
             </a:r>
@@ -3434,9 +3434,9 @@
                 <a:solidFill>
                   <a:srgbClr val="404040"/>
                 </a:solidFill>
-                <a:latin typeface="Yu Gothic" pitchFamily="34" charset="0"/>
-                <a:ea typeface="Yu Gothic" pitchFamily="34" charset="-122"/>
-                <a:cs typeface="Yu Gothic" pitchFamily="34" charset="-120"/>
+                <a:latin typeface="游ゴシック" pitchFamily="34" charset="0"/>
+                <a:ea typeface="游ゴシック" pitchFamily="34" charset="-122"/>
+                <a:cs typeface="游ゴシック" pitchFamily="34" charset="-120"/>
               </a:rPr>
               <a:t>レアは射幸性でなく物語性（歴代60種の意味）に置き、封入率の透明化とデジタル図鑑での重複救済を初期から組み込む</a:t>
             </a:r>
@@ -3473,9 +3473,9 @@
                 <a:solidFill>
                   <a:srgbClr val="808080"/>
                 </a:solidFill>
-                <a:latin typeface="Yu Gothic" pitchFamily="34" charset="0"/>
-                <a:ea typeface="Yu Gothic" pitchFamily="34" charset="-122"/>
-                <a:cs typeface="Yu Gothic" pitchFamily="34" charset="-120"/>
+                <a:latin typeface="游ゴシック" pitchFamily="34" charset="0"/>
+                <a:ea typeface="游ゴシック" pitchFamily="34" charset="-122"/>
+                <a:cs typeface="游ゴシック" pitchFamily="34" charset="-120"/>
               </a:rPr>
               <a:t>※ シール・パッケージの世界観は円谷プロが全面監修。歴代デザイナー・怪獣造形の一次資産を提供する</a:t>
             </a:r>
@@ -3564,9 +3564,9 @@
                 <a:solidFill>
                   <a:srgbClr val="FFFFFF"/>
                 </a:solidFill>
-                <a:latin typeface="Yu Gothic" pitchFamily="34" charset="0"/>
-                <a:ea typeface="Yu Gothic" pitchFamily="34" charset="-122"/>
-                <a:cs typeface="Yu Gothic" pitchFamily="34" charset="-120"/>
+                <a:latin typeface="游ゴシック" pitchFamily="34" charset="0"/>
+                <a:ea typeface="游ゴシック" pitchFamily="34" charset="-122"/>
+                <a:cs typeface="游ゴシック" pitchFamily="34" charset="-120"/>
               </a:rPr>
               <a:t>4．本命コンセプト</a:t>
             </a:r>
@@ -3623,9 +3623,9 @@
                 <a:solidFill>
                   <a:srgbClr val="595959"/>
                 </a:solidFill>
-                <a:latin typeface="Yu Gothic" pitchFamily="34" charset="0"/>
-                <a:ea typeface="Yu Gothic" pitchFamily="34" charset="-122"/>
-                <a:cs typeface="Yu Gothic" pitchFamily="34" charset="-120"/>
+                <a:latin typeface="游ゴシック" pitchFamily="34" charset="0"/>
+                <a:ea typeface="游ゴシック" pitchFamily="34" charset="-122"/>
+                <a:cs typeface="游ゴシック" pitchFamily="34" charset="-120"/>
               </a:rPr>
               <a:t>極　秘</a:t>
             </a:r>
@@ -3662,9 +3662,9 @@
                 <a:solidFill>
                   <a:srgbClr val="333333"/>
                 </a:solidFill>
-                <a:latin typeface="Yu Gothic" pitchFamily="34" charset="0"/>
-                <a:ea typeface="Yu Gothic" pitchFamily="34" charset="-122"/>
-                <a:cs typeface="Yu Gothic" pitchFamily="34" charset="-120"/>
+                <a:latin typeface="游ゴシック" pitchFamily="34" charset="0"/>
+                <a:ea typeface="游ゴシック" pitchFamily="34" charset="-122"/>
+                <a:cs typeface="游ゴシック" pitchFamily="34" charset="-120"/>
               </a:rPr>
               <a:t>デジタル連動 ── 1回の驚きを、毎週の習慣に</a:t>
             </a:r>
@@ -3704,9 +3704,9 @@
                 <a:solidFill>
                   <a:srgbClr val="404040"/>
                 </a:solidFill>
-                <a:latin typeface="Yu Gothic" pitchFamily="34" charset="0"/>
-                <a:ea typeface="Yu Gothic" pitchFamily="34" charset="-122"/>
-                <a:cs typeface="Yu Gothic" pitchFamily="34" charset="-120"/>
+                <a:latin typeface="游ゴシック" pitchFamily="34" charset="0"/>
+                <a:ea typeface="游ゴシック" pitchFamily="34" charset="-122"/>
+                <a:cs typeface="游ゴシック" pitchFamily="34" charset="-120"/>
               </a:rPr>
               <a:t>「今週の怪獣」が毎週入れ替わる ── 買う日が決まっている菓子は、売場の定番になる</a:t>
             </a:r>
@@ -3869,16 +3869,16 @@
                           <a:solidFill>
                             <a:srgbClr val="333333"/>
                           </a:solidFill>
-                          <a:latin typeface="Yu Gothic" pitchFamily="34" charset="0"/>
-                          <a:ea typeface="Yu Gothic" pitchFamily="34" charset="-122"/>
-                          <a:cs typeface="Yu Gothic" pitchFamily="34" charset="-120"/>
+                          <a:latin typeface="游ゴシック" pitchFamily="34" charset="0"/>
+                          <a:ea typeface="游ゴシック" pitchFamily="34" charset="-122"/>
+                          <a:cs typeface="游ゴシック" pitchFamily="34" charset="-120"/>
                         </a:rPr>
                         <a:t>ウルトラ図鑑アプリ</a:t>
                       </a:r>
                       <a:endParaRPr lang="en-US" sz="1100" dirty="0">
-                        <a:latin typeface="Yu Gothic" charset="0"/>
-                        <a:ea typeface="Yu Gothic" charset="0"/>
-                        <a:cs typeface="Yu Gothic" charset="0"/>
+                        <a:latin typeface="游ゴシック" charset="0"/>
+                        <a:ea typeface="游ゴシック" charset="0"/>
+                        <a:cs typeface="游ゴシック" charset="0"/>
                       </a:endParaRPr>
                     </a:p>
                   </a:txBody>
@@ -3937,16 +3937,16 @@
                           <a:solidFill>
                             <a:srgbClr val="404040"/>
                           </a:solidFill>
-                          <a:latin typeface="Yu Gothic" pitchFamily="34" charset="0"/>
-                          <a:ea typeface="Yu Gothic" pitchFamily="34" charset="-122"/>
-                          <a:cs typeface="Yu Gothic" pitchFamily="34" charset="-120"/>
+                          <a:latin typeface="游ゴシック" pitchFamily="34" charset="0"/>
+                          <a:ea typeface="游ゴシック" pitchFamily="34" charset="-122"/>
+                          <a:cs typeface="游ゴシック" pitchFamily="34" charset="-120"/>
                         </a:rPr>
                         <a:t>シール封入のシリアルコードで、自分だけの怪獣・ヒーロー図鑑が育つ。集めるほど強くなる、やめられない構造</a:t>
                       </a:r>
                       <a:endParaRPr lang="en-US" sz="1100" dirty="0">
-                        <a:latin typeface="Yu Gothic" charset="0"/>
-                        <a:ea typeface="Yu Gothic" charset="0"/>
-                        <a:cs typeface="Yu Gothic" charset="0"/>
+                        <a:latin typeface="游ゴシック" charset="0"/>
+                        <a:ea typeface="游ゴシック" charset="0"/>
+                        <a:cs typeface="游ゴシック" charset="0"/>
                       </a:endParaRPr>
                     </a:p>
                   </a:txBody>
@@ -4004,16 +4004,16 @@
                           <a:solidFill>
                             <a:srgbClr val="333333"/>
                           </a:solidFill>
-                          <a:latin typeface="Yu Gothic" pitchFamily="34" charset="0"/>
-                          <a:ea typeface="Yu Gothic" pitchFamily="34" charset="-122"/>
-                          <a:cs typeface="Yu Gothic" pitchFamily="34" charset="-120"/>
+                          <a:latin typeface="游ゴシック" pitchFamily="34" charset="0"/>
+                          <a:ea typeface="游ゴシック" pitchFamily="34" charset="-122"/>
+                          <a:cs typeface="游ゴシック" pitchFamily="34" charset="-120"/>
                         </a:rPr>
                         <a:t>週替わりのリズム</a:t>
                       </a:r>
                       <a:endParaRPr lang="en-US" sz="1100" dirty="0">
-                        <a:latin typeface="Yu Gothic" charset="0"/>
-                        <a:ea typeface="Yu Gothic" charset="0"/>
-                        <a:cs typeface="Yu Gothic" charset="0"/>
+                        <a:latin typeface="游ゴシック" charset="0"/>
+                        <a:ea typeface="游ゴシック" charset="0"/>
+                        <a:cs typeface="游ゴシック" charset="0"/>
                       </a:endParaRPr>
                     </a:p>
                   </a:txBody>
@@ -4072,16 +4072,16 @@
                           <a:solidFill>
                             <a:srgbClr val="404040"/>
                           </a:solidFill>
-                          <a:latin typeface="Yu Gothic" pitchFamily="34" charset="0"/>
-                          <a:ea typeface="Yu Gothic" pitchFamily="34" charset="-122"/>
-                          <a:cs typeface="Yu Gothic" pitchFamily="34" charset="-120"/>
+                          <a:latin typeface="游ゴシック" pitchFamily="34" charset="0"/>
+                          <a:ea typeface="游ゴシック" pitchFamily="34" charset="-122"/>
+                          <a:cs typeface="游ゴシック" pitchFamily="34" charset="-120"/>
                         </a:rPr>
                         <a:t>「今週の怪獣」を毎週入れ替え。買う日が決まっている＝売場の定番化。飲料の日常頻度に近づける設計</a:t>
                       </a:r>
                       <a:endParaRPr lang="en-US" sz="1100" dirty="0">
-                        <a:latin typeface="Yu Gothic" charset="0"/>
-                        <a:ea typeface="Yu Gothic" charset="0"/>
-                        <a:cs typeface="Yu Gothic" charset="0"/>
+                        <a:latin typeface="游ゴシック" charset="0"/>
+                        <a:ea typeface="游ゴシック" charset="0"/>
+                        <a:cs typeface="游ゴシック" charset="0"/>
                       </a:endParaRPr>
                     </a:p>
                   </a:txBody>
@@ -4139,16 +4139,16 @@
                           <a:solidFill>
                             <a:srgbClr val="333333"/>
                           </a:solidFill>
-                          <a:latin typeface="Yu Gothic" pitchFamily="34" charset="0"/>
-                          <a:ea typeface="Yu Gothic" pitchFamily="34" charset="-122"/>
-                          <a:cs typeface="Yu Gothic" pitchFamily="34" charset="-120"/>
+                          <a:latin typeface="游ゴシック" pitchFamily="34" charset="0"/>
+                          <a:ea typeface="游ゴシック" pitchFamily="34" charset="-122"/>
+                          <a:cs typeface="游ゴシック" pitchFamily="34" charset="-120"/>
                         </a:rPr>
                         <a:t>放送との同期</a:t>
                       </a:r>
                       <a:endParaRPr lang="en-US" sz="1100" dirty="0">
-                        <a:latin typeface="Yu Gothic" charset="0"/>
-                        <a:ea typeface="Yu Gothic" charset="0"/>
-                        <a:cs typeface="Yu Gothic" charset="0"/>
+                        <a:latin typeface="游ゴシック" charset="0"/>
+                        <a:ea typeface="游ゴシック" charset="0"/>
+                        <a:cs typeface="游ゴシック" charset="0"/>
                       </a:endParaRPr>
                     </a:p>
                   </a:txBody>
@@ -4207,16 +4207,16 @@
                           <a:solidFill>
                             <a:srgbClr val="404040"/>
                           </a:solidFill>
-                          <a:latin typeface="Yu Gothic" pitchFamily="34" charset="0"/>
-                          <a:ea typeface="Yu Gothic" pitchFamily="34" charset="-122"/>
-                          <a:cs typeface="Yu Gothic" pitchFamily="34" charset="-120"/>
+                          <a:latin typeface="游ゴシック" pitchFamily="34" charset="0"/>
+                          <a:ea typeface="游ゴシック" pitchFamily="34" charset="-122"/>
+                          <a:cs typeface="游ゴシック" pitchFamily="34" charset="-120"/>
                         </a:rPr>
                         <a:t>『ウルトラマンテオ』最新話に登場した怪獣が、翌週の商品に登場。テレビ → 売場 → アプリの循環を作る</a:t>
                       </a:r>
                       <a:endParaRPr lang="en-US" sz="1100" dirty="0">
-                        <a:latin typeface="Yu Gothic" charset="0"/>
-                        <a:ea typeface="Yu Gothic" charset="0"/>
-                        <a:cs typeface="Yu Gothic" charset="0"/>
+                        <a:latin typeface="游ゴシック" charset="0"/>
+                        <a:ea typeface="游ゴシック" charset="0"/>
+                        <a:cs typeface="游ゴシック" charset="0"/>
                       </a:endParaRPr>
                     </a:p>
                   </a:txBody>
@@ -4274,16 +4274,16 @@
                           <a:solidFill>
                             <a:srgbClr val="333333"/>
                           </a:solidFill>
-                          <a:latin typeface="Yu Gothic" pitchFamily="34" charset="0"/>
-                          <a:ea typeface="Yu Gothic" pitchFamily="34" charset="-122"/>
-                          <a:cs typeface="Yu Gothic" pitchFamily="34" charset="-120"/>
+                          <a:latin typeface="游ゴシック" pitchFamily="34" charset="0"/>
+                          <a:ea typeface="游ゴシック" pitchFamily="34" charset="-122"/>
+                          <a:cs typeface="游ゴシック" pitchFamily="34" charset="-120"/>
                         </a:rPr>
                         <a:t>共同マーケ資産</a:t>
                       </a:r>
                       <a:endParaRPr lang="en-US" sz="1100" dirty="0">
-                        <a:latin typeface="Yu Gothic" charset="0"/>
-                        <a:ea typeface="Yu Gothic" charset="0"/>
-                        <a:cs typeface="Yu Gothic" charset="0"/>
+                        <a:latin typeface="游ゴシック" charset="0"/>
+                        <a:ea typeface="游ゴシック" charset="0"/>
+                        <a:cs typeface="游ゴシック" charset="0"/>
                       </a:endParaRPr>
                     </a:p>
                   </a:txBody>
@@ -4342,16 +4342,16 @@
                           <a:solidFill>
                             <a:srgbClr val="404040"/>
                           </a:solidFill>
-                          <a:latin typeface="Yu Gothic" pitchFamily="34" charset="0"/>
-                          <a:ea typeface="Yu Gothic" pitchFamily="34" charset="-122"/>
-                          <a:cs typeface="Yu Gothic" pitchFamily="34" charset="-120"/>
+                          <a:latin typeface="游ゴシック" pitchFamily="34" charset="0"/>
+                          <a:ea typeface="游ゴシック" pitchFamily="34" charset="-122"/>
+                          <a:cs typeface="游ゴシック" pitchFamily="34" charset="-120"/>
                         </a:rPr>
                         <a:t>購買データ × 視聴・アプリ行動データを両社の共同資産に。次の商品企画・番組企画に還流する</a:t>
                       </a:r>
                       <a:endParaRPr lang="en-US" sz="1100" dirty="0">
-                        <a:latin typeface="Yu Gothic" charset="0"/>
-                        <a:ea typeface="Yu Gothic" charset="0"/>
-                        <a:cs typeface="Yu Gothic" charset="0"/>
+                        <a:latin typeface="游ゴシック" charset="0"/>
+                        <a:ea typeface="游ゴシック" charset="0"/>
+                        <a:cs typeface="游ゴシック" charset="0"/>
                       </a:endParaRPr>
                     </a:p>
                   </a:txBody>
@@ -4450,9 +4450,9 @@
                 <a:solidFill>
                   <a:srgbClr val="C00000"/>
                 </a:solidFill>
-                <a:latin typeface="Yu Gothic" pitchFamily="34" charset="0"/>
-                <a:ea typeface="Yu Gothic" pitchFamily="34" charset="-122"/>
-                <a:cs typeface="Yu Gothic" pitchFamily="34" charset="-120"/>
+                <a:latin typeface="游ゴシック" pitchFamily="34" charset="0"/>
+                <a:ea typeface="游ゴシック" pitchFamily="34" charset="-122"/>
+                <a:cs typeface="游ゴシック" pitchFamily="34" charset="-120"/>
               </a:rPr>
               <a:t>① </a:t>
             </a:r>
@@ -4464,9 +4464,9 @@
                 <a:solidFill>
                   <a:srgbClr val="404040"/>
                 </a:solidFill>
-                <a:latin typeface="Yu Gothic" pitchFamily="34" charset="0"/>
-                <a:ea typeface="Yu Gothic" pitchFamily="34" charset="-122"/>
-                <a:cs typeface="Yu Gothic" pitchFamily="34" charset="-120"/>
+                <a:latin typeface="游ゴシック" pitchFamily="34" charset="0"/>
+                <a:ea typeface="游ゴシック" pitchFamily="34" charset="-122"/>
+                <a:cs typeface="游ゴシック" pitchFamily="34" charset="-120"/>
               </a:rPr>
               <a:t>週次リズムが本提案の生命線 ── ブームで終わらせず「習慣」として売場に定着させる装置</a:t>
             </a:r>
@@ -4555,9 +4555,9 @@
                 <a:solidFill>
                   <a:srgbClr val="FFFFFF"/>
                 </a:solidFill>
-                <a:latin typeface="Yu Gothic" pitchFamily="34" charset="0"/>
-                <a:ea typeface="Yu Gothic" pitchFamily="34" charset="-122"/>
-                <a:cs typeface="Yu Gothic" pitchFamily="34" charset="-120"/>
+                <a:latin typeface="游ゴシック" pitchFamily="34" charset="0"/>
+                <a:ea typeface="游ゴシック" pitchFamily="34" charset="-122"/>
+                <a:cs typeface="游ゴシック" pitchFamily="34" charset="-120"/>
               </a:rPr>
               <a:t>5．展開構想</a:t>
             </a:r>
@@ -4614,9 +4614,9 @@
                 <a:solidFill>
                   <a:srgbClr val="595959"/>
                 </a:solidFill>
-                <a:latin typeface="Yu Gothic" pitchFamily="34" charset="0"/>
-                <a:ea typeface="Yu Gothic" pitchFamily="34" charset="-122"/>
-                <a:cs typeface="Yu Gothic" pitchFamily="34" charset="-120"/>
+                <a:latin typeface="游ゴシック" pitchFamily="34" charset="0"/>
+                <a:ea typeface="游ゴシック" pitchFamily="34" charset="-122"/>
+                <a:cs typeface="游ゴシック" pitchFamily="34" charset="-120"/>
               </a:rPr>
               <a:t>極　秘</a:t>
             </a:r>
@@ -4653,9 +4653,9 @@
                 <a:solidFill>
                   <a:srgbClr val="333333"/>
                 </a:solidFill>
-                <a:latin typeface="Yu Gothic" pitchFamily="34" charset="0"/>
-                <a:ea typeface="Yu Gothic" pitchFamily="34" charset="-122"/>
-                <a:cs typeface="Yu Gothic" pitchFamily="34" charset="-120"/>
+                <a:latin typeface="游ゴシック" pitchFamily="34" charset="0"/>
+                <a:ea typeface="游ゴシック" pitchFamily="34" charset="-122"/>
+                <a:cs typeface="游ゴシック" pitchFamily="34" charset="-120"/>
               </a:rPr>
               <a:t>第2・第3の矢 ── 本命を支えるサブコンセプト</a:t>
             </a:r>
@@ -4695,9 +4695,9 @@
                 <a:solidFill>
                   <a:srgbClr val="404040"/>
                 </a:solidFill>
-                <a:latin typeface="Yu Gothic" pitchFamily="34" charset="0"/>
-                <a:ea typeface="Yu Gothic" pitchFamily="34" charset="-122"/>
-                <a:cs typeface="Yu Gothic" pitchFamily="34" charset="-120"/>
+                <a:latin typeface="游ゴシック" pitchFamily="34" charset="0"/>
+                <a:ea typeface="游ゴシック" pitchFamily="34" charset="-122"/>
+                <a:cs typeface="游ゴシック" pitchFamily="34" charset="-120"/>
               </a:rPr>
               <a:t>3つのコンセプトは独立ではなく、「先行弾 → 本命 → 大人市場」の順に接続する一つの物語である</a:t>
             </a:r>
@@ -4857,9 +4857,9 @@
                         <a:buNone/>
                       </a:pPr>
                       <a:endParaRPr lang="en-US" sz="1050" dirty="0">
-                        <a:latin typeface="Yu Gothic" charset="0"/>
-                        <a:ea typeface="Yu Gothic" charset="0"/>
-                        <a:cs typeface="Yu Gothic" charset="0"/>
+                        <a:latin typeface="游ゴシック" charset="0"/>
+                        <a:ea typeface="游ゴシック" charset="0"/>
+                        <a:cs typeface="游ゴシック" charset="0"/>
                       </a:endParaRPr>
                     </a:p>
                   </a:txBody>
@@ -4918,16 +4918,16 @@
                           <a:solidFill>
                             <a:srgbClr val="FFFFFF"/>
                           </a:solidFill>
-                          <a:latin typeface="Yu Gothic" pitchFamily="34" charset="0"/>
-                          <a:ea typeface="Yu Gothic" pitchFamily="34" charset="-122"/>
-                          <a:cs typeface="Yu Gothic" pitchFamily="34" charset="-120"/>
+                          <a:latin typeface="游ゴシック" pitchFamily="34" charset="0"/>
+                          <a:ea typeface="游ゴシック" pitchFamily="34" charset="-122"/>
+                          <a:cs typeface="游ゴシック" pitchFamily="34" charset="-120"/>
                         </a:rPr>
                         <a:t>『ウルトラマンマンチョコ』── 先行の一手</a:t>
                       </a:r>
                       <a:endParaRPr lang="en-US" sz="1050" dirty="0">
-                        <a:latin typeface="Yu Gothic" charset="0"/>
-                        <a:ea typeface="Yu Gothic" charset="0"/>
-                        <a:cs typeface="Yu Gothic" charset="0"/>
+                        <a:latin typeface="游ゴシック" charset="0"/>
+                        <a:ea typeface="游ゴシック" charset="0"/>
+                        <a:cs typeface="游ゴシック" charset="0"/>
                       </a:endParaRPr>
                     </a:p>
                   </a:txBody>
@@ -4986,16 +4986,16 @@
                           <a:solidFill>
                             <a:srgbClr val="FFFFFF"/>
                           </a:solidFill>
-                          <a:latin typeface="Yu Gothic" pitchFamily="34" charset="0"/>
-                          <a:ea typeface="Yu Gothic" pitchFamily="34" charset="-122"/>
-                          <a:cs typeface="Yu Gothic" pitchFamily="34" charset="-120"/>
+                          <a:latin typeface="游ゴシック" pitchFamily="34" charset="0"/>
+                          <a:ea typeface="游ゴシック" pitchFamily="34" charset="-122"/>
+                          <a:cs typeface="游ゴシック" pitchFamily="34" charset="-120"/>
                         </a:rPr>
                         <a:t>『ULTRA CHARGE』── 大人の機能性ガム・グミ</a:t>
                       </a:r>
                       <a:endParaRPr lang="en-US" sz="1050" dirty="0">
-                        <a:latin typeface="Yu Gothic" charset="0"/>
-                        <a:ea typeface="Yu Gothic" charset="0"/>
-                        <a:cs typeface="Yu Gothic" charset="0"/>
+                        <a:latin typeface="游ゴシック" charset="0"/>
+                        <a:ea typeface="游ゴシック" charset="0"/>
+                        <a:cs typeface="游ゴシック" charset="0"/>
                       </a:endParaRPr>
                     </a:p>
                   </a:txBody>
@@ -5056,16 +5056,16 @@
                           <a:solidFill>
                             <a:srgbClr val="333333"/>
                           </a:solidFill>
-                          <a:latin typeface="Yu Gothic" pitchFamily="34" charset="0"/>
-                          <a:ea typeface="Yu Gothic" pitchFamily="34" charset="-122"/>
-                          <a:cs typeface="Yu Gothic" pitchFamily="34" charset="-120"/>
+                          <a:latin typeface="游ゴシック" pitchFamily="34" charset="0"/>
+                          <a:ea typeface="游ゴシック" pitchFamily="34" charset="-122"/>
+                          <a:cs typeface="游ゴシック" pitchFamily="34" charset="-120"/>
                         </a:rPr>
                         <a:t>概要</a:t>
                       </a:r>
                       <a:endParaRPr lang="en-US" sz="1050" dirty="0">
-                        <a:latin typeface="Yu Gothic" charset="0"/>
-                        <a:ea typeface="Yu Gothic" charset="0"/>
-                        <a:cs typeface="Yu Gothic" charset="0"/>
+                        <a:latin typeface="游ゴシック" charset="0"/>
+                        <a:ea typeface="游ゴシック" charset="0"/>
+                        <a:cs typeface="游ゴシック" charset="0"/>
                       </a:endParaRPr>
                     </a:p>
                   </a:txBody>
@@ -5124,16 +5124,16 @@
                           <a:solidFill>
                             <a:srgbClr val="404040"/>
                           </a:solidFill>
-                          <a:latin typeface="Yu Gothic" pitchFamily="34" charset="0"/>
-                          <a:ea typeface="Yu Gothic" pitchFamily="34" charset="-122"/>
-                          <a:cs typeface="Yu Gothic" pitchFamily="34" charset="-120"/>
+                          <a:latin typeface="游ゴシック" pitchFamily="34" charset="0"/>
+                          <a:ea typeface="游ゴシック" pitchFamily="34" charset="-122"/>
+                          <a:cs typeface="游ゴシック" pitchFamily="34" charset="-120"/>
                         </a:rPr>
                         <a:t>ビックリマン × ウルトラマンの公式コラボ。既存の生産・流通ラインに乗るため低リスク・即効で、60周年商戦（2026年度内）に間に合う</a:t>
                       </a:r>
                       <a:endParaRPr lang="en-US" sz="1050" dirty="0">
-                        <a:latin typeface="Yu Gothic" charset="0"/>
-                        <a:ea typeface="Yu Gothic" charset="0"/>
-                        <a:cs typeface="Yu Gothic" charset="0"/>
+                        <a:latin typeface="游ゴシック" charset="0"/>
+                        <a:ea typeface="游ゴシック" charset="0"/>
+                        <a:cs typeface="游ゴシック" charset="0"/>
                       </a:endParaRPr>
                     </a:p>
                   </a:txBody>
@@ -5189,16 +5189,16 @@
                           <a:solidFill>
                             <a:srgbClr val="404040"/>
                           </a:solidFill>
-                          <a:latin typeface="Yu Gothic" pitchFamily="34" charset="0"/>
-                          <a:ea typeface="Yu Gothic" pitchFamily="34" charset="-122"/>
-                          <a:cs typeface="Yu Gothic" pitchFamily="34" charset="-120"/>
+                          <a:latin typeface="游ゴシック" pitchFamily="34" charset="0"/>
+                          <a:ea typeface="游ゴシック" pitchFamily="34" charset="-122"/>
+                          <a:cs typeface="游ゴシック" pitchFamily="34" charset="-120"/>
                         </a:rPr>
                         <a:t>直撃世代の40〜60代はいま可処分所得のピーク。「昼13時、会議前のシュワッチ。」を合言葉に、ビタミン・カフェイン等の機能性素材で〝働く人の変身〟を支える</a:t>
                       </a:r>
                       <a:endParaRPr lang="en-US" sz="1050" dirty="0">
-                        <a:latin typeface="Yu Gothic" charset="0"/>
-                        <a:ea typeface="Yu Gothic" charset="0"/>
-                        <a:cs typeface="Yu Gothic" charset="0"/>
+                        <a:latin typeface="游ゴシック" charset="0"/>
+                        <a:ea typeface="游ゴシック" charset="0"/>
+                        <a:cs typeface="游ゴシック" charset="0"/>
                       </a:endParaRPr>
                     </a:p>
                   </a:txBody>
@@ -5256,16 +5256,16 @@
                           <a:solidFill>
                             <a:srgbClr val="333333"/>
                           </a:solidFill>
-                          <a:latin typeface="Yu Gothic" pitchFamily="34" charset="0"/>
-                          <a:ea typeface="Yu Gothic" pitchFamily="34" charset="-122"/>
-                          <a:cs typeface="Yu Gothic" pitchFamily="34" charset="-120"/>
+                          <a:latin typeface="游ゴシック" pitchFamily="34" charset="0"/>
+                          <a:ea typeface="游ゴシック" pitchFamily="34" charset="-122"/>
+                          <a:cs typeface="游ゴシック" pitchFamily="34" charset="-120"/>
                         </a:rPr>
                         <a:t>役割</a:t>
                       </a:r>
                       <a:endParaRPr lang="en-US" sz="1050" dirty="0">
-                        <a:latin typeface="Yu Gothic" charset="0"/>
-                        <a:ea typeface="Yu Gothic" charset="0"/>
-                        <a:cs typeface="Yu Gothic" charset="0"/>
+                        <a:latin typeface="游ゴシック" charset="0"/>
+                        <a:ea typeface="游ゴシック" charset="0"/>
+                        <a:cs typeface="游ゴシック" charset="0"/>
                       </a:endParaRPr>
                     </a:p>
                   </a:txBody>
@@ -5324,16 +5324,16 @@
                           <a:solidFill>
                             <a:srgbClr val="404040"/>
                           </a:solidFill>
-                          <a:latin typeface="Yu Gothic" pitchFamily="34" charset="0"/>
-                          <a:ea typeface="Yu Gothic" pitchFamily="34" charset="-122"/>
-                          <a:cs typeface="Yu Gothic" pitchFamily="34" charset="-120"/>
+                          <a:latin typeface="游ゴシック" pitchFamily="34" charset="0"/>
+                          <a:ea typeface="游ゴシック" pitchFamily="34" charset="-122"/>
+                          <a:cs typeface="游ゴシック" pitchFamily="34" charset="-120"/>
                         </a:rPr>
                         <a:t>ミャクミャクマンチョコ等で実証済みのコラボ枠で話題化と購買意向データを取得し、本命への橋頭堡とする</a:t>
                       </a:r>
                       <a:endParaRPr lang="en-US" sz="1050" dirty="0">
-                        <a:latin typeface="Yu Gothic" charset="0"/>
-                        <a:ea typeface="Yu Gothic" charset="0"/>
-                        <a:cs typeface="Yu Gothic" charset="0"/>
+                        <a:latin typeface="游ゴシック" charset="0"/>
+                        <a:ea typeface="游ゴシック" charset="0"/>
+                        <a:cs typeface="游ゴシック" charset="0"/>
                       </a:endParaRPr>
                     </a:p>
                   </a:txBody>
@@ -5389,16 +5389,16 @@
                           <a:solidFill>
                             <a:srgbClr val="404040"/>
                           </a:solidFill>
-                          <a:latin typeface="Yu Gothic" pitchFamily="34" charset="0"/>
-                          <a:ea typeface="Yu Gothic" pitchFamily="34" charset="-122"/>
-                          <a:cs typeface="Yu Gothic" pitchFamily="34" charset="-120"/>
+                          <a:latin typeface="游ゴシック" pitchFamily="34" charset="0"/>
+                          <a:ea typeface="游ゴシック" pitchFamily="34" charset="-122"/>
+                          <a:cs typeface="游ゴシック" pitchFamily="34" charset="-120"/>
                         </a:rPr>
                         <a:t>キシリトールで機能性ガム市場を創った御社の勝ち筋を、エンタメ × 機能性で再現する</a:t>
                       </a:r>
                       <a:endParaRPr lang="en-US" sz="1050" dirty="0">
-                        <a:latin typeface="Yu Gothic" charset="0"/>
-                        <a:ea typeface="Yu Gothic" charset="0"/>
-                        <a:cs typeface="Yu Gothic" charset="0"/>
+                        <a:latin typeface="游ゴシック" charset="0"/>
+                        <a:ea typeface="游ゴシック" charset="0"/>
+                        <a:cs typeface="游ゴシック" charset="0"/>
                       </a:endParaRPr>
                     </a:p>
                   </a:txBody>
@@ -5497,9 +5497,9 @@
                 <a:solidFill>
                   <a:srgbClr val="C00000"/>
                 </a:solidFill>
-                <a:latin typeface="Yu Gothic" pitchFamily="34" charset="0"/>
-                <a:ea typeface="Yu Gothic" pitchFamily="34" charset="-122"/>
-                <a:cs typeface="Yu Gothic" pitchFamily="34" charset="-120"/>
+                <a:latin typeface="游ゴシック" pitchFamily="34" charset="0"/>
+                <a:ea typeface="游ゴシック" pitchFamily="34" charset="-122"/>
+                <a:cs typeface="游ゴシック" pitchFamily="34" charset="-120"/>
               </a:rPr>
               <a:t>① </a:t>
             </a:r>
@@ -5511,9 +5511,9 @@
                 <a:solidFill>
                   <a:srgbClr val="404040"/>
                 </a:solidFill>
-                <a:latin typeface="Yu Gothic" pitchFamily="34" charset="0"/>
-                <a:ea typeface="Yu Gothic" pitchFamily="34" charset="-122"/>
-                <a:cs typeface="Yu Gothic" pitchFamily="34" charset="-120"/>
+                <a:latin typeface="游ゴシック" pitchFamily="34" charset="0"/>
+                <a:ea typeface="游ゴシック" pitchFamily="34" charset="-122"/>
+                <a:cs typeface="游ゴシック" pitchFamily="34" charset="-120"/>
               </a:rPr>
               <a:t>意思決定の起点はウルトラマンマンチョコ ── 決断は小さく、学びは速く</a:t>
             </a:r>
@@ -5602,9 +5602,9 @@
                 <a:solidFill>
                   <a:srgbClr val="FFFFFF"/>
                 </a:solidFill>
-                <a:latin typeface="Yu Gothic" pitchFamily="34" charset="0"/>
-                <a:ea typeface="Yu Gothic" pitchFamily="34" charset="-122"/>
-                <a:cs typeface="Yu Gothic" pitchFamily="34" charset="-120"/>
+                <a:latin typeface="游ゴシック" pitchFamily="34" charset="0"/>
+                <a:ea typeface="游ゴシック" pitchFamily="34" charset="-122"/>
+                <a:cs typeface="游ゴシック" pitchFamily="34" charset="-120"/>
               </a:rPr>
               <a:t>5．展開構想</a:t>
             </a:r>
@@ -5661,9 +5661,9 @@
                 <a:solidFill>
                   <a:srgbClr val="595959"/>
                 </a:solidFill>
-                <a:latin typeface="Yu Gothic" pitchFamily="34" charset="0"/>
-                <a:ea typeface="Yu Gothic" pitchFamily="34" charset="-122"/>
-                <a:cs typeface="Yu Gothic" pitchFamily="34" charset="-120"/>
+                <a:latin typeface="游ゴシック" pitchFamily="34" charset="0"/>
+                <a:ea typeface="游ゴシック" pitchFamily="34" charset="-122"/>
+                <a:cs typeface="游ゴシック" pitchFamily="34" charset="-120"/>
               </a:rPr>
               <a:t>極　秘</a:t>
             </a:r>
@@ -5700,9 +5700,9 @@
                 <a:solidFill>
                   <a:srgbClr val="333333"/>
                 </a:solidFill>
-                <a:latin typeface="Yu Gothic" pitchFamily="34" charset="0"/>
-                <a:ea typeface="Yu Gothic" pitchFamily="34" charset="-122"/>
-                <a:cs typeface="Yu Gothic" pitchFamily="34" charset="-120"/>
+                <a:latin typeface="游ゴシック" pitchFamily="34" charset="0"/>
+                <a:ea typeface="游ゴシック" pitchFamily="34" charset="-122"/>
+                <a:cs typeface="游ゴシック" pitchFamily="34" charset="-120"/>
               </a:rPr>
               <a:t>展開ロードマップ ── 60周年から、アジアの定番へ</a:t>
             </a:r>
@@ -5742,9 +5742,9 @@
                 <a:solidFill>
                   <a:srgbClr val="404040"/>
                 </a:solidFill>
-                <a:latin typeface="Yu Gothic" pitchFamily="34" charset="0"/>
-                <a:ea typeface="Yu Gothic" pitchFamily="34" charset="-122"/>
-                <a:cs typeface="Yu Gothic" pitchFamily="34" charset="-120"/>
+                <a:latin typeface="游ゴシック" pitchFamily="34" charset="0"/>
+                <a:ea typeface="游ゴシック" pitchFamily="34" charset="-122"/>
+                <a:cs typeface="游ゴシック" pitchFamily="34" charset="-120"/>
               </a:rPr>
               <a:t>一過性のコラボレーションでは終わらせない。話題化を起点に、カテゴリー宣言、アジア展開へと段階的に深化させる</a:t>
             </a:r>
@@ -5908,16 +5908,16 @@
                           <a:solidFill>
                             <a:srgbClr val="FFFFFF"/>
                           </a:solidFill>
-                          <a:latin typeface="Yu Gothic" pitchFamily="34" charset="0"/>
-                          <a:ea typeface="Yu Gothic" pitchFamily="34" charset="-122"/>
-                          <a:cs typeface="Yu Gothic" pitchFamily="34" charset="-120"/>
+                          <a:latin typeface="游ゴシック" pitchFamily="34" charset="0"/>
+                          <a:ea typeface="游ゴシック" pitchFamily="34" charset="-122"/>
+                          <a:cs typeface="游ゴシック" pitchFamily="34" charset="-120"/>
                         </a:rPr>
                         <a:t>階梯</a:t>
                       </a:r>
                       <a:endParaRPr lang="en-US" sz="1050" dirty="0">
-                        <a:latin typeface="Yu Gothic" charset="0"/>
-                        <a:ea typeface="Yu Gothic" charset="0"/>
-                        <a:cs typeface="Yu Gothic" charset="0"/>
+                        <a:latin typeface="游ゴシック" charset="0"/>
+                        <a:ea typeface="游ゴシック" charset="0"/>
+                        <a:cs typeface="游ゴシック" charset="0"/>
                       </a:endParaRPr>
                     </a:p>
                   </a:txBody>
@@ -5976,16 +5976,16 @@
                           <a:solidFill>
                             <a:srgbClr val="FFFFFF"/>
                           </a:solidFill>
-                          <a:latin typeface="Yu Gothic" pitchFamily="34" charset="0"/>
-                          <a:ea typeface="Yu Gothic" pitchFamily="34" charset="-122"/>
-                          <a:cs typeface="Yu Gothic" pitchFamily="34" charset="-120"/>
+                          <a:latin typeface="游ゴシック" pitchFamily="34" charset="0"/>
+                          <a:ea typeface="游ゴシック" pitchFamily="34" charset="-122"/>
+                          <a:cs typeface="游ゴシック" pitchFamily="34" charset="-120"/>
                         </a:rPr>
                         <a:t>時間軸</a:t>
                       </a:r>
                       <a:endParaRPr lang="en-US" sz="1050" dirty="0">
-                        <a:latin typeface="Yu Gothic" charset="0"/>
-                        <a:ea typeface="Yu Gothic" charset="0"/>
-                        <a:cs typeface="Yu Gothic" charset="0"/>
+                        <a:latin typeface="游ゴシック" charset="0"/>
+                        <a:ea typeface="游ゴシック" charset="0"/>
+                        <a:cs typeface="游ゴシック" charset="0"/>
                       </a:endParaRPr>
                     </a:p>
                   </a:txBody>
@@ -6044,16 +6044,16 @@
                           <a:solidFill>
                             <a:srgbClr val="FFFFFF"/>
                           </a:solidFill>
-                          <a:latin typeface="Yu Gothic" pitchFamily="34" charset="0"/>
-                          <a:ea typeface="Yu Gothic" pitchFamily="34" charset="-122"/>
-                          <a:cs typeface="Yu Gothic" pitchFamily="34" charset="-120"/>
+                          <a:latin typeface="游ゴシック" pitchFamily="34" charset="0"/>
+                          <a:ea typeface="游ゴシック" pitchFamily="34" charset="-122"/>
+                          <a:cs typeface="游ゴシック" pitchFamily="34" charset="-120"/>
                         </a:rPr>
                         <a:t>概要</a:t>
                       </a:r>
                       <a:endParaRPr lang="en-US" sz="1050" dirty="0">
-                        <a:latin typeface="Yu Gothic" charset="0"/>
-                        <a:ea typeface="Yu Gothic" charset="0"/>
-                        <a:cs typeface="Yu Gothic" charset="0"/>
+                        <a:latin typeface="游ゴシック" charset="0"/>
+                        <a:ea typeface="游ゴシック" charset="0"/>
+                        <a:cs typeface="游ゴシック" charset="0"/>
                       </a:endParaRPr>
                     </a:p>
                   </a:txBody>
@@ -6114,9 +6114,9 @@
                           <a:solidFill>
                             <a:srgbClr val="C00000"/>
                           </a:solidFill>
-                          <a:latin typeface="Yu Gothic" pitchFamily="34" charset="0"/>
-                          <a:ea typeface="Yu Gothic" pitchFamily="34" charset="-122"/>
-                          <a:cs typeface="Yu Gothic" pitchFamily="34" charset="-120"/>
+                          <a:latin typeface="游ゴシック" pitchFamily="34" charset="0"/>
+                          <a:ea typeface="游ゴシック" pitchFamily="34" charset="-122"/>
+                          <a:cs typeface="游ゴシック" pitchFamily="34" charset="-120"/>
                         </a:rPr>
                         <a:t>① </a:t>
                       </a:r>
@@ -6128,16 +6128,16 @@
                           <a:solidFill>
                             <a:srgbClr val="333333"/>
                           </a:solidFill>
-                          <a:latin typeface="Yu Gothic" pitchFamily="34" charset="0"/>
-                          <a:ea typeface="Yu Gothic" pitchFamily="34" charset="-122"/>
-                          <a:cs typeface="Yu Gothic" pitchFamily="34" charset="-120"/>
+                          <a:latin typeface="游ゴシック" pitchFamily="34" charset="0"/>
+                          <a:ea typeface="游ゴシック" pitchFamily="34" charset="-122"/>
+                          <a:cs typeface="游ゴシック" pitchFamily="34" charset="-120"/>
                         </a:rPr>
                         <a:t>話題化</a:t>
                       </a:r>
                       <a:endParaRPr lang="en-US" sz="1050" dirty="0">
-                        <a:latin typeface="Yu Gothic" charset="0"/>
-                        <a:ea typeface="Yu Gothic" charset="0"/>
-                        <a:cs typeface="Yu Gothic" charset="0"/>
+                        <a:latin typeface="游ゴシック" charset="0"/>
+                        <a:ea typeface="游ゴシック" charset="0"/>
+                        <a:cs typeface="游ゴシック" charset="0"/>
                       </a:endParaRPr>
                     </a:p>
                   </a:txBody>
@@ -6193,16 +6193,16 @@
                           <a:solidFill>
                             <a:srgbClr val="17828F"/>
                           </a:solidFill>
-                          <a:latin typeface="Yu Gothic" pitchFamily="34" charset="0"/>
-                          <a:ea typeface="Yu Gothic" pitchFamily="34" charset="-122"/>
-                          <a:cs typeface="Yu Gothic" pitchFamily="34" charset="-120"/>
+                          <a:latin typeface="游ゴシック" pitchFamily="34" charset="0"/>
+                          <a:ea typeface="游ゴシック" pitchFamily="34" charset="-122"/>
+                          <a:cs typeface="游ゴシック" pitchFamily="34" charset="-120"/>
                         </a:rPr>
                         <a:t>2026年度下期</a:t>
                       </a:r>
                       <a:endParaRPr lang="en-US" sz="1050" dirty="0">
-                        <a:latin typeface="Yu Gothic" charset="0"/>
-                        <a:ea typeface="Yu Gothic" charset="0"/>
-                        <a:cs typeface="Yu Gothic" charset="0"/>
+                        <a:latin typeface="游ゴシック" charset="0"/>
+                        <a:ea typeface="游ゴシック" charset="0"/>
+                        <a:cs typeface="游ゴシック" charset="0"/>
                       </a:endParaRPr>
                     </a:p>
                   </a:txBody>
@@ -6261,16 +6261,16 @@
                           <a:solidFill>
                             <a:srgbClr val="404040"/>
                           </a:solidFill>
-                          <a:latin typeface="Yu Gothic" pitchFamily="34" charset="0"/>
-                          <a:ea typeface="Yu Gothic" pitchFamily="34" charset="-122"/>
-                          <a:cs typeface="Yu Gothic" pitchFamily="34" charset="-120"/>
+                          <a:latin typeface="游ゴシック" pitchFamily="34" charset="0"/>
+                          <a:ea typeface="游ゴシック" pitchFamily="34" charset="-122"/>
+                          <a:cs typeface="游ゴシック" pitchFamily="34" charset="-120"/>
                         </a:rPr>
                         <a:t>『ウルトラマンマンチョコ』を60周年商戦に投入。半世紀ぶり再タッグを共同発表し、購買意向・ファン層データを取得する</a:t>
                       </a:r>
                       <a:endParaRPr lang="en-US" sz="1050" dirty="0">
-                        <a:latin typeface="Yu Gothic" charset="0"/>
-                        <a:ea typeface="Yu Gothic" charset="0"/>
-                        <a:cs typeface="Yu Gothic" charset="0"/>
+                        <a:latin typeface="游ゴシック" charset="0"/>
+                        <a:ea typeface="游ゴシック" charset="0"/>
+                        <a:cs typeface="游ゴシック" charset="0"/>
                       </a:endParaRPr>
                     </a:p>
                   </a:txBody>
@@ -6328,9 +6328,9 @@
                           <a:solidFill>
                             <a:srgbClr val="C00000"/>
                           </a:solidFill>
-                          <a:latin typeface="Yu Gothic" pitchFamily="34" charset="0"/>
-                          <a:ea typeface="Yu Gothic" pitchFamily="34" charset="-122"/>
-                          <a:cs typeface="Yu Gothic" pitchFamily="34" charset="-120"/>
+                          <a:latin typeface="游ゴシック" pitchFamily="34" charset="0"/>
+                          <a:ea typeface="游ゴシック" pitchFamily="34" charset="-122"/>
+                          <a:cs typeface="游ゴシック" pitchFamily="34" charset="-120"/>
                         </a:rPr>
                         <a:t>② </a:t>
                       </a:r>
@@ -6342,16 +6342,16 @@
                           <a:solidFill>
                             <a:srgbClr val="333333"/>
                           </a:solidFill>
-                          <a:latin typeface="Yu Gothic" pitchFamily="34" charset="0"/>
-                          <a:ea typeface="Yu Gothic" pitchFamily="34" charset="-122"/>
-                          <a:cs typeface="Yu Gothic" pitchFamily="34" charset="-120"/>
+                          <a:latin typeface="游ゴシック" pitchFamily="34" charset="0"/>
+                          <a:ea typeface="游ゴシック" pitchFamily="34" charset="-122"/>
+                          <a:cs typeface="游ゴシック" pitchFamily="34" charset="-120"/>
                         </a:rPr>
                         <a:t>カテゴリー宣言</a:t>
                       </a:r>
                       <a:endParaRPr lang="en-US" sz="1050" dirty="0">
-                        <a:latin typeface="Yu Gothic" charset="0"/>
-                        <a:ea typeface="Yu Gothic" charset="0"/>
-                        <a:cs typeface="Yu Gothic" charset="0"/>
+                        <a:latin typeface="游ゴシック" charset="0"/>
+                        <a:ea typeface="游ゴシック" charset="0"/>
+                        <a:cs typeface="游ゴシック" charset="0"/>
                       </a:endParaRPr>
                     </a:p>
                   </a:txBody>
@@ -6407,16 +6407,16 @@
                           <a:solidFill>
                             <a:srgbClr val="404040"/>
                           </a:solidFill>
-                          <a:latin typeface="Yu Gothic" pitchFamily="34" charset="0"/>
-                          <a:ea typeface="Yu Gothic" pitchFamily="34" charset="-122"/>
-                          <a:cs typeface="Yu Gothic" pitchFamily="34" charset="-120"/>
+                          <a:latin typeface="游ゴシック" pitchFamily="34" charset="0"/>
+                          <a:ea typeface="游ゴシック" pitchFamily="34" charset="-122"/>
+                          <a:cs typeface="游ゴシック" pitchFamily="34" charset="-120"/>
                         </a:rPr>
                         <a:t>2027年</a:t>
                       </a:r>
                       <a:endParaRPr lang="en-US" sz="1050" dirty="0">
-                        <a:latin typeface="Yu Gothic" charset="0"/>
-                        <a:ea typeface="Yu Gothic" charset="0"/>
-                        <a:cs typeface="Yu Gothic" charset="0"/>
+                        <a:latin typeface="游ゴシック" charset="0"/>
+                        <a:ea typeface="游ゴシック" charset="0"/>
+                        <a:cs typeface="游ゴシック" charset="0"/>
                       </a:endParaRPr>
                     </a:p>
                   </a:txBody>
@@ -6472,16 +6472,16 @@
                           <a:solidFill>
                             <a:srgbClr val="404040"/>
                           </a:solidFill>
-                          <a:latin typeface="Yu Gothic" pitchFamily="34" charset="0"/>
-                          <a:ea typeface="Yu Gothic" pitchFamily="34" charset="-122"/>
-                          <a:cs typeface="Yu Gothic" pitchFamily="34" charset="-120"/>
+                          <a:latin typeface="游ゴシック" pitchFamily="34" charset="0"/>
+                          <a:ea typeface="游ゴシック" pitchFamily="34" charset="-122"/>
+                          <a:cs typeface="游ゴシック" pitchFamily="34" charset="-120"/>
                         </a:rPr>
                         <a:t>『ULTRA 3MIN.』全国発売。新TVシリーズ・アプリと連動し、「変身菓子」カテゴリーを市場に宣言。売場の定番棚を獲得する</a:t>
                       </a:r>
                       <a:endParaRPr lang="en-US" sz="1050" dirty="0">
-                        <a:latin typeface="Yu Gothic" charset="0"/>
-                        <a:ea typeface="Yu Gothic" charset="0"/>
-                        <a:cs typeface="Yu Gothic" charset="0"/>
+                        <a:latin typeface="游ゴシック" charset="0"/>
+                        <a:ea typeface="游ゴシック" charset="0"/>
+                        <a:cs typeface="游ゴシック" charset="0"/>
                       </a:endParaRPr>
                     </a:p>
                   </a:txBody>
@@ -6539,9 +6539,9 @@
                           <a:solidFill>
                             <a:srgbClr val="C00000"/>
                           </a:solidFill>
-                          <a:latin typeface="Yu Gothic" pitchFamily="34" charset="0"/>
-                          <a:ea typeface="Yu Gothic" pitchFamily="34" charset="-122"/>
-                          <a:cs typeface="Yu Gothic" pitchFamily="34" charset="-120"/>
+                          <a:latin typeface="游ゴシック" pitchFamily="34" charset="0"/>
+                          <a:ea typeface="游ゴシック" pitchFamily="34" charset="-122"/>
+                          <a:cs typeface="游ゴシック" pitchFamily="34" charset="-120"/>
                         </a:rPr>
                         <a:t>③ </a:t>
                       </a:r>
@@ -6553,16 +6553,16 @@
                           <a:solidFill>
                             <a:srgbClr val="333333"/>
                           </a:solidFill>
-                          <a:latin typeface="Yu Gothic" pitchFamily="34" charset="0"/>
-                          <a:ea typeface="Yu Gothic" pitchFamily="34" charset="-122"/>
-                          <a:cs typeface="Yu Gothic" pitchFamily="34" charset="-120"/>
+                          <a:latin typeface="游ゴシック" pitchFamily="34" charset="0"/>
+                          <a:ea typeface="游ゴシック" pitchFamily="34" charset="-122"/>
+                          <a:cs typeface="游ゴシック" pitchFamily="34" charset="-120"/>
                         </a:rPr>
                         <a:t>アジア展開</a:t>
                       </a:r>
                       <a:endParaRPr lang="en-US" sz="1050" dirty="0">
-                        <a:latin typeface="Yu Gothic" charset="0"/>
-                        <a:ea typeface="Yu Gothic" charset="0"/>
-                        <a:cs typeface="Yu Gothic" charset="0"/>
+                        <a:latin typeface="游ゴシック" charset="0"/>
+                        <a:ea typeface="游ゴシック" charset="0"/>
+                        <a:cs typeface="游ゴシック" charset="0"/>
                       </a:endParaRPr>
                     </a:p>
                   </a:txBody>
@@ -6618,16 +6618,16 @@
                           <a:solidFill>
                             <a:srgbClr val="404040"/>
                           </a:solidFill>
-                          <a:latin typeface="Yu Gothic" pitchFamily="34" charset="0"/>
-                          <a:ea typeface="Yu Gothic" pitchFamily="34" charset="-122"/>
-                          <a:cs typeface="Yu Gothic" pitchFamily="34" charset="-120"/>
+                          <a:latin typeface="游ゴシック" pitchFamily="34" charset="0"/>
+                          <a:ea typeface="游ゴシック" pitchFamily="34" charset="-122"/>
+                          <a:cs typeface="游ゴシック" pitchFamily="34" charset="-120"/>
                         </a:rPr>
                         <a:t>2028年〜</a:t>
                       </a:r>
                       <a:endParaRPr lang="en-US" sz="1050" dirty="0">
-                        <a:latin typeface="Yu Gothic" charset="0"/>
-                        <a:ea typeface="Yu Gothic" charset="0"/>
-                        <a:cs typeface="Yu Gothic" charset="0"/>
+                        <a:latin typeface="游ゴシック" charset="0"/>
+                        <a:ea typeface="游ゴシック" charset="0"/>
+                        <a:cs typeface="游ゴシック" charset="0"/>
                       </a:endParaRPr>
                     </a:p>
                   </a:txBody>
@@ -6683,16 +6683,16 @@
                           <a:solidFill>
                             <a:srgbClr val="404040"/>
                           </a:solidFill>
-                          <a:latin typeface="Yu Gothic" pitchFamily="34" charset="0"/>
-                          <a:ea typeface="Yu Gothic" pitchFamily="34" charset="-122"/>
-                          <a:cs typeface="Yu Gothic" pitchFamily="34" charset="-120"/>
+                          <a:latin typeface="游ゴシック" pitchFamily="34" charset="0"/>
+                          <a:ea typeface="游ゴシック" pitchFamily="34" charset="-122"/>
+                          <a:cs typeface="游ゴシック" pitchFamily="34" charset="-120"/>
                         </a:rPr>
                         <a:t>御社のアジア製造・流通網 × ウルトラマンの中国・東南アジア人気で海外展開。『ULTRA CHARGE』で大人市場にも拡張する</a:t>
                       </a:r>
                       <a:endParaRPr lang="en-US" sz="1050" dirty="0">
-                        <a:latin typeface="Yu Gothic" charset="0"/>
-                        <a:ea typeface="Yu Gothic" charset="0"/>
-                        <a:cs typeface="Yu Gothic" charset="0"/>
+                        <a:latin typeface="游ゴシック" charset="0"/>
+                        <a:ea typeface="游ゴシック" charset="0"/>
+                        <a:cs typeface="游ゴシック" charset="0"/>
                       </a:endParaRPr>
                     </a:p>
                   </a:txBody>
@@ -6791,9 +6791,9 @@
                 <a:solidFill>
                   <a:srgbClr val="C00000"/>
                 </a:solidFill>
-                <a:latin typeface="Yu Gothic" pitchFamily="34" charset="0"/>
-                <a:ea typeface="Yu Gothic" pitchFamily="34" charset="-122"/>
-                <a:cs typeface="Yu Gothic" pitchFamily="34" charset="-120"/>
+                <a:latin typeface="游ゴシック" pitchFamily="34" charset="0"/>
+                <a:ea typeface="游ゴシック" pitchFamily="34" charset="-122"/>
+                <a:cs typeface="游ゴシック" pitchFamily="34" charset="-120"/>
               </a:rPr>
               <a:t>① </a:t>
             </a:r>
@@ -6805,9 +6805,9 @@
                 <a:solidFill>
                   <a:srgbClr val="404040"/>
                 </a:solidFill>
-                <a:latin typeface="Yu Gothic" pitchFamily="34" charset="0"/>
-                <a:ea typeface="Yu Gothic" pitchFamily="34" charset="-122"/>
-                <a:cs typeface="Yu Gothic" pitchFamily="34" charset="-120"/>
+                <a:latin typeface="游ゴシック" pitchFamily="34" charset="0"/>
+                <a:ea typeface="游ゴシック" pitchFamily="34" charset="-122"/>
+                <a:cs typeface="游ゴシック" pitchFamily="34" charset="-120"/>
               </a:rPr>
               <a:t>が意思決定の起点 ── 目標は発売初年度で「変身菓子」の売場定番化、5年でビックリマン級のカテゴリー確立</a:t>
             </a:r>
@@ -6896,9 +6896,9 @@
                 <a:solidFill>
                   <a:srgbClr val="FFFFFF"/>
                 </a:solidFill>
-                <a:latin typeface="Yu Gothic" pitchFamily="34" charset="0"/>
-                <a:ea typeface="Yu Gothic" pitchFamily="34" charset="-122"/>
-                <a:cs typeface="Yu Gothic" pitchFamily="34" charset="-120"/>
+                <a:latin typeface="游ゴシック" pitchFamily="34" charset="0"/>
+                <a:ea typeface="游ゴシック" pitchFamily="34" charset="-122"/>
+                <a:cs typeface="游ゴシック" pitchFamily="34" charset="-120"/>
               </a:rPr>
               <a:t>5．展開構想</a:t>
             </a:r>
@@ -6955,9 +6955,9 @@
                 <a:solidFill>
                   <a:srgbClr val="595959"/>
                 </a:solidFill>
-                <a:latin typeface="Yu Gothic" pitchFamily="34" charset="0"/>
-                <a:ea typeface="Yu Gothic" pitchFamily="34" charset="-122"/>
-                <a:cs typeface="Yu Gothic" pitchFamily="34" charset="-120"/>
+                <a:latin typeface="游ゴシック" pitchFamily="34" charset="0"/>
+                <a:ea typeface="游ゴシック" pitchFamily="34" charset="-122"/>
+                <a:cs typeface="游ゴシック" pitchFamily="34" charset="-120"/>
               </a:rPr>
               <a:t>極　秘</a:t>
             </a:r>
@@ -6994,9 +6994,9 @@
                 <a:solidFill>
                   <a:srgbClr val="333333"/>
                 </a:solidFill>
-                <a:latin typeface="Yu Gothic" pitchFamily="34" charset="0"/>
-                <a:ea typeface="Yu Gothic" pitchFamily="34" charset="-122"/>
-                <a:cs typeface="Yu Gothic" pitchFamily="34" charset="-120"/>
+                <a:latin typeface="游ゴシック" pitchFamily="34" charset="0"/>
+                <a:ea typeface="游ゴシック" pitchFamily="34" charset="-122"/>
+                <a:cs typeface="游ゴシック" pitchFamily="34" charset="-120"/>
               </a:rPr>
               <a:t>両社の持ち味と事業スキーム</a:t>
             </a:r>
@@ -7036,9 +7036,9 @@
                 <a:solidFill>
                   <a:srgbClr val="404040"/>
                 </a:solidFill>
-                <a:latin typeface="Yu Gothic" pitchFamily="34" charset="0"/>
-                <a:ea typeface="Yu Gothic" pitchFamily="34" charset="-122"/>
-                <a:cs typeface="Yu Gothic" pitchFamily="34" charset="-120"/>
+                <a:latin typeface="游ゴシック" pitchFamily="34" charset="0"/>
+                <a:ea typeface="游ゴシック" pitchFamily="34" charset="-122"/>
+                <a:cs typeface="游ゴシック" pitchFamily="34" charset="-120"/>
               </a:rPr>
               <a:t>ライセンス＋共同マーケティング契約を想定。世界観と映像は円谷プロが、商品と売場はロッテが主導する</a:t>
             </a:r>
@@ -7198,9 +7198,9 @@
                         <a:buNone/>
                       </a:pPr>
                       <a:endParaRPr lang="en-US" sz="1050" dirty="0">
-                        <a:latin typeface="Yu Gothic" charset="0"/>
-                        <a:ea typeface="Yu Gothic" charset="0"/>
-                        <a:cs typeface="Yu Gothic" charset="0"/>
+                        <a:latin typeface="游ゴシック" charset="0"/>
+                        <a:ea typeface="游ゴシック" charset="0"/>
+                        <a:cs typeface="游ゴシック" charset="0"/>
                       </a:endParaRPr>
                     </a:p>
                   </a:txBody>
@@ -7259,16 +7259,16 @@
                           <a:solidFill>
                             <a:srgbClr val="FFFFFF"/>
                           </a:solidFill>
-                          <a:latin typeface="Yu Gothic" pitchFamily="34" charset="0"/>
-                          <a:ea typeface="Yu Gothic" pitchFamily="34" charset="-122"/>
-                          <a:cs typeface="Yu Gothic" pitchFamily="34" charset="-120"/>
+                          <a:latin typeface="游ゴシック" pitchFamily="34" charset="0"/>
+                          <a:ea typeface="游ゴシック" pitchFamily="34" charset="-122"/>
+                          <a:cs typeface="游ゴシック" pitchFamily="34" charset="-120"/>
                         </a:rPr>
                         <a:t>円谷プロダクション</a:t>
                       </a:r>
                       <a:endParaRPr lang="en-US" sz="1050" dirty="0">
-                        <a:latin typeface="Yu Gothic" charset="0"/>
-                        <a:ea typeface="Yu Gothic" charset="0"/>
-                        <a:cs typeface="Yu Gothic" charset="0"/>
+                        <a:latin typeface="游ゴシック" charset="0"/>
+                        <a:ea typeface="游ゴシック" charset="0"/>
+                        <a:cs typeface="游ゴシック" charset="0"/>
                       </a:endParaRPr>
                     </a:p>
                   </a:txBody>
@@ -7327,16 +7327,16 @@
                           <a:solidFill>
                             <a:srgbClr val="FFFFFF"/>
                           </a:solidFill>
-                          <a:latin typeface="Yu Gothic" pitchFamily="34" charset="0"/>
-                          <a:ea typeface="Yu Gothic" pitchFamily="34" charset="-122"/>
-                          <a:cs typeface="Yu Gothic" pitchFamily="34" charset="-120"/>
+                          <a:latin typeface="游ゴシック" pitchFamily="34" charset="0"/>
+                          <a:ea typeface="游ゴシック" pitchFamily="34" charset="-122"/>
+                          <a:cs typeface="游ゴシック" pitchFamily="34" charset="-120"/>
                         </a:rPr>
                         <a:t>ロッテ</a:t>
                       </a:r>
                       <a:endParaRPr lang="en-US" sz="1050" dirty="0">
-                        <a:latin typeface="Yu Gothic" charset="0"/>
-                        <a:ea typeface="Yu Gothic" charset="0"/>
-                        <a:cs typeface="Yu Gothic" charset="0"/>
+                        <a:latin typeface="游ゴシック" charset="0"/>
+                        <a:ea typeface="游ゴシック" charset="0"/>
+                        <a:cs typeface="游ゴシック" charset="0"/>
                       </a:endParaRPr>
                     </a:p>
                   </a:txBody>
@@ -7397,16 +7397,16 @@
                           <a:solidFill>
                             <a:srgbClr val="333333"/>
                           </a:solidFill>
-                          <a:latin typeface="Yu Gothic" pitchFamily="34" charset="0"/>
-                          <a:ea typeface="Yu Gothic" pitchFamily="34" charset="-122"/>
-                          <a:cs typeface="Yu Gothic" pitchFamily="34" charset="-120"/>
+                          <a:latin typeface="游ゴシック" pitchFamily="34" charset="0"/>
+                          <a:ea typeface="游ゴシック" pitchFamily="34" charset="-122"/>
+                          <a:cs typeface="游ゴシック" pitchFamily="34" charset="-120"/>
                         </a:rPr>
                         <a:t>資産</a:t>
                       </a:r>
                       <a:endParaRPr lang="en-US" sz="1050" dirty="0">
-                        <a:latin typeface="Yu Gothic" charset="0"/>
-                        <a:ea typeface="Yu Gothic" charset="0"/>
-                        <a:cs typeface="Yu Gothic" charset="0"/>
+                        <a:latin typeface="游ゴシック" charset="0"/>
+                        <a:ea typeface="游ゴシック" charset="0"/>
+                        <a:cs typeface="游ゴシック" charset="0"/>
                       </a:endParaRPr>
                     </a:p>
                   </a:txBody>
@@ -7465,16 +7465,16 @@
                           <a:solidFill>
                             <a:srgbClr val="404040"/>
                           </a:solidFill>
-                          <a:latin typeface="Yu Gothic" pitchFamily="34" charset="0"/>
-                          <a:ea typeface="Yu Gothic" pitchFamily="34" charset="-122"/>
-                          <a:cs typeface="Yu Gothic" pitchFamily="34" charset="-120"/>
+                          <a:latin typeface="游ゴシック" pitchFamily="34" charset="0"/>
+                          <a:ea typeface="游ゴシック" pitchFamily="34" charset="-122"/>
+                          <a:cs typeface="游ゴシック" pitchFamily="34" charset="-120"/>
                         </a:rPr>
                         <a:t>60年のIP・数百体のキャラクター資産、『ウルトラマンテオ』等の映像・イベント、国内外のファンダムとグローバル配信網</a:t>
                       </a:r>
                       <a:endParaRPr lang="en-US" sz="1050" dirty="0">
-                        <a:latin typeface="Yu Gothic" charset="0"/>
-                        <a:ea typeface="Yu Gothic" charset="0"/>
-                        <a:cs typeface="Yu Gothic" charset="0"/>
+                        <a:latin typeface="游ゴシック" charset="0"/>
+                        <a:ea typeface="游ゴシック" charset="0"/>
+                        <a:cs typeface="游ゴシック" charset="0"/>
                       </a:endParaRPr>
                     </a:p>
                   </a:txBody>
@@ -7530,16 +7530,16 @@
                           <a:solidFill>
                             <a:srgbClr val="404040"/>
                           </a:solidFill>
-                          <a:latin typeface="Yu Gothic" pitchFamily="34" charset="0"/>
-                          <a:ea typeface="Yu Gothic" pitchFamily="34" charset="-122"/>
-                          <a:cs typeface="Yu Gothic" pitchFamily="34" charset="-120"/>
+                          <a:latin typeface="游ゴシック" pitchFamily="34" charset="0"/>
+                          <a:ea typeface="游ゴシック" pitchFamily="34" charset="-122"/>
+                          <a:cs typeface="游ゴシック" pitchFamily="34" charset="-120"/>
                         </a:rPr>
                         <a:t>チョコ・ガム・グミ・アイスの総合開発力、噛むこと研究・キシリトールの機能性知見、国内小売の棚とアジアの流通網</a:t>
                       </a:r>
                       <a:endParaRPr lang="en-US" sz="1050" dirty="0">
-                        <a:latin typeface="Yu Gothic" charset="0"/>
-                        <a:ea typeface="Yu Gothic" charset="0"/>
-                        <a:cs typeface="Yu Gothic" charset="0"/>
+                        <a:latin typeface="游ゴシック" charset="0"/>
+                        <a:ea typeface="游ゴシック" charset="0"/>
+                        <a:cs typeface="游ゴシック" charset="0"/>
                       </a:endParaRPr>
                     </a:p>
                   </a:txBody>
@@ -7597,16 +7597,16 @@
                           <a:solidFill>
                             <a:srgbClr val="333333"/>
                           </a:solidFill>
-                          <a:latin typeface="Yu Gothic" pitchFamily="34" charset="0"/>
-                          <a:ea typeface="Yu Gothic" pitchFamily="34" charset="-122"/>
-                          <a:cs typeface="Yu Gothic" pitchFamily="34" charset="-120"/>
+                          <a:latin typeface="游ゴシック" pitchFamily="34" charset="0"/>
+                          <a:ea typeface="游ゴシック" pitchFamily="34" charset="-122"/>
+                          <a:cs typeface="游ゴシック" pitchFamily="34" charset="-120"/>
                         </a:rPr>
                         <a:t>主導領域</a:t>
                       </a:r>
                       <a:endParaRPr lang="en-US" sz="1050" dirty="0">
-                        <a:latin typeface="Yu Gothic" charset="0"/>
-                        <a:ea typeface="Yu Gothic" charset="0"/>
-                        <a:cs typeface="Yu Gothic" charset="0"/>
+                        <a:latin typeface="游ゴシック" charset="0"/>
+                        <a:ea typeface="游ゴシック" charset="0"/>
+                        <a:cs typeface="游ゴシック" charset="0"/>
                       </a:endParaRPr>
                     </a:p>
                   </a:txBody>
@@ -7665,16 +7665,16 @@
                           <a:solidFill>
                             <a:srgbClr val="404040"/>
                           </a:solidFill>
-                          <a:latin typeface="Yu Gothic" pitchFamily="34" charset="0"/>
-                          <a:ea typeface="Yu Gothic" pitchFamily="34" charset="-122"/>
-                          <a:cs typeface="Yu Gothic" pitchFamily="34" charset="-120"/>
+                          <a:latin typeface="游ゴシック" pitchFamily="34" charset="0"/>
+                          <a:ea typeface="游ゴシック" pitchFamily="34" charset="-122"/>
+                          <a:cs typeface="游ゴシック" pitchFamily="34" charset="-120"/>
                         </a:rPr>
                         <a:t>世界観・デザインの全面監修、映像・アプリ・イベント連動、60周年公式商品認定</a:t>
                       </a:r>
                       <a:endParaRPr lang="en-US" sz="1050" dirty="0">
-                        <a:latin typeface="Yu Gothic" charset="0"/>
-                        <a:ea typeface="Yu Gothic" charset="0"/>
-                        <a:cs typeface="Yu Gothic" charset="0"/>
+                        <a:latin typeface="游ゴシック" charset="0"/>
+                        <a:ea typeface="游ゴシック" charset="0"/>
+                        <a:cs typeface="游ゴシック" charset="0"/>
                       </a:endParaRPr>
                     </a:p>
                   </a:txBody>
@@ -7730,16 +7730,16 @@
                           <a:solidFill>
                             <a:srgbClr val="404040"/>
                           </a:solidFill>
-                          <a:latin typeface="Yu Gothic" pitchFamily="34" charset="0"/>
-                          <a:ea typeface="Yu Gothic" pitchFamily="34" charset="-122"/>
-                          <a:cs typeface="Yu Gothic" pitchFamily="34" charset="-120"/>
+                          <a:latin typeface="游ゴシック" pitchFamily="34" charset="0"/>
+                          <a:ea typeface="游ゴシック" pitchFamily="34" charset="-122"/>
+                          <a:cs typeface="游ゴシック" pitchFamily="34" charset="-120"/>
                         </a:rPr>
                         <a:t>商品開発・製造・品質管理、流通・売場獲得、機能性表現のエビデンス設計</a:t>
                       </a:r>
                       <a:endParaRPr lang="en-US" sz="1050" dirty="0">
-                        <a:latin typeface="Yu Gothic" charset="0"/>
-                        <a:ea typeface="Yu Gothic" charset="0"/>
-                        <a:cs typeface="Yu Gothic" charset="0"/>
+                        <a:latin typeface="游ゴシック" charset="0"/>
+                        <a:ea typeface="游ゴシック" charset="0"/>
+                        <a:cs typeface="游ゴシック" charset="0"/>
                       </a:endParaRPr>
                     </a:p>
                   </a:txBody>
@@ -7841,9 +7841,9 @@
                 <a:solidFill>
                   <a:srgbClr val="7A4521"/>
                 </a:solidFill>
-                <a:latin typeface="Yu Gothic" pitchFamily="34" charset="0"/>
-                <a:ea typeface="Yu Gothic" pitchFamily="34" charset="-122"/>
-                <a:cs typeface="Yu Gothic" pitchFamily="34" charset="-120"/>
+                <a:latin typeface="游ゴシック" pitchFamily="34" charset="0"/>
+                <a:ea typeface="游ゴシック" pitchFamily="34" charset="-122"/>
+                <a:cs typeface="游ゴシック" pitchFamily="34" charset="-120"/>
               </a:rPr>
               <a:t>スキーム案：</a:t>
             </a:r>
@@ -7855,9 +7855,9 @@
                 <a:solidFill>
                   <a:srgbClr val="404040"/>
                 </a:solidFill>
-                <a:latin typeface="Yu Gothic" pitchFamily="34" charset="0"/>
-                <a:ea typeface="Yu Gothic" pitchFamily="34" charset="-122"/>
-                <a:cs typeface="Yu Gothic" pitchFamily="34" charset="-120"/>
+                <a:latin typeface="游ゴシック" pitchFamily="34" charset="0"/>
+                <a:ea typeface="游ゴシック" pitchFamily="34" charset="-122"/>
+                <a:cs typeface="游ゴシック" pitchFamily="34" charset="-120"/>
               </a:rPr>
               <a:t>ライセンス＋共同マーケティング契約。詳細条件（料率・独占範囲・地域）は次回ワークショップにて協議したい</a:t>
             </a:r>
@@ -7894,9 +7894,9 @@
                 <a:solidFill>
                   <a:srgbClr val="808080"/>
                 </a:solidFill>
-                <a:latin typeface="Yu Gothic" pitchFamily="34" charset="0"/>
-                <a:ea typeface="Yu Gothic" pitchFamily="34" charset="-122"/>
-                <a:cs typeface="Yu Gothic" pitchFamily="34" charset="-120"/>
+                <a:latin typeface="游ゴシック" pitchFamily="34" charset="0"/>
+                <a:ea typeface="游ゴシック" pitchFamily="34" charset="-122"/>
+                <a:cs typeface="游ゴシック" pitchFamily="34" charset="-120"/>
               </a:rPr>
               <a:t>※ 両社とも同族経営の危機をプロ経営で再生した会社である ── 「新しい体制の旗艦プロジェクト」として社内を動かす物語を共有できる</a:t>
             </a:r>
@@ -7985,9 +7985,9 @@
                 <a:solidFill>
                   <a:srgbClr val="FFFFFF"/>
                 </a:solidFill>
-                <a:latin typeface="Yu Gothic" pitchFamily="34" charset="0"/>
-                <a:ea typeface="Yu Gothic" pitchFamily="34" charset="-122"/>
-                <a:cs typeface="Yu Gothic" pitchFamily="34" charset="-120"/>
+                <a:latin typeface="游ゴシック" pitchFamily="34" charset="0"/>
+                <a:ea typeface="游ゴシック" pitchFamily="34" charset="-122"/>
+                <a:cs typeface="游ゴシック" pitchFamily="34" charset="-120"/>
               </a:rPr>
               <a:t>5．展開構想</a:t>
             </a:r>
@@ -8044,9 +8044,9 @@
                 <a:solidFill>
                   <a:srgbClr val="595959"/>
                 </a:solidFill>
-                <a:latin typeface="Yu Gothic" pitchFamily="34" charset="0"/>
-                <a:ea typeface="Yu Gothic" pitchFamily="34" charset="-122"/>
-                <a:cs typeface="Yu Gothic" pitchFamily="34" charset="-120"/>
+                <a:latin typeface="游ゴシック" pitchFamily="34" charset="0"/>
+                <a:ea typeface="游ゴシック" pitchFamily="34" charset="-122"/>
+                <a:cs typeface="游ゴシック" pitchFamily="34" charset="-120"/>
               </a:rPr>
               <a:t>極　秘</a:t>
             </a:r>
@@ -8083,9 +8083,9 @@
                 <a:solidFill>
                   <a:srgbClr val="333333"/>
                 </a:solidFill>
-                <a:latin typeface="Yu Gothic" pitchFamily="34" charset="0"/>
-                <a:ea typeface="Yu Gothic" pitchFamily="34" charset="-122"/>
-                <a:cs typeface="Yu Gothic" pitchFamily="34" charset="-120"/>
+                <a:latin typeface="游ゴシック" pitchFamily="34" charset="0"/>
+                <a:ea typeface="游ゴシック" pitchFamily="34" charset="-122"/>
+                <a:cs typeface="游ゴシック" pitchFamily="34" charset="-120"/>
               </a:rPr>
               <a:t>両社相補マトリクス ── 片方では作れないカテゴリー</a:t>
             </a:r>
@@ -8125,9 +8125,9 @@
                 <a:solidFill>
                   <a:srgbClr val="404040"/>
                 </a:solidFill>
-                <a:latin typeface="Yu Gothic" pitchFamily="34" charset="0"/>
-                <a:ea typeface="Yu Gothic" pitchFamily="34" charset="-122"/>
-                <a:cs typeface="Yu Gothic" pitchFamily="34" charset="-120"/>
+                <a:latin typeface="游ゴシック" pitchFamily="34" charset="0"/>
+                <a:ea typeface="游ゴシック" pitchFamily="34" charset="-122"/>
+                <a:cs typeface="游ゴシック" pitchFamily="34" charset="-120"/>
               </a:rPr>
               <a:t>7つの領域すべてで欠けが噛み合う。どちらか一方では「変身菓子」は作れない ── それが他社に真似されない理由である</a:t>
             </a:r>
@@ -8291,16 +8291,16 @@
                           <a:solidFill>
                             <a:srgbClr val="333333"/>
                           </a:solidFill>
-                          <a:latin typeface="Yu Gothic" pitchFamily="34" charset="0"/>
-                          <a:ea typeface="Yu Gothic" pitchFamily="34" charset="-122"/>
-                          <a:cs typeface="Yu Gothic" pitchFamily="34" charset="-120"/>
+                          <a:latin typeface="游ゴシック" pitchFamily="34" charset="0"/>
+                          <a:ea typeface="游ゴシック" pitchFamily="34" charset="-122"/>
+                          <a:cs typeface="游ゴシック" pitchFamily="34" charset="-120"/>
                         </a:rPr>
                         <a:t>領域</a:t>
                       </a:r>
                       <a:endParaRPr lang="en-US" sz="1050" dirty="0">
-                        <a:latin typeface="Yu Gothic" charset="0"/>
-                        <a:ea typeface="Yu Gothic" charset="0"/>
-                        <a:cs typeface="Yu Gothic" charset="0"/>
+                        <a:latin typeface="游ゴシック" charset="0"/>
+                        <a:ea typeface="游ゴシック" charset="0"/>
+                        <a:cs typeface="游ゴシック" charset="0"/>
                       </a:endParaRPr>
                     </a:p>
                   </a:txBody>
@@ -8359,16 +8359,16 @@
                           <a:solidFill>
                             <a:srgbClr val="FFFFFF"/>
                           </a:solidFill>
-                          <a:latin typeface="Yu Gothic" pitchFamily="34" charset="0"/>
-                          <a:ea typeface="Yu Gothic" pitchFamily="34" charset="-122"/>
-                          <a:cs typeface="Yu Gothic" pitchFamily="34" charset="-120"/>
+                          <a:latin typeface="游ゴシック" pitchFamily="34" charset="0"/>
+                          <a:ea typeface="游ゴシック" pitchFamily="34" charset="-122"/>
+                          <a:cs typeface="游ゴシック" pitchFamily="34" charset="-120"/>
                         </a:rPr>
                         <a:t>円谷プロ</a:t>
                       </a:r>
                       <a:endParaRPr lang="en-US" sz="1050" dirty="0">
-                        <a:latin typeface="Yu Gothic" charset="0"/>
-                        <a:ea typeface="Yu Gothic" charset="0"/>
-                        <a:cs typeface="Yu Gothic" charset="0"/>
+                        <a:latin typeface="游ゴシック" charset="0"/>
+                        <a:ea typeface="游ゴシック" charset="0"/>
+                        <a:cs typeface="游ゴシック" charset="0"/>
                       </a:endParaRPr>
                     </a:p>
                   </a:txBody>
@@ -8427,16 +8427,16 @@
                           <a:solidFill>
                             <a:srgbClr val="FFFFFF"/>
                           </a:solidFill>
-                          <a:latin typeface="Yu Gothic" pitchFamily="34" charset="0"/>
-                          <a:ea typeface="Yu Gothic" pitchFamily="34" charset="-122"/>
-                          <a:cs typeface="Yu Gothic" pitchFamily="34" charset="-120"/>
+                          <a:latin typeface="游ゴシック" pitchFamily="34" charset="0"/>
+                          <a:ea typeface="游ゴシック" pitchFamily="34" charset="-122"/>
+                          <a:cs typeface="游ゴシック" pitchFamily="34" charset="-120"/>
                         </a:rPr>
                         <a:t>ロッテ</a:t>
                       </a:r>
                       <a:endParaRPr lang="en-US" sz="1050" dirty="0">
-                        <a:latin typeface="Yu Gothic" charset="0"/>
-                        <a:ea typeface="Yu Gothic" charset="0"/>
-                        <a:cs typeface="Yu Gothic" charset="0"/>
+                        <a:latin typeface="游ゴシック" charset="0"/>
+                        <a:ea typeface="游ゴシック" charset="0"/>
+                        <a:cs typeface="游ゴシック" charset="0"/>
                       </a:endParaRPr>
                     </a:p>
                   </a:txBody>
@@ -8497,16 +8497,16 @@
                           <a:solidFill>
                             <a:srgbClr val="333333"/>
                           </a:solidFill>
-                          <a:latin typeface="Yu Gothic" pitchFamily="34" charset="0"/>
-                          <a:ea typeface="Yu Gothic" pitchFamily="34" charset="-122"/>
-                          <a:cs typeface="Yu Gothic" pitchFamily="34" charset="-120"/>
+                          <a:latin typeface="游ゴシック" pitchFamily="34" charset="0"/>
+                          <a:ea typeface="游ゴシック" pitchFamily="34" charset="-122"/>
+                          <a:cs typeface="游ゴシック" pitchFamily="34" charset="-120"/>
                         </a:rPr>
                         <a:t>コンテンツ</a:t>
                       </a:r>
                       <a:endParaRPr lang="en-US" sz="1050" dirty="0">
-                        <a:latin typeface="Yu Gothic" charset="0"/>
-                        <a:ea typeface="Yu Gothic" charset="0"/>
-                        <a:cs typeface="Yu Gothic" charset="0"/>
+                        <a:latin typeface="游ゴシック" charset="0"/>
+                        <a:ea typeface="游ゴシック" charset="0"/>
+                        <a:cs typeface="游ゴシック" charset="0"/>
                       </a:endParaRPr>
                     </a:p>
                   </a:txBody>
@@ -8565,16 +8565,16 @@
                           <a:solidFill>
                             <a:srgbClr val="404040"/>
                           </a:solidFill>
-                          <a:latin typeface="Yu Gothic" pitchFamily="34" charset="0"/>
-                          <a:ea typeface="Yu Gothic" pitchFamily="34" charset="-122"/>
-                          <a:cs typeface="Yu Gothic" pitchFamily="34" charset="-120"/>
+                          <a:latin typeface="游ゴシック" pitchFamily="34" charset="0"/>
+                          <a:ea typeface="游ゴシック" pitchFamily="34" charset="-122"/>
+                          <a:cs typeface="游ゴシック" pitchFamily="34" charset="-120"/>
                         </a:rPr>
                         <a:t>60年・毎年更新のシリーズ構造（ギネス認定）</a:t>
                       </a:r>
                       <a:endParaRPr lang="en-US" sz="1050" dirty="0">
-                        <a:latin typeface="Yu Gothic" charset="0"/>
-                        <a:ea typeface="Yu Gothic" charset="0"/>
-                        <a:cs typeface="Yu Gothic" charset="0"/>
+                        <a:latin typeface="游ゴシック" charset="0"/>
+                        <a:ea typeface="游ゴシック" charset="0"/>
+                        <a:cs typeface="游ゴシック" charset="0"/>
                       </a:endParaRPr>
                     </a:p>
                   </a:txBody>
@@ -8630,16 +8630,16 @@
                           <a:solidFill>
                             <a:srgbClr val="404040"/>
                           </a:solidFill>
-                          <a:latin typeface="Yu Gothic" pitchFamily="34" charset="0"/>
-                          <a:ea typeface="Yu Gothic" pitchFamily="34" charset="-122"/>
-                          <a:cs typeface="Yu Gothic" pitchFamily="34" charset="-120"/>
+                          <a:latin typeface="游ゴシック" pitchFamily="34" charset="0"/>
+                          <a:ea typeface="游ゴシック" pitchFamily="34" charset="-122"/>
+                          <a:cs typeface="游ゴシック" pitchFamily="34" charset="-120"/>
                         </a:rPr>
                         <a:t>ビックリマン等の商品IP運営経験</a:t>
                       </a:r>
                       <a:endParaRPr lang="en-US" sz="1050" dirty="0">
-                        <a:latin typeface="Yu Gothic" charset="0"/>
-                        <a:ea typeface="Yu Gothic" charset="0"/>
-                        <a:cs typeface="Yu Gothic" charset="0"/>
+                        <a:latin typeface="游ゴシック" charset="0"/>
+                        <a:ea typeface="游ゴシック" charset="0"/>
+                        <a:cs typeface="游ゴシック" charset="0"/>
                       </a:endParaRPr>
                     </a:p>
                   </a:txBody>
@@ -8697,16 +8697,16 @@
                           <a:solidFill>
                             <a:srgbClr val="333333"/>
                           </a:solidFill>
-                          <a:latin typeface="Yu Gothic" pitchFamily="34" charset="0"/>
-                          <a:ea typeface="Yu Gothic" pitchFamily="34" charset="-122"/>
-                          <a:cs typeface="Yu Gothic" pitchFamily="34" charset="-120"/>
+                          <a:latin typeface="游ゴシック" pitchFamily="34" charset="0"/>
+                          <a:ea typeface="游ゴシック" pitchFamily="34" charset="-122"/>
+                          <a:cs typeface="游ゴシック" pitchFamily="34" charset="-120"/>
                         </a:rPr>
                         <a:t>体験の素材</a:t>
                       </a:r>
                       <a:endParaRPr lang="en-US" sz="1050" dirty="0">
-                        <a:latin typeface="Yu Gothic" charset="0"/>
-                        <a:ea typeface="Yu Gothic" charset="0"/>
-                        <a:cs typeface="Yu Gothic" charset="0"/>
+                        <a:latin typeface="游ゴシック" charset="0"/>
+                        <a:ea typeface="游ゴシック" charset="0"/>
+                        <a:cs typeface="游ゴシック" charset="0"/>
                       </a:endParaRPr>
                     </a:p>
                   </a:txBody>
@@ -8765,16 +8765,16 @@
                           <a:solidFill>
                             <a:srgbClr val="404040"/>
                           </a:solidFill>
-                          <a:latin typeface="Yu Gothic" pitchFamily="34" charset="0"/>
-                          <a:ea typeface="Yu Gothic" pitchFamily="34" charset="-122"/>
-                          <a:cs typeface="Yu Gothic" pitchFamily="34" charset="-120"/>
+                          <a:latin typeface="游ゴシック" pitchFamily="34" charset="0"/>
+                          <a:ea typeface="游ゴシック" pitchFamily="34" charset="-122"/>
+                          <a:cs typeface="游ゴシック" pitchFamily="34" charset="-120"/>
                         </a:rPr>
                         <a:t>変身・3分・カラータイマーという共通言語</a:t>
                       </a:r>
                       <a:endParaRPr lang="en-US" sz="1050" dirty="0">
-                        <a:latin typeface="Yu Gothic" charset="0"/>
-                        <a:ea typeface="Yu Gothic" charset="0"/>
-                        <a:cs typeface="Yu Gothic" charset="0"/>
+                        <a:latin typeface="游ゴシック" charset="0"/>
+                        <a:ea typeface="游ゴシック" charset="0"/>
+                        <a:cs typeface="游ゴシック" charset="0"/>
                       </a:endParaRPr>
                     </a:p>
                   </a:txBody>
@@ -8830,16 +8830,16 @@
                           <a:solidFill>
                             <a:srgbClr val="404040"/>
                           </a:solidFill>
-                          <a:latin typeface="Yu Gothic" pitchFamily="34" charset="0"/>
-                          <a:ea typeface="Yu Gothic" pitchFamily="34" charset="-122"/>
-                          <a:cs typeface="Yu Gothic" pitchFamily="34" charset="-120"/>
+                          <a:latin typeface="游ゴシック" pitchFamily="34" charset="0"/>
+                          <a:ea typeface="游ゴシック" pitchFamily="34" charset="-122"/>
+                          <a:cs typeface="游ゴシック" pitchFamily="34" charset="-120"/>
                         </a:rPr>
                         <a:t>咀嚼研究・時限フレーバー・色変化の技術</a:t>
                       </a:r>
                       <a:endParaRPr lang="en-US" sz="1050" dirty="0">
-                        <a:latin typeface="Yu Gothic" charset="0"/>
-                        <a:ea typeface="Yu Gothic" charset="0"/>
-                        <a:cs typeface="Yu Gothic" charset="0"/>
+                        <a:latin typeface="游ゴシック" charset="0"/>
+                        <a:ea typeface="游ゴシック" charset="0"/>
+                        <a:cs typeface="游ゴシック" charset="0"/>
                       </a:endParaRPr>
                     </a:p>
                   </a:txBody>
@@ -8897,16 +8897,16 @@
                           <a:solidFill>
                             <a:srgbClr val="333333"/>
                           </a:solidFill>
-                          <a:latin typeface="Yu Gothic" pitchFamily="34" charset="0"/>
-                          <a:ea typeface="Yu Gothic" pitchFamily="34" charset="-122"/>
-                          <a:cs typeface="Yu Gothic" pitchFamily="34" charset="-120"/>
+                          <a:latin typeface="游ゴシック" pitchFamily="34" charset="0"/>
+                          <a:ea typeface="游ゴシック" pitchFamily="34" charset="-122"/>
+                          <a:cs typeface="游ゴシック" pitchFamily="34" charset="-120"/>
                         </a:rPr>
                         <a:t>エビデンス</a:t>
                       </a:r>
                       <a:endParaRPr lang="en-US" sz="1050" dirty="0">
-                        <a:latin typeface="Yu Gothic" charset="0"/>
-                        <a:ea typeface="Yu Gothic" charset="0"/>
-                        <a:cs typeface="Yu Gothic" charset="0"/>
+                        <a:latin typeface="游ゴシック" charset="0"/>
+                        <a:ea typeface="游ゴシック" charset="0"/>
+                        <a:cs typeface="游ゴシック" charset="0"/>
                       </a:endParaRPr>
                     </a:p>
                   </a:txBody>
@@ -8965,16 +8965,16 @@
                           <a:solidFill>
                             <a:srgbClr val="808080"/>
                           </a:solidFill>
-                          <a:latin typeface="Yu Gothic" pitchFamily="34" charset="0"/>
-                          <a:ea typeface="Yu Gothic" pitchFamily="34" charset="-122"/>
-                          <a:cs typeface="Yu Gothic" pitchFamily="34" charset="-120"/>
+                          <a:latin typeface="游ゴシック" pitchFamily="34" charset="0"/>
+                          <a:ea typeface="游ゴシック" pitchFamily="34" charset="-122"/>
+                          <a:cs typeface="游ゴシック" pitchFamily="34" charset="-120"/>
                         </a:rPr>
                         <a:t>──（機能の科学は持たない）</a:t>
                       </a:r>
                       <a:endParaRPr lang="en-US" sz="1050" dirty="0">
-                        <a:latin typeface="Yu Gothic" charset="0"/>
-                        <a:ea typeface="Yu Gothic" charset="0"/>
-                        <a:cs typeface="Yu Gothic" charset="0"/>
+                        <a:latin typeface="游ゴシック" charset="0"/>
+                        <a:ea typeface="游ゴシック" charset="0"/>
+                        <a:cs typeface="游ゴシック" charset="0"/>
                       </a:endParaRPr>
                     </a:p>
                   </a:txBody>
@@ -9030,16 +9030,16 @@
                           <a:solidFill>
                             <a:srgbClr val="404040"/>
                           </a:solidFill>
-                          <a:latin typeface="Yu Gothic" pitchFamily="34" charset="0"/>
-                          <a:ea typeface="Yu Gothic" pitchFamily="34" charset="-122"/>
-                          <a:cs typeface="Yu Gothic" pitchFamily="34" charset="-120"/>
+                          <a:latin typeface="游ゴシック" pitchFamily="34" charset="0"/>
+                          <a:ea typeface="游ゴシック" pitchFamily="34" charset="-122"/>
+                          <a:cs typeface="游ゴシック" pitchFamily="34" charset="-120"/>
                         </a:rPr>
                         <a:t>噛むこと研究・キシリトールの実績</a:t>
                       </a:r>
                       <a:endParaRPr lang="en-US" sz="1050" dirty="0">
-                        <a:latin typeface="Yu Gothic" charset="0"/>
-                        <a:ea typeface="Yu Gothic" charset="0"/>
-                        <a:cs typeface="Yu Gothic" charset="0"/>
+                        <a:latin typeface="游ゴシック" charset="0"/>
+                        <a:ea typeface="游ゴシック" charset="0"/>
+                        <a:cs typeface="游ゴシック" charset="0"/>
                       </a:endParaRPr>
                     </a:p>
                   </a:txBody>
@@ -9097,16 +9097,16 @@
                           <a:solidFill>
                             <a:srgbClr val="333333"/>
                           </a:solidFill>
-                          <a:latin typeface="Yu Gothic" pitchFamily="34" charset="0"/>
-                          <a:ea typeface="Yu Gothic" pitchFamily="34" charset="-122"/>
-                          <a:cs typeface="Yu Gothic" pitchFamily="34" charset="-120"/>
+                          <a:latin typeface="游ゴシック" pitchFamily="34" charset="0"/>
+                          <a:ea typeface="游ゴシック" pitchFamily="34" charset="-122"/>
+                          <a:cs typeface="游ゴシック" pitchFamily="34" charset="-120"/>
                         </a:rPr>
                         <a:t>収集の仕掛け</a:t>
                       </a:r>
                       <a:endParaRPr lang="en-US" sz="1050" dirty="0">
-                        <a:latin typeface="Yu Gothic" charset="0"/>
-                        <a:ea typeface="Yu Gothic" charset="0"/>
-                        <a:cs typeface="Yu Gothic" charset="0"/>
+                        <a:latin typeface="游ゴシック" charset="0"/>
+                        <a:ea typeface="游ゴシック" charset="0"/>
+                        <a:cs typeface="游ゴシック" charset="0"/>
                       </a:endParaRPr>
                     </a:p>
                   </a:txBody>
@@ -9165,16 +9165,16 @@
                           <a:solidFill>
                             <a:srgbClr val="404040"/>
                           </a:solidFill>
-                          <a:latin typeface="Yu Gothic" pitchFamily="34" charset="0"/>
-                          <a:ea typeface="Yu Gothic" pitchFamily="34" charset="-122"/>
-                          <a:cs typeface="Yu Gothic" pitchFamily="34" charset="-120"/>
+                          <a:latin typeface="游ゴシック" pitchFamily="34" charset="0"/>
+                          <a:ea typeface="游ゴシック" pitchFamily="34" charset="-122"/>
+                          <a:cs typeface="游ゴシック" pitchFamily="34" charset="-120"/>
                         </a:rPr>
                         <a:t>カードゲーム世界展開・デジタル図鑑基盤</a:t>
                       </a:r>
                       <a:endParaRPr lang="en-US" sz="1050" dirty="0">
-                        <a:latin typeface="Yu Gothic" charset="0"/>
-                        <a:ea typeface="Yu Gothic" charset="0"/>
-                        <a:cs typeface="Yu Gothic" charset="0"/>
+                        <a:latin typeface="游ゴシック" charset="0"/>
+                        <a:ea typeface="游ゴシック" charset="0"/>
+                        <a:cs typeface="游ゴシック" charset="0"/>
                       </a:endParaRPr>
                     </a:p>
                   </a:txBody>
@@ -9230,16 +9230,16 @@
                           <a:solidFill>
                             <a:srgbClr val="404040"/>
                           </a:solidFill>
-                          <a:latin typeface="Yu Gothic" pitchFamily="34" charset="0"/>
-                          <a:ea typeface="Yu Gothic" pitchFamily="34" charset="-122"/>
-                          <a:cs typeface="Yu Gothic" pitchFamily="34" charset="-120"/>
+                          <a:latin typeface="游ゴシック" pitchFamily="34" charset="0"/>
+                          <a:ea typeface="游ゴシック" pitchFamily="34" charset="-122"/>
+                          <a:cs typeface="游ゴシック" pitchFamily="34" charset="-120"/>
                         </a:rPr>
                         <a:t>シール食玩の発明と売場ノウハウ</a:t>
                       </a:r>
                       <a:endParaRPr lang="en-US" sz="1050" dirty="0">
-                        <a:latin typeface="Yu Gothic" charset="0"/>
-                        <a:ea typeface="Yu Gothic" charset="0"/>
-                        <a:cs typeface="Yu Gothic" charset="0"/>
+                        <a:latin typeface="游ゴシック" charset="0"/>
+                        <a:ea typeface="游ゴシック" charset="0"/>
+                        <a:cs typeface="游ゴシック" charset="0"/>
                       </a:endParaRPr>
                     </a:p>
                   </a:txBody>
@@ -9297,16 +9297,16 @@
                           <a:solidFill>
                             <a:srgbClr val="333333"/>
                           </a:solidFill>
-                          <a:latin typeface="Yu Gothic" pitchFamily="34" charset="0"/>
-                          <a:ea typeface="Yu Gothic" pitchFamily="34" charset="-122"/>
-                          <a:cs typeface="Yu Gothic" pitchFamily="34" charset="-120"/>
+                          <a:latin typeface="游ゴシック" pitchFamily="34" charset="0"/>
+                          <a:ea typeface="游ゴシック" pitchFamily="34" charset="-122"/>
+                          <a:cs typeface="游ゴシック" pitchFamily="34" charset="-120"/>
                         </a:rPr>
                         <a:t>売場</a:t>
                       </a:r>
                       <a:endParaRPr lang="en-US" sz="1050" dirty="0">
-                        <a:latin typeface="Yu Gothic" charset="0"/>
-                        <a:ea typeface="Yu Gothic" charset="0"/>
-                        <a:cs typeface="Yu Gothic" charset="0"/>
+                        <a:latin typeface="游ゴシック" charset="0"/>
+                        <a:ea typeface="游ゴシック" charset="0"/>
+                        <a:cs typeface="游ゴシック" charset="0"/>
                       </a:endParaRPr>
                     </a:p>
                   </a:txBody>
@@ -9365,16 +9365,16 @@
                           <a:solidFill>
                             <a:srgbClr val="808080"/>
                           </a:solidFill>
-                          <a:latin typeface="Yu Gothic" pitchFamily="34" charset="0"/>
-                          <a:ea typeface="Yu Gothic" pitchFamily="34" charset="-122"/>
-                          <a:cs typeface="Yu Gothic" pitchFamily="34" charset="-120"/>
+                          <a:latin typeface="游ゴシック" pitchFamily="34" charset="0"/>
+                          <a:ea typeface="游ゴシック" pitchFamily="34" charset="-122"/>
+                          <a:cs typeface="游ゴシック" pitchFamily="34" charset="-120"/>
                         </a:rPr>
                         <a:t>──（毎日の棚を持たない）</a:t>
                       </a:r>
                       <a:endParaRPr lang="en-US" sz="1050" dirty="0">
-                        <a:latin typeface="Yu Gothic" charset="0"/>
-                        <a:ea typeface="Yu Gothic" charset="0"/>
-                        <a:cs typeface="Yu Gothic" charset="0"/>
+                        <a:latin typeface="游ゴシック" charset="0"/>
+                        <a:ea typeface="游ゴシック" charset="0"/>
+                        <a:cs typeface="游ゴシック" charset="0"/>
                       </a:endParaRPr>
                     </a:p>
                   </a:txBody>
@@ -9430,16 +9430,16 @@
                           <a:solidFill>
                             <a:srgbClr val="404040"/>
                           </a:solidFill>
-                          <a:latin typeface="Yu Gothic" pitchFamily="34" charset="0"/>
-                          <a:ea typeface="Yu Gothic" pitchFamily="34" charset="-122"/>
-                          <a:cs typeface="Yu Gothic" pitchFamily="34" charset="-120"/>
+                          <a:latin typeface="游ゴシック" pitchFamily="34" charset="0"/>
+                          <a:ea typeface="游ゴシック" pitchFamily="34" charset="-122"/>
+                          <a:cs typeface="游ゴシック" pitchFamily="34" charset="-120"/>
                         </a:rPr>
                         <a:t>国内全域の菓子棚＋アジア流通網</a:t>
                       </a:r>
                       <a:endParaRPr lang="en-US" sz="1050" dirty="0">
-                        <a:latin typeface="Yu Gothic" charset="0"/>
-                        <a:ea typeface="Yu Gothic" charset="0"/>
-                        <a:cs typeface="Yu Gothic" charset="0"/>
+                        <a:latin typeface="游ゴシック" charset="0"/>
+                        <a:ea typeface="游ゴシック" charset="0"/>
+                        <a:cs typeface="游ゴシック" charset="0"/>
                       </a:endParaRPr>
                     </a:p>
                   </a:txBody>
@@ -9497,16 +9497,16 @@
                           <a:solidFill>
                             <a:srgbClr val="333333"/>
                           </a:solidFill>
-                          <a:latin typeface="Yu Gothic" pitchFamily="34" charset="0"/>
-                          <a:ea typeface="Yu Gothic" pitchFamily="34" charset="-122"/>
-                          <a:cs typeface="Yu Gothic" pitchFamily="34" charset="-120"/>
+                          <a:latin typeface="游ゴシック" pitchFamily="34" charset="0"/>
+                          <a:ea typeface="游ゴシック" pitchFamily="34" charset="-122"/>
+                          <a:cs typeface="游ゴシック" pitchFamily="34" charset="-120"/>
                         </a:rPr>
                         <a:t>海外</a:t>
                       </a:r>
                       <a:endParaRPr lang="en-US" sz="1050" dirty="0">
-                        <a:latin typeface="Yu Gothic" charset="0"/>
-                        <a:ea typeface="Yu Gothic" charset="0"/>
-                        <a:cs typeface="Yu Gothic" charset="0"/>
+                        <a:latin typeface="游ゴシック" charset="0"/>
+                        <a:ea typeface="游ゴシック" charset="0"/>
+                        <a:cs typeface="游ゴシック" charset="0"/>
                       </a:endParaRPr>
                     </a:p>
                   </a:txBody>
@@ -9565,16 +9565,16 @@
                           <a:solidFill>
                             <a:srgbClr val="404040"/>
                           </a:solidFill>
-                          <a:latin typeface="Yu Gothic" pitchFamily="34" charset="0"/>
-                          <a:ea typeface="Yu Gothic" pitchFamily="34" charset="-122"/>
-                          <a:cs typeface="Yu Gothic" pitchFamily="34" charset="-120"/>
+                          <a:latin typeface="游ゴシック" pitchFamily="34" charset="0"/>
+                          <a:ea typeface="游ゴシック" pitchFamily="34" charset="-122"/>
+                          <a:cs typeface="游ゴシック" pitchFamily="34" charset="-120"/>
                         </a:rPr>
                         <a:t>中国・東南アジアの熱量（権利クリア済み）</a:t>
                       </a:r>
                       <a:endParaRPr lang="en-US" sz="1050" dirty="0">
-                        <a:latin typeface="Yu Gothic" charset="0"/>
-                        <a:ea typeface="Yu Gothic" charset="0"/>
-                        <a:cs typeface="Yu Gothic" charset="0"/>
+                        <a:latin typeface="游ゴシック" charset="0"/>
+                        <a:ea typeface="游ゴシック" charset="0"/>
+                        <a:cs typeface="游ゴシック" charset="0"/>
                       </a:endParaRPr>
                     </a:p>
                   </a:txBody>
@@ -9630,16 +9630,16 @@
                           <a:solidFill>
                             <a:srgbClr val="404040"/>
                           </a:solidFill>
-                          <a:latin typeface="Yu Gothic" pitchFamily="34" charset="0"/>
-                          <a:ea typeface="Yu Gothic" pitchFamily="34" charset="-122"/>
-                          <a:cs typeface="Yu Gothic" pitchFamily="34" charset="-120"/>
+                          <a:latin typeface="游ゴシック" pitchFamily="34" charset="0"/>
+                          <a:ea typeface="游ゴシック" pitchFamily="34" charset="-122"/>
+                          <a:cs typeface="游ゴシック" pitchFamily="34" charset="-120"/>
                         </a:rPr>
                         <a:t>アジア製造拠点・海外比率3割目標</a:t>
                       </a:r>
                       <a:endParaRPr lang="en-US" sz="1050" dirty="0">
-                        <a:latin typeface="Yu Gothic" charset="0"/>
-                        <a:ea typeface="Yu Gothic" charset="0"/>
-                        <a:cs typeface="Yu Gothic" charset="0"/>
+                        <a:latin typeface="游ゴシック" charset="0"/>
+                        <a:ea typeface="游ゴシック" charset="0"/>
+                        <a:cs typeface="游ゴシック" charset="0"/>
                       </a:endParaRPr>
                     </a:p>
                   </a:txBody>
@@ -9697,16 +9697,16 @@
                           <a:solidFill>
                             <a:srgbClr val="333333"/>
                           </a:solidFill>
-                          <a:latin typeface="Yu Gothic" pitchFamily="34" charset="0"/>
-                          <a:ea typeface="Yu Gothic" pitchFamily="34" charset="-122"/>
-                          <a:cs typeface="Yu Gothic" pitchFamily="34" charset="-120"/>
+                          <a:latin typeface="游ゴシック" pitchFamily="34" charset="0"/>
+                          <a:ea typeface="游ゴシック" pitchFamily="34" charset="-122"/>
+                          <a:cs typeface="游ゴシック" pitchFamily="34" charset="-120"/>
                         </a:rPr>
                         <a:t>顧客接点</a:t>
                       </a:r>
                       <a:endParaRPr lang="en-US" sz="1050" dirty="0">
-                        <a:latin typeface="Yu Gothic" charset="0"/>
-                        <a:ea typeface="Yu Gothic" charset="0"/>
-                        <a:cs typeface="Yu Gothic" charset="0"/>
+                        <a:latin typeface="游ゴシック" charset="0"/>
+                        <a:ea typeface="游ゴシック" charset="0"/>
+                        <a:cs typeface="游ゴシック" charset="0"/>
                       </a:endParaRPr>
                     </a:p>
                   </a:txBody>
@@ -9765,16 +9765,16 @@
                           <a:solidFill>
                             <a:srgbClr val="404040"/>
                           </a:solidFill>
-                          <a:latin typeface="Yu Gothic" pitchFamily="34" charset="0"/>
-                          <a:ea typeface="Yu Gothic" pitchFamily="34" charset="-122"/>
-                          <a:cs typeface="Yu Gothic" pitchFamily="34" charset="-120"/>
+                          <a:latin typeface="游ゴシック" pitchFamily="34" charset="0"/>
+                          <a:ea typeface="游ゴシック" pitchFamily="34" charset="-122"/>
+                          <a:cs typeface="游ゴシック" pitchFamily="34" charset="-120"/>
                         </a:rPr>
                         <a:t>子ども＋三世代ノスタルジー</a:t>
                       </a:r>
                       <a:endParaRPr lang="en-US" sz="1050" dirty="0">
-                        <a:latin typeface="Yu Gothic" charset="0"/>
-                        <a:ea typeface="Yu Gothic" charset="0"/>
-                        <a:cs typeface="Yu Gothic" charset="0"/>
+                        <a:latin typeface="游ゴシック" charset="0"/>
+                        <a:ea typeface="游ゴシック" charset="0"/>
+                        <a:cs typeface="游ゴシック" charset="0"/>
                       </a:endParaRPr>
                     </a:p>
                   </a:txBody>
@@ -9830,16 +9830,16 @@
                           <a:solidFill>
                             <a:srgbClr val="404040"/>
                           </a:solidFill>
-                          <a:latin typeface="Yu Gothic" pitchFamily="34" charset="0"/>
-                          <a:ea typeface="Yu Gothic" pitchFamily="34" charset="-122"/>
-                          <a:cs typeface="Yu Gothic" pitchFamily="34" charset="-120"/>
+                          <a:latin typeface="游ゴシック" pitchFamily="34" charset="0"/>
+                          <a:ea typeface="游ゴシック" pitchFamily="34" charset="-122"/>
+                          <a:cs typeface="游ゴシック" pitchFamily="34" charset="-120"/>
                         </a:rPr>
                         <a:t>日常の購買頻度（コンビニ・スーパー）</a:t>
                       </a:r>
                       <a:endParaRPr lang="en-US" sz="1050" dirty="0">
-                        <a:latin typeface="Yu Gothic" charset="0"/>
-                        <a:ea typeface="Yu Gothic" charset="0"/>
-                        <a:cs typeface="Yu Gothic" charset="0"/>
+                        <a:latin typeface="游ゴシック" charset="0"/>
+                        <a:ea typeface="游ゴシック" charset="0"/>
+                        <a:cs typeface="游ゴシック" charset="0"/>
                       </a:endParaRPr>
                     </a:p>
                   </a:txBody>
@@ -9960,9 +9960,9 @@
                 <a:solidFill>
                   <a:srgbClr val="C00000"/>
                 </a:solidFill>
-                <a:latin typeface="Yu Gothic" pitchFamily="34" charset="0"/>
-                <a:ea typeface="Yu Gothic" pitchFamily="34" charset="-122"/>
-                <a:cs typeface="Yu Gothic" pitchFamily="34" charset="-120"/>
+                <a:latin typeface="游ゴシック" pitchFamily="34" charset="0"/>
+                <a:ea typeface="游ゴシック" pitchFamily="34" charset="-122"/>
+                <a:cs typeface="游ゴシック" pitchFamily="34" charset="-120"/>
               </a:rPr>
               <a:t>①② </a:t>
             </a:r>
@@ -9974,9 +9974,9 @@
                 <a:solidFill>
                   <a:srgbClr val="404040"/>
                 </a:solidFill>
-                <a:latin typeface="Yu Gothic" pitchFamily="34" charset="0"/>
-                <a:ea typeface="Yu Gothic" pitchFamily="34" charset="-122"/>
-                <a:cs typeface="Yu Gothic" pitchFamily="34" charset="-120"/>
+                <a:latin typeface="游ゴシック" pitchFamily="34" charset="0"/>
+                <a:ea typeface="游ゴシック" pitchFamily="34" charset="-122"/>
+                <a:cs typeface="游ゴシック" pitchFamily="34" charset="-120"/>
               </a:rPr>
               <a:t>円谷の「持たないもの」こそ、御社にとって未開拓の一等地である</a:t>
             </a:r>
@@ -10065,9 +10065,9 @@
                 <a:solidFill>
                   <a:srgbClr val="FFFFFF"/>
                 </a:solidFill>
-                <a:latin typeface="Yu Gothic" pitchFamily="34" charset="0"/>
-                <a:ea typeface="Yu Gothic" pitchFamily="34" charset="-122"/>
-                <a:cs typeface="Yu Gothic" pitchFamily="34" charset="-120"/>
+                <a:latin typeface="游ゴシック" pitchFamily="34" charset="0"/>
+                <a:ea typeface="游ゴシック" pitchFamily="34" charset="-122"/>
+                <a:cs typeface="游ゴシック" pitchFamily="34" charset="-120"/>
               </a:rPr>
               <a:t>6．クロージング</a:t>
             </a:r>
@@ -10124,9 +10124,9 @@
                 <a:solidFill>
                   <a:srgbClr val="595959"/>
                 </a:solidFill>
-                <a:latin typeface="Yu Gothic" pitchFamily="34" charset="0"/>
-                <a:ea typeface="Yu Gothic" pitchFamily="34" charset="-122"/>
-                <a:cs typeface="Yu Gothic" pitchFamily="34" charset="-120"/>
+                <a:latin typeface="游ゴシック" pitchFamily="34" charset="0"/>
+                <a:ea typeface="游ゴシック" pitchFamily="34" charset="-122"/>
+                <a:cs typeface="游ゴシック" pitchFamily="34" charset="-120"/>
               </a:rPr>
               <a:t>極　秘</a:t>
             </a:r>
@@ -10163,9 +10163,9 @@
                 <a:solidFill>
                   <a:srgbClr val="333333"/>
                 </a:solidFill>
-                <a:latin typeface="Yu Gothic" pitchFamily="34" charset="0"/>
-                <a:ea typeface="Yu Gothic" pitchFamily="34" charset="-122"/>
-                <a:cs typeface="Yu Gothic" pitchFamily="34" charset="-120"/>
+                <a:latin typeface="游ゴシック" pitchFamily="34" charset="0"/>
+                <a:ea typeface="游ゴシック" pitchFamily="34" charset="-122"/>
+                <a:cs typeface="游ゴシック" pitchFamily="34" charset="-120"/>
               </a:rPr>
               <a:t>想定されるご懸念への先回り</a:t>
             </a:r>
@@ -10205,9 +10205,9 @@
                 <a:solidFill>
                   <a:srgbClr val="404040"/>
                 </a:solidFill>
-                <a:latin typeface="Yu Gothic" pitchFamily="34" charset="0"/>
-                <a:ea typeface="Yu Gothic" pitchFamily="34" charset="-122"/>
-                <a:cs typeface="Yu Gothic" pitchFamily="34" charset="-120"/>
+                <a:latin typeface="游ゴシック" pitchFamily="34" charset="0"/>
+                <a:ea typeface="游ゴシック" pitchFamily="34" charset="-122"/>
+                <a:cs typeface="游ゴシック" pitchFamily="34" charset="-120"/>
               </a:rPr>
               <a:t>IPコラボの典型的な失敗は研究済み。4つの懸念に、構造で答える</a:t>
             </a:r>
@@ -10370,16 +10370,16 @@
                           <a:solidFill>
                             <a:srgbClr val="FFFFFF"/>
                           </a:solidFill>
-                          <a:latin typeface="Yu Gothic" pitchFamily="34" charset="0"/>
-                          <a:ea typeface="Yu Gothic" pitchFamily="34" charset="-122"/>
-                          <a:cs typeface="Yu Gothic" pitchFamily="34" charset="-120"/>
+                          <a:latin typeface="游ゴシック" pitchFamily="34" charset="0"/>
+                          <a:ea typeface="游ゴシック" pitchFamily="34" charset="-122"/>
+                          <a:cs typeface="游ゴシック" pitchFamily="34" charset="-120"/>
                         </a:rPr>
                         <a:t>想定されるご懸念</a:t>
                       </a:r>
                       <a:endParaRPr lang="en-US" sz="1050" dirty="0">
-                        <a:latin typeface="Yu Gothic" charset="0"/>
-                        <a:ea typeface="Yu Gothic" charset="0"/>
-                        <a:cs typeface="Yu Gothic" charset="0"/>
+                        <a:latin typeface="游ゴシック" charset="0"/>
+                        <a:ea typeface="游ゴシック" charset="0"/>
+                        <a:cs typeface="游ゴシック" charset="0"/>
                       </a:endParaRPr>
                     </a:p>
                   </a:txBody>
@@ -10438,16 +10438,16 @@
                           <a:solidFill>
                             <a:srgbClr val="FFFFFF"/>
                           </a:solidFill>
-                          <a:latin typeface="Yu Gothic" pitchFamily="34" charset="0"/>
-                          <a:ea typeface="Yu Gothic" pitchFamily="34" charset="-122"/>
-                          <a:cs typeface="Yu Gothic" pitchFamily="34" charset="-120"/>
+                          <a:latin typeface="游ゴシック" pitchFamily="34" charset="0"/>
+                          <a:ea typeface="游ゴシック" pitchFamily="34" charset="-122"/>
+                          <a:cs typeface="游ゴシック" pitchFamily="34" charset="-120"/>
                         </a:rPr>
                         <a:t>私たちの答え</a:t>
                       </a:r>
                       <a:endParaRPr lang="en-US" sz="1050" dirty="0">
-                        <a:latin typeface="Yu Gothic" charset="0"/>
-                        <a:ea typeface="Yu Gothic" charset="0"/>
-                        <a:cs typeface="Yu Gothic" charset="0"/>
+                        <a:latin typeface="游ゴシック" charset="0"/>
+                        <a:ea typeface="游ゴシック" charset="0"/>
+                        <a:cs typeface="游ゴシック" charset="0"/>
                       </a:endParaRPr>
                     </a:p>
                   </a:txBody>
@@ -10508,16 +10508,16 @@
                           <a:solidFill>
                             <a:srgbClr val="333333"/>
                           </a:solidFill>
-                          <a:latin typeface="Yu Gothic" pitchFamily="34" charset="0"/>
-                          <a:ea typeface="Yu Gothic" pitchFamily="34" charset="-122"/>
-                          <a:cs typeface="Yu Gothic" pitchFamily="34" charset="-120"/>
+                          <a:latin typeface="游ゴシック" pitchFamily="34" charset="0"/>
+                          <a:ea typeface="游ゴシック" pitchFamily="34" charset="-122"/>
+                          <a:cs typeface="游ゴシック" pitchFamily="34" charset="-120"/>
                         </a:rPr>
                         <a:t>「IPコラボは水物では？」</a:t>
                       </a:r>
                       <a:endParaRPr lang="en-US" sz="1050" dirty="0">
-                        <a:latin typeface="Yu Gothic" charset="0"/>
-                        <a:ea typeface="Yu Gothic" charset="0"/>
-                        <a:cs typeface="Yu Gothic" charset="0"/>
+                        <a:latin typeface="游ゴシック" charset="0"/>
+                        <a:ea typeface="游ゴシック" charset="0"/>
+                        <a:cs typeface="游ゴシック" charset="0"/>
                       </a:endParaRPr>
                     </a:p>
                   </a:txBody>
@@ -10576,16 +10576,16 @@
                           <a:solidFill>
                             <a:srgbClr val="404040"/>
                           </a:solidFill>
-                          <a:latin typeface="Yu Gothic" pitchFamily="34" charset="0"/>
-                          <a:ea typeface="Yu Gothic" pitchFamily="34" charset="-122"/>
-                          <a:cs typeface="Yu Gothic" pitchFamily="34" charset="-120"/>
+                          <a:latin typeface="游ゴシック" pitchFamily="34" charset="0"/>
+                          <a:ea typeface="游ゴシック" pitchFamily="34" charset="-122"/>
+                          <a:cs typeface="游ゴシック" pitchFamily="34" charset="-120"/>
                         </a:rPr>
                         <a:t>妖怪メダルは単一タイトル依存でピークの9分の1に。ウルトラマンは毎年新ヒーロー × 歴代60年資産の「終わらないコンテンツ」構造で、プロ野球チップス型の長寿設計が可能</a:t>
                       </a:r>
                       <a:endParaRPr lang="en-US" sz="1050" dirty="0">
-                        <a:latin typeface="Yu Gothic" charset="0"/>
-                        <a:ea typeface="Yu Gothic" charset="0"/>
-                        <a:cs typeface="Yu Gothic" charset="0"/>
+                        <a:latin typeface="游ゴシック" charset="0"/>
+                        <a:ea typeface="游ゴシック" charset="0"/>
+                        <a:cs typeface="游ゴシック" charset="0"/>
                       </a:endParaRPr>
                     </a:p>
                   </a:txBody>
@@ -10643,16 +10643,16 @@
                           <a:solidFill>
                             <a:srgbClr val="333333"/>
                           </a:solidFill>
-                          <a:latin typeface="Yu Gothic" pitchFamily="34" charset="0"/>
-                          <a:ea typeface="Yu Gothic" pitchFamily="34" charset="-122"/>
-                          <a:cs typeface="Yu Gothic" pitchFamily="34" charset="-120"/>
+                          <a:latin typeface="游ゴシック" pitchFamily="34" charset="0"/>
+                          <a:ea typeface="游ゴシック" pitchFamily="34" charset="-122"/>
+                          <a:cs typeface="游ゴシック" pitchFamily="34" charset="-120"/>
                         </a:rPr>
                         <a:t>「ビックリマンの規制の記憶」</a:t>
                       </a:r>
                       <a:endParaRPr lang="en-US" sz="1050" dirty="0">
-                        <a:latin typeface="Yu Gothic" charset="0"/>
-                        <a:ea typeface="Yu Gothic" charset="0"/>
-                        <a:cs typeface="Yu Gothic" charset="0"/>
+                        <a:latin typeface="游ゴシック" charset="0"/>
+                        <a:ea typeface="游ゴシック" charset="0"/>
+                        <a:cs typeface="游ゴシック" charset="0"/>
                       </a:endParaRPr>
                     </a:p>
                   </a:txBody>
@@ -10711,16 +10711,16 @@
                           <a:solidFill>
                             <a:srgbClr val="404040"/>
                           </a:solidFill>
-                          <a:latin typeface="Yu Gothic" pitchFamily="34" charset="0"/>
-                          <a:ea typeface="Yu Gothic" pitchFamily="34" charset="-122"/>
-                          <a:cs typeface="Yu Gothic" pitchFamily="34" charset="-120"/>
+                          <a:latin typeface="游ゴシック" pitchFamily="34" charset="0"/>
+                          <a:ea typeface="游ゴシック" pitchFamily="34" charset="-122"/>
+                          <a:cs typeface="游ゴシック" pitchFamily="34" charset="-120"/>
                         </a:rPr>
                         <a:t>1988年の公取委勧告は研究済み。レアは射幸性でなく物語性に置き、封入率の透明化とデジタル図鑑での重複救済など、令和の健全設計を初期から組み込む</a:t>
                       </a:r>
                       <a:endParaRPr lang="en-US" sz="1050" dirty="0">
-                        <a:latin typeface="Yu Gothic" charset="0"/>
-                        <a:ea typeface="Yu Gothic" charset="0"/>
-                        <a:cs typeface="Yu Gothic" charset="0"/>
+                        <a:latin typeface="游ゴシック" charset="0"/>
+                        <a:ea typeface="游ゴシック" charset="0"/>
+                        <a:cs typeface="游ゴシック" charset="0"/>
                       </a:endParaRPr>
                     </a:p>
                   </a:txBody>
@@ -10778,16 +10778,16 @@
                           <a:solidFill>
                             <a:srgbClr val="333333"/>
                           </a:solidFill>
-                          <a:latin typeface="Yu Gothic" pitchFamily="34" charset="0"/>
-                          <a:ea typeface="Yu Gothic" pitchFamily="34" charset="-122"/>
-                          <a:cs typeface="Yu Gothic" pitchFamily="34" charset="-120"/>
+                          <a:latin typeface="游ゴシック" pitchFamily="34" charset="0"/>
+                          <a:ea typeface="游ゴシック" pitchFamily="34" charset="-122"/>
+                          <a:cs typeface="游ゴシック" pitchFamily="34" charset="-120"/>
                         </a:rPr>
                         <a:t>「海外権利は大丈夫か」</a:t>
                       </a:r>
                       <a:endParaRPr lang="en-US" sz="1050" dirty="0">
-                        <a:latin typeface="Yu Gothic" charset="0"/>
-                        <a:ea typeface="Yu Gothic" charset="0"/>
-                        <a:cs typeface="Yu Gothic" charset="0"/>
+                        <a:latin typeface="游ゴシック" charset="0"/>
+                        <a:ea typeface="游ゴシック" charset="0"/>
+                        <a:cs typeface="游ゴシック" charset="0"/>
                       </a:endParaRPr>
                     </a:p>
                   </a:txBody>
@@ -10846,16 +10846,16 @@
                           <a:solidFill>
                             <a:srgbClr val="404040"/>
                           </a:solidFill>
-                          <a:latin typeface="Yu Gothic" pitchFamily="34" charset="0"/>
-                          <a:ea typeface="Yu Gothic" pitchFamily="34" charset="-122"/>
-                          <a:cs typeface="Yu Gothic" pitchFamily="34" charset="-120"/>
+                          <a:latin typeface="游ゴシック" pitchFamily="34" charset="0"/>
+                          <a:ea typeface="游ゴシック" pitchFamily="34" charset="-122"/>
+                          <a:cs typeface="游ゴシック" pitchFamily="34" charset="-120"/>
                         </a:rPr>
                         <a:t>約30年に及んだ海外版権紛争は2019年の米控訴審で完全決着。現在は全世界で権利関係がクリーンで、御社に法務リスクを持ち込まない。むしろアジアは手つかずの伸びしろ</a:t>
                       </a:r>
                       <a:endParaRPr lang="en-US" sz="1050" dirty="0">
-                        <a:latin typeface="Yu Gothic" charset="0"/>
-                        <a:ea typeface="Yu Gothic" charset="0"/>
-                        <a:cs typeface="Yu Gothic" charset="0"/>
+                        <a:latin typeface="游ゴシック" charset="0"/>
+                        <a:ea typeface="游ゴシック" charset="0"/>
+                        <a:cs typeface="游ゴシック" charset="0"/>
                       </a:endParaRPr>
                     </a:p>
                   </a:txBody>
@@ -10913,16 +10913,16 @@
                           <a:solidFill>
                             <a:srgbClr val="333333"/>
                           </a:solidFill>
-                          <a:latin typeface="Yu Gothic" pitchFamily="34" charset="0"/>
-                          <a:ea typeface="Yu Gothic" pitchFamily="34" charset="-122"/>
-                          <a:cs typeface="Yu Gothic" pitchFamily="34" charset="-120"/>
+                          <a:latin typeface="游ゴシック" pitchFamily="34" charset="0"/>
+                          <a:ea typeface="游ゴシック" pitchFamily="34" charset="-122"/>
+                          <a:cs typeface="游ゴシック" pitchFamily="34" charset="-120"/>
                         </a:rPr>
                         <a:t>「機能訴求の表示リスク」</a:t>
                       </a:r>
                       <a:endParaRPr lang="en-US" sz="1050" dirty="0">
-                        <a:latin typeface="Yu Gothic" charset="0"/>
-                        <a:ea typeface="Yu Gothic" charset="0"/>
-                        <a:cs typeface="Yu Gothic" charset="0"/>
+                        <a:latin typeface="游ゴシック" charset="0"/>
+                        <a:ea typeface="游ゴシック" charset="0"/>
+                        <a:cs typeface="游ゴシック" charset="0"/>
                       </a:endParaRPr>
                     </a:p>
                   </a:txBody>
@@ -10981,16 +10981,16 @@
                           <a:solidFill>
                             <a:srgbClr val="404040"/>
                           </a:solidFill>
-                          <a:latin typeface="Yu Gothic" pitchFamily="34" charset="0"/>
-                          <a:ea typeface="Yu Gothic" pitchFamily="34" charset="-122"/>
-                          <a:cs typeface="Yu Gothic" pitchFamily="34" charset="-120"/>
+                          <a:latin typeface="游ゴシック" pitchFamily="34" charset="0"/>
+                          <a:ea typeface="游ゴシック" pitchFamily="34" charset="-122"/>
+                          <a:cs typeface="游ゴシック" pitchFamily="34" charset="-120"/>
                         </a:rPr>
                         <a:t>機能表現は御社の噛むこと研究のエビデンスと表示規制の範囲で設計し、円谷は世界観表現に徹する。科学はロッテ、物語は円谷という役割分担を契約で明確化する</a:t>
                       </a:r>
                       <a:endParaRPr lang="en-US" sz="1050" dirty="0">
-                        <a:latin typeface="Yu Gothic" charset="0"/>
-                        <a:ea typeface="Yu Gothic" charset="0"/>
-                        <a:cs typeface="Yu Gothic" charset="0"/>
+                        <a:latin typeface="游ゴシック" charset="0"/>
+                        <a:ea typeface="游ゴシック" charset="0"/>
+                        <a:cs typeface="游ゴシック" charset="0"/>
                       </a:endParaRPr>
                     </a:p>
                   </a:txBody>
@@ -11119,9 +11119,9 @@
                 <a:solidFill>
                   <a:srgbClr val="FFFFFF"/>
                 </a:solidFill>
-                <a:latin typeface="Yu Gothic" pitchFamily="34" charset="0"/>
-                <a:ea typeface="Yu Gothic" pitchFamily="34" charset="-122"/>
-                <a:cs typeface="Yu Gothic" pitchFamily="34" charset="-120"/>
+                <a:latin typeface="游ゴシック" pitchFamily="34" charset="0"/>
+                <a:ea typeface="游ゴシック" pitchFamily="34" charset="-122"/>
+                <a:cs typeface="游ゴシック" pitchFamily="34" charset="-120"/>
               </a:rPr>
               <a:t>6．クロージング</a:t>
             </a:r>
@@ -11178,9 +11178,9 @@
                 <a:solidFill>
                   <a:srgbClr val="595959"/>
                 </a:solidFill>
-                <a:latin typeface="Yu Gothic" pitchFamily="34" charset="0"/>
-                <a:ea typeface="Yu Gothic" pitchFamily="34" charset="-122"/>
-                <a:cs typeface="Yu Gothic" pitchFamily="34" charset="-120"/>
+                <a:latin typeface="游ゴシック" pitchFamily="34" charset="0"/>
+                <a:ea typeface="游ゴシック" pitchFamily="34" charset="-122"/>
+                <a:cs typeface="游ゴシック" pitchFamily="34" charset="-120"/>
               </a:rPr>
               <a:t>極　秘</a:t>
             </a:r>
@@ -11217,9 +11217,9 @@
                 <a:solidFill>
                   <a:srgbClr val="333333"/>
                 </a:solidFill>
-                <a:latin typeface="Yu Gothic" pitchFamily="34" charset="0"/>
-                <a:ea typeface="Yu Gothic" pitchFamily="34" charset="-122"/>
-                <a:cs typeface="Yu Gothic" pitchFamily="34" charset="-120"/>
+                <a:latin typeface="游ゴシック" pitchFamily="34" charset="0"/>
+                <a:ea typeface="游ゴシック" pitchFamily="34" charset="-122"/>
+                <a:cs typeface="游ゴシック" pitchFamily="34" charset="-120"/>
               </a:rPr>
               <a:t>少年の日の3分間を、もう一度。</a:t>
             </a:r>
@@ -11259,9 +11259,9 @@
                 <a:solidFill>
                   <a:srgbClr val="404040"/>
                 </a:solidFill>
-                <a:latin typeface="Yu Gothic" pitchFamily="34" charset="0"/>
-                <a:ea typeface="Yu Gothic" pitchFamily="34" charset="-122"/>
-                <a:cs typeface="Yu Gothic" pitchFamily="34" charset="-120"/>
+                <a:latin typeface="游ゴシック" pitchFamily="34" charset="0"/>
+                <a:ea typeface="游ゴシック" pitchFamily="34" charset="-122"/>
+                <a:cs typeface="游ゴシック" pitchFamily="34" charset="-120"/>
               </a:rPr>
               <a:t>ビックリマンを生んだ御社と、変身を発明したウルトラマンなら、次のカテゴリーキラーを創れる</a:t>
             </a:r>
@@ -11424,16 +11424,16 @@
                           <a:solidFill>
                             <a:srgbClr val="FFFFFF"/>
                           </a:solidFill>
-                          <a:latin typeface="Yu Gothic" pitchFamily="34" charset="0"/>
-                          <a:ea typeface="Yu Gothic" pitchFamily="34" charset="-122"/>
-                          <a:cs typeface="Yu Gothic" pitchFamily="34" charset="-120"/>
+                          <a:latin typeface="游ゴシック" pitchFamily="34" charset="0"/>
+                          <a:ea typeface="游ゴシック" pitchFamily="34" charset="-122"/>
+                          <a:cs typeface="游ゴシック" pitchFamily="34" charset="-120"/>
                         </a:rPr>
                         <a:t>NEXT STEP：本日ご合意いただきたい三つのこと</a:t>
                       </a:r>
                       <a:endParaRPr lang="en-US" sz="1100" dirty="0">
-                        <a:latin typeface="Yu Gothic" charset="0"/>
-                        <a:ea typeface="Yu Gothic" charset="0"/>
-                        <a:cs typeface="Yu Gothic" charset="0"/>
+                        <a:latin typeface="游ゴシック" charset="0"/>
+                        <a:ea typeface="游ゴシック" charset="0"/>
+                        <a:cs typeface="游ゴシック" charset="0"/>
                       </a:endParaRPr>
                     </a:p>
                   </a:txBody>
@@ -11497,16 +11497,16 @@
                           <a:solidFill>
                             <a:srgbClr val="333333"/>
                           </a:solidFill>
-                          <a:latin typeface="Yu Gothic" pitchFamily="34" charset="0"/>
-                          <a:ea typeface="Yu Gothic" pitchFamily="34" charset="-122"/>
-                          <a:cs typeface="Yu Gothic" pitchFamily="34" charset="-120"/>
+                          <a:latin typeface="游ゴシック" pitchFamily="34" charset="0"/>
+                          <a:ea typeface="游ゴシック" pitchFamily="34" charset="-122"/>
+                          <a:cs typeface="游ゴシック" pitchFamily="34" charset="-120"/>
                         </a:rPr>
                         <a:t>① 本日</a:t>
                       </a:r>
                       <a:endParaRPr lang="en-US" sz="1100" dirty="0">
-                        <a:latin typeface="Yu Gothic" charset="0"/>
-                        <a:ea typeface="Yu Gothic" charset="0"/>
-                        <a:cs typeface="Yu Gothic" charset="0"/>
+                        <a:latin typeface="游ゴシック" charset="0"/>
+                        <a:ea typeface="游ゴシック" charset="0"/>
+                        <a:cs typeface="游ゴシック" charset="0"/>
                       </a:endParaRPr>
                     </a:p>
                   </a:txBody>
@@ -11565,16 +11565,16 @@
                           <a:solidFill>
                             <a:srgbClr val="404040"/>
                           </a:solidFill>
-                          <a:latin typeface="Yu Gothic" pitchFamily="34" charset="0"/>
-                          <a:ea typeface="Yu Gothic" pitchFamily="34" charset="-122"/>
-                          <a:cs typeface="Yu Gothic" pitchFamily="34" charset="-120"/>
+                          <a:latin typeface="游ゴシック" pitchFamily="34" charset="0"/>
+                          <a:ea typeface="游ゴシック" pitchFamily="34" charset="-122"/>
+                          <a:cs typeface="游ゴシック" pitchFamily="34" charset="-120"/>
                         </a:rPr>
                         <a:t>方向性のご合意と、NDA・共同ワークショップの設定</a:t>
                       </a:r>
                       <a:endParaRPr lang="en-US" sz="1100" dirty="0">
-                        <a:latin typeface="Yu Gothic" charset="0"/>
-                        <a:ea typeface="Yu Gothic" charset="0"/>
-                        <a:cs typeface="Yu Gothic" charset="0"/>
+                        <a:latin typeface="游ゴシック" charset="0"/>
+                        <a:ea typeface="游ゴシック" charset="0"/>
+                        <a:cs typeface="游ゴシック" charset="0"/>
                       </a:endParaRPr>
                     </a:p>
                   </a:txBody>
@@ -11632,16 +11632,16 @@
                           <a:solidFill>
                             <a:srgbClr val="333333"/>
                           </a:solidFill>
-                          <a:latin typeface="Yu Gothic" pitchFamily="34" charset="0"/>
-                          <a:ea typeface="Yu Gothic" pitchFamily="34" charset="-122"/>
-                          <a:cs typeface="Yu Gothic" pitchFamily="34" charset="-120"/>
+                          <a:latin typeface="游ゴシック" pitchFamily="34" charset="0"/>
+                          <a:ea typeface="游ゴシック" pitchFamily="34" charset="-122"/>
+                          <a:cs typeface="游ゴシック" pitchFamily="34" charset="-120"/>
                         </a:rPr>
                         <a:t>② 2026年内</a:t>
                       </a:r>
                       <a:endParaRPr lang="en-US" sz="1100" dirty="0">
-                        <a:latin typeface="Yu Gothic" charset="0"/>
-                        <a:ea typeface="Yu Gothic" charset="0"/>
-                        <a:cs typeface="Yu Gothic" charset="0"/>
+                        <a:latin typeface="游ゴシック" charset="0"/>
+                        <a:ea typeface="游ゴシック" charset="0"/>
+                        <a:cs typeface="游ゴシック" charset="0"/>
                       </a:endParaRPr>
                     </a:p>
                   </a:txBody>
@@ -11700,16 +11700,16 @@
                           <a:solidFill>
                             <a:srgbClr val="404040"/>
                           </a:solidFill>
-                          <a:latin typeface="Yu Gothic" pitchFamily="34" charset="0"/>
-                          <a:ea typeface="Yu Gothic" pitchFamily="34" charset="-122"/>
-                          <a:cs typeface="Yu Gothic" pitchFamily="34" charset="-120"/>
+                          <a:latin typeface="游ゴシック" pitchFamily="34" charset="0"/>
+                          <a:ea typeface="游ゴシック" pitchFamily="34" charset="-122"/>
+                          <a:cs typeface="游ゴシック" pitchFamily="34" charset="-120"/>
                         </a:rPr>
                         <a:t>『ウルトラマンマンチョコ』の企画合意（60周年商戦へ）</a:t>
                       </a:r>
                       <a:endParaRPr lang="en-US" sz="1100" dirty="0">
-                        <a:latin typeface="Yu Gothic" charset="0"/>
-                        <a:ea typeface="Yu Gothic" charset="0"/>
-                        <a:cs typeface="Yu Gothic" charset="0"/>
+                        <a:latin typeface="游ゴシック" charset="0"/>
+                        <a:ea typeface="游ゴシック" charset="0"/>
+                        <a:cs typeface="游ゴシック" charset="0"/>
                       </a:endParaRPr>
                     </a:p>
                   </a:txBody>
@@ -11767,16 +11767,16 @@
                           <a:solidFill>
                             <a:srgbClr val="333333"/>
                           </a:solidFill>
-                          <a:latin typeface="Yu Gothic" pitchFamily="34" charset="0"/>
-                          <a:ea typeface="Yu Gothic" pitchFamily="34" charset="-122"/>
-                          <a:cs typeface="Yu Gothic" pitchFamily="34" charset="-120"/>
+                          <a:latin typeface="游ゴシック" pitchFamily="34" charset="0"/>
+                          <a:ea typeface="游ゴシック" pitchFamily="34" charset="-122"/>
+                          <a:cs typeface="游ゴシック" pitchFamily="34" charset="-120"/>
                         </a:rPr>
                         <a:t>③ 2027年春</a:t>
                       </a:r>
                       <a:endParaRPr lang="en-US" sz="1100" dirty="0">
-                        <a:latin typeface="Yu Gothic" charset="0"/>
-                        <a:ea typeface="Yu Gothic" charset="0"/>
-                        <a:cs typeface="Yu Gothic" charset="0"/>
+                        <a:latin typeface="游ゴシック" charset="0"/>
+                        <a:ea typeface="游ゴシック" charset="0"/>
+                        <a:cs typeface="游ゴシック" charset="0"/>
                       </a:endParaRPr>
                     </a:p>
                   </a:txBody>
@@ -11835,16 +11835,16 @@
                           <a:solidFill>
                             <a:srgbClr val="404040"/>
                           </a:solidFill>
-                          <a:latin typeface="Yu Gothic" pitchFamily="34" charset="0"/>
-                          <a:ea typeface="Yu Gothic" pitchFamily="34" charset="-122"/>
-                          <a:cs typeface="Yu Gothic" pitchFamily="34" charset="-120"/>
+                          <a:latin typeface="游ゴシック" pitchFamily="34" charset="0"/>
+                          <a:ea typeface="游ゴシック" pitchFamily="34" charset="-122"/>
+                          <a:cs typeface="游ゴシック" pitchFamily="34" charset="-120"/>
                         </a:rPr>
                         <a:t>『ULTRA 3MIN.』試作・テスト販売 → 全国展開判断</a:t>
                       </a:r>
                       <a:endParaRPr lang="en-US" sz="1100" dirty="0">
-                        <a:latin typeface="Yu Gothic" charset="0"/>
-                        <a:ea typeface="Yu Gothic" charset="0"/>
-                        <a:cs typeface="Yu Gothic" charset="0"/>
+                        <a:latin typeface="游ゴシック" charset="0"/>
+                        <a:ea typeface="游ゴシック" charset="0"/>
+                        <a:cs typeface="游ゴシック" charset="0"/>
                       </a:endParaRPr>
                     </a:p>
                   </a:txBody>
@@ -11943,9 +11943,9 @@
                 <a:solidFill>
                   <a:srgbClr val="333333"/>
                 </a:solidFill>
-                <a:latin typeface="Yu Gothic" pitchFamily="34" charset="0"/>
-                <a:ea typeface="Yu Gothic" pitchFamily="34" charset="-122"/>
-                <a:cs typeface="Yu Gothic" pitchFamily="34" charset="-120"/>
+                <a:latin typeface="游ゴシック" pitchFamily="34" charset="0"/>
+                <a:ea typeface="游ゴシック" pitchFamily="34" charset="-122"/>
+                <a:cs typeface="游ゴシック" pitchFamily="34" charset="-120"/>
               </a:rPr>
               <a:t>この提案は、御社のガムと同じです ── 噛めば噛むほど、味が出ます。まずは3分間だけ、ご検討ください。</a:t>
             </a:r>
@@ -11982,9 +11982,9 @@
                 <a:solidFill>
                   <a:srgbClr val="808080"/>
                 </a:solidFill>
-                <a:latin typeface="Yu Gothic" pitchFamily="34" charset="0"/>
-                <a:ea typeface="Yu Gothic" pitchFamily="34" charset="-122"/>
-                <a:cs typeface="Yu Gothic" pitchFamily="34" charset="-120"/>
+                <a:latin typeface="游ゴシック" pitchFamily="34" charset="0"/>
+                <a:ea typeface="游ゴシック" pitchFamily="34" charset="-122"/>
+                <a:cs typeface="游ゴシック" pitchFamily="34" charset="-120"/>
               </a:rPr>
               <a:t>円谷プロダクション ｜ 2026年8月 ｜ 本資料の内容は両社間の検討用であり、記載の商品名・時期はすべて仮称・仮案です</a:t>
             </a:r>
@@ -12053,9 +12053,9 @@
                 <a:solidFill>
                   <a:srgbClr val="333333"/>
                 </a:solidFill>
-                <a:latin typeface="Yu Gothic" pitchFamily="34" charset="0"/>
-                <a:ea typeface="Yu Gothic" pitchFamily="34" charset="-122"/>
-                <a:cs typeface="Yu Gothic" pitchFamily="34" charset="-120"/>
+                <a:latin typeface="游ゴシック" pitchFamily="34" charset="0"/>
+                <a:ea typeface="游ゴシック" pitchFamily="34" charset="-122"/>
+                <a:cs typeface="游ゴシック" pitchFamily="34" charset="-120"/>
               </a:rPr>
               <a:t>目次</a:t>
             </a:r>
@@ -12092,9 +12092,9 @@
                 <a:solidFill>
                   <a:srgbClr val="595959"/>
                 </a:solidFill>
-                <a:latin typeface="Yu Gothic" pitchFamily="34" charset="0"/>
-                <a:ea typeface="Yu Gothic" pitchFamily="34" charset="-122"/>
-                <a:cs typeface="Yu Gothic" pitchFamily="34" charset="-120"/>
+                <a:latin typeface="游ゴシック" pitchFamily="34" charset="0"/>
+                <a:ea typeface="游ゴシック" pitchFamily="34" charset="-122"/>
+                <a:cs typeface="游ゴシック" pitchFamily="34" charset="-120"/>
               </a:rPr>
               <a:t>極　秘</a:t>
             </a:r>
@@ -12131,9 +12131,9 @@
                 <a:solidFill>
                   <a:srgbClr val="17828F"/>
                 </a:solidFill>
-                <a:latin typeface="Yu Gothic" pitchFamily="34" charset="0"/>
-                <a:ea typeface="Yu Gothic" pitchFamily="34" charset="-122"/>
-                <a:cs typeface="Yu Gothic" pitchFamily="34" charset="-120"/>
+                <a:latin typeface="游ゴシック" pitchFamily="34" charset="0"/>
+                <a:ea typeface="游ゴシック" pitchFamily="34" charset="-122"/>
+                <a:cs typeface="游ゴシック" pitchFamily="34" charset="-120"/>
               </a:rPr>
               <a:t>1.</a:t>
             </a:r>
@@ -12170,9 +12170,9 @@
                 <a:solidFill>
                   <a:srgbClr val="333333"/>
                 </a:solidFill>
-                <a:latin typeface="Yu Gothic" pitchFamily="34" charset="0"/>
-                <a:ea typeface="Yu Gothic" pitchFamily="34" charset="-122"/>
-                <a:cs typeface="Yu Gothic" pitchFamily="34" charset="-120"/>
+                <a:latin typeface="游ゴシック" pitchFamily="34" charset="0"/>
+                <a:ea typeface="游ゴシック" pitchFamily="34" charset="-122"/>
+                <a:cs typeface="游ゴシック" pitchFamily="34" charset="-120"/>
               </a:rPr>
               <a:t>オープニング</a:t>
             </a:r>
@@ -12209,9 +12209,9 @@
                 <a:solidFill>
                   <a:srgbClr val="808080"/>
                 </a:solidFill>
-                <a:latin typeface="Yu Gothic" pitchFamily="34" charset="0"/>
-                <a:ea typeface="Yu Gothic" pitchFamily="34" charset="-122"/>
-                <a:cs typeface="Yu Gothic" pitchFamily="34" charset="-120"/>
+                <a:latin typeface="游ゴシック" pitchFamily="34" charset="0"/>
+                <a:ea typeface="游ゴシック" pitchFamily="34" charset="-122"/>
+                <a:cs typeface="游ゴシック" pitchFamily="34" charset="-120"/>
               </a:rPr>
               <a:t>ご提案の骨子 ── コラボではなく、カテゴリーを創る</a:t>
             </a:r>
@@ -12248,9 +12248,9 @@
                 <a:solidFill>
                   <a:srgbClr val="595959"/>
                 </a:solidFill>
-                <a:latin typeface="Yu Gothic" pitchFamily="34" charset="0"/>
-                <a:ea typeface="Yu Gothic" pitchFamily="34" charset="-122"/>
-                <a:cs typeface="Yu Gothic" pitchFamily="34" charset="-120"/>
+                <a:latin typeface="游ゴシック" pitchFamily="34" charset="0"/>
+                <a:ea typeface="游ゴシック" pitchFamily="34" charset="-122"/>
+                <a:cs typeface="游ゴシック" pitchFamily="34" charset="-120"/>
               </a:rPr>
               <a:t>3</a:t>
             </a:r>
@@ -12310,9 +12310,9 @@
                 <a:solidFill>
                   <a:srgbClr val="17828F"/>
                 </a:solidFill>
-                <a:latin typeface="Yu Gothic" pitchFamily="34" charset="0"/>
-                <a:ea typeface="Yu Gothic" pitchFamily="34" charset="-122"/>
-                <a:cs typeface="Yu Gothic" pitchFamily="34" charset="-120"/>
+                <a:latin typeface="游ゴシック" pitchFamily="34" charset="0"/>
+                <a:ea typeface="游ゴシック" pitchFamily="34" charset="-122"/>
+                <a:cs typeface="游ゴシック" pitchFamily="34" charset="-120"/>
               </a:rPr>
               <a:t>2.</a:t>
             </a:r>
@@ -12349,9 +12349,9 @@
                 <a:solidFill>
                   <a:srgbClr val="333333"/>
                 </a:solidFill>
-                <a:latin typeface="Yu Gothic" pitchFamily="34" charset="0"/>
-                <a:ea typeface="Yu Gothic" pitchFamily="34" charset="-122"/>
-                <a:cs typeface="Yu Gothic" pitchFamily="34" charset="-120"/>
+                <a:latin typeface="游ゴシック" pitchFamily="34" charset="0"/>
+                <a:ea typeface="游ゴシック" pitchFamily="34" charset="-122"/>
+                <a:cs typeface="游ゴシック" pitchFamily="34" charset="-120"/>
               </a:rPr>
               <a:t>なぜ、いまか</a:t>
             </a:r>
@@ -12388,9 +12388,9 @@
                 <a:solidFill>
                   <a:srgbClr val="808080"/>
                 </a:solidFill>
-                <a:latin typeface="Yu Gothic" pitchFamily="34" charset="0"/>
-                <a:ea typeface="Yu Gothic" pitchFamily="34" charset="-122"/>
-                <a:cs typeface="Yu Gothic" pitchFamily="34" charset="-120"/>
+                <a:latin typeface="游ゴシック" pitchFamily="34" charset="0"/>
+                <a:ea typeface="游ゴシック" pitchFamily="34" charset="-122"/>
+                <a:cs typeface="游ゴシック" pitchFamily="34" charset="-120"/>
               </a:rPr>
               <a:t>60周年・再タッグ・売場の構造変化という3つの追い風</a:t>
             </a:r>
@@ -12427,9 +12427,9 @@
                 <a:solidFill>
                   <a:srgbClr val="595959"/>
                 </a:solidFill>
-                <a:latin typeface="Yu Gothic" pitchFamily="34" charset="0"/>
-                <a:ea typeface="Yu Gothic" pitchFamily="34" charset="-122"/>
-                <a:cs typeface="Yu Gothic" pitchFamily="34" charset="-120"/>
+                <a:latin typeface="游ゴシック" pitchFamily="34" charset="0"/>
+                <a:ea typeface="游ゴシック" pitchFamily="34" charset="-122"/>
+                <a:cs typeface="游ゴシック" pitchFamily="34" charset="-120"/>
               </a:rPr>
               <a:t>4</a:t>
             </a:r>
@@ -12489,9 +12489,9 @@
                 <a:solidFill>
                   <a:srgbClr val="17828F"/>
                 </a:solidFill>
-                <a:latin typeface="Yu Gothic" pitchFamily="34" charset="0"/>
-                <a:ea typeface="Yu Gothic" pitchFamily="34" charset="-122"/>
-                <a:cs typeface="Yu Gothic" pitchFamily="34" charset="-120"/>
+                <a:latin typeface="游ゴシック" pitchFamily="34" charset="0"/>
+                <a:ea typeface="游ゴシック" pitchFamily="34" charset="-122"/>
+                <a:cs typeface="游ゴシック" pitchFamily="34" charset="-120"/>
               </a:rPr>
               <a:t>3.</a:t>
             </a:r>
@@ -12528,9 +12528,9 @@
                 <a:solidFill>
                   <a:srgbClr val="333333"/>
                 </a:solidFill>
-                <a:latin typeface="Yu Gothic" pitchFamily="34" charset="0"/>
-                <a:ea typeface="Yu Gothic" pitchFamily="34" charset="-122"/>
-                <a:cs typeface="Yu Gothic" pitchFamily="34" charset="-120"/>
+                <a:latin typeface="游ゴシック" pitchFamily="34" charset="0"/>
+                <a:ea typeface="游ゴシック" pitchFamily="34" charset="-122"/>
+                <a:cs typeface="游ゴシック" pitchFamily="34" charset="-120"/>
               </a:rPr>
               <a:t>カテゴリー創造の方法論</a:t>
             </a:r>
@@ -12567,9 +12567,9 @@
                 <a:solidFill>
                   <a:srgbClr val="808080"/>
                 </a:solidFill>
-                <a:latin typeface="Yu Gothic" pitchFamily="34" charset="0"/>
-                <a:ea typeface="Yu Gothic" pitchFamily="34" charset="-122"/>
-                <a:cs typeface="Yu Gothic" pitchFamily="34" charset="-120"/>
+                <a:latin typeface="游ゴシック" pitchFamily="34" charset="0"/>
+                <a:ea typeface="游ゴシック" pitchFamily="34" charset="-122"/>
+                <a:cs typeface="游ゴシック" pitchFamily="34" charset="-120"/>
               </a:rPr>
               <a:t>ビックリマン・おーいお茶の先例と、御社自身の発明史</a:t>
             </a:r>
@@ -12606,9 +12606,9 @@
                 <a:solidFill>
                   <a:srgbClr val="595959"/>
                 </a:solidFill>
-                <a:latin typeface="Yu Gothic" pitchFamily="34" charset="0"/>
-                <a:ea typeface="Yu Gothic" pitchFamily="34" charset="-122"/>
-                <a:cs typeface="Yu Gothic" pitchFamily="34" charset="-120"/>
+                <a:latin typeface="游ゴシック" pitchFamily="34" charset="0"/>
+                <a:ea typeface="游ゴシック" pitchFamily="34" charset="-122"/>
+                <a:cs typeface="游ゴシック" pitchFamily="34" charset="-120"/>
               </a:rPr>
               <a:t>5 – 7</a:t>
             </a:r>
@@ -12668,9 +12668,9 @@
                 <a:solidFill>
                   <a:srgbClr val="17828F"/>
                 </a:solidFill>
-                <a:latin typeface="Yu Gothic" pitchFamily="34" charset="0"/>
-                <a:ea typeface="Yu Gothic" pitchFamily="34" charset="-122"/>
-                <a:cs typeface="Yu Gothic" pitchFamily="34" charset="-120"/>
+                <a:latin typeface="游ゴシック" pitchFamily="34" charset="0"/>
+                <a:ea typeface="游ゴシック" pitchFamily="34" charset="-122"/>
+                <a:cs typeface="游ゴシック" pitchFamily="34" charset="-120"/>
               </a:rPr>
               <a:t>4.</a:t>
             </a:r>
@@ -12707,9 +12707,9 @@
                 <a:solidFill>
                   <a:srgbClr val="333333"/>
                 </a:solidFill>
-                <a:latin typeface="Yu Gothic" pitchFamily="34" charset="0"/>
-                <a:ea typeface="Yu Gothic" pitchFamily="34" charset="-122"/>
-                <a:cs typeface="Yu Gothic" pitchFamily="34" charset="-120"/>
+                <a:latin typeface="游ゴシック" pitchFamily="34" charset="0"/>
+                <a:ea typeface="游ゴシック" pitchFamily="34" charset="-122"/>
+                <a:cs typeface="游ゴシック" pitchFamily="34" charset="-120"/>
               </a:rPr>
               <a:t>本命コンセプト『ULTRA 3MIN.』</a:t>
             </a:r>
@@ -12746,9 +12746,9 @@
                 <a:solidFill>
                   <a:srgbClr val="808080"/>
                 </a:solidFill>
-                <a:latin typeface="Yu Gothic" pitchFamily="34" charset="0"/>
-                <a:ea typeface="Yu Gothic" pitchFamily="34" charset="-122"/>
-                <a:cs typeface="Yu Gothic" pitchFamily="34" charset="-120"/>
+                <a:latin typeface="游ゴシック" pitchFamily="34" charset="0"/>
+                <a:ea typeface="游ゴシック" pitchFamily="34" charset="-122"/>
+                <a:cs typeface="游ゴシック" pitchFamily="34" charset="-120"/>
               </a:rPr>
               <a:t>噛んで3分、味と色が変身する ── 体験・収集・デジタルの設計</a:t>
             </a:r>
@@ -12785,9 +12785,9 @@
                 <a:solidFill>
                   <a:srgbClr val="595959"/>
                 </a:solidFill>
-                <a:latin typeface="Yu Gothic" pitchFamily="34" charset="0"/>
-                <a:ea typeface="Yu Gothic" pitchFamily="34" charset="-122"/>
-                <a:cs typeface="Yu Gothic" pitchFamily="34" charset="-120"/>
+                <a:latin typeface="游ゴシック" pitchFamily="34" charset="0"/>
+                <a:ea typeface="游ゴシック" pitchFamily="34" charset="-122"/>
+                <a:cs typeface="游ゴシック" pitchFamily="34" charset="-120"/>
               </a:rPr>
               <a:t>8 – 11</a:t>
             </a:r>
@@ -12847,9 +12847,9 @@
                 <a:solidFill>
                   <a:srgbClr val="17828F"/>
                 </a:solidFill>
-                <a:latin typeface="Yu Gothic" pitchFamily="34" charset="0"/>
-                <a:ea typeface="Yu Gothic" pitchFamily="34" charset="-122"/>
-                <a:cs typeface="Yu Gothic" pitchFamily="34" charset="-120"/>
+                <a:latin typeface="游ゴシック" pitchFamily="34" charset="0"/>
+                <a:ea typeface="游ゴシック" pitchFamily="34" charset="-122"/>
+                <a:cs typeface="游ゴシック" pitchFamily="34" charset="-120"/>
               </a:rPr>
               <a:t>5.</a:t>
             </a:r>
@@ -12886,9 +12886,9 @@
                 <a:solidFill>
                   <a:srgbClr val="333333"/>
                 </a:solidFill>
-                <a:latin typeface="Yu Gothic" pitchFamily="34" charset="0"/>
-                <a:ea typeface="Yu Gothic" pitchFamily="34" charset="-122"/>
-                <a:cs typeface="Yu Gothic" pitchFamily="34" charset="-120"/>
+                <a:latin typeface="游ゴシック" pitchFamily="34" charset="0"/>
+                <a:ea typeface="游ゴシック" pitchFamily="34" charset="-122"/>
+                <a:cs typeface="游ゴシック" pitchFamily="34" charset="-120"/>
               </a:rPr>
               <a:t>展開構想</a:t>
             </a:r>
@@ -12925,9 +12925,9 @@
                 <a:solidFill>
                   <a:srgbClr val="808080"/>
                 </a:solidFill>
-                <a:latin typeface="Yu Gothic" pitchFamily="34" charset="0"/>
-                <a:ea typeface="Yu Gothic" pitchFamily="34" charset="-122"/>
-                <a:cs typeface="Yu Gothic" pitchFamily="34" charset="-120"/>
+                <a:latin typeface="游ゴシック" pitchFamily="34" charset="0"/>
+                <a:ea typeface="游ゴシック" pitchFamily="34" charset="-122"/>
+                <a:cs typeface="游ゴシック" pitchFamily="34" charset="-120"/>
               </a:rPr>
               <a:t>商品群・ロードマップ・両社の体制と相補性</a:t>
             </a:r>
@@ -12964,9 +12964,9 @@
                 <a:solidFill>
                   <a:srgbClr val="595959"/>
                 </a:solidFill>
-                <a:latin typeface="Yu Gothic" pitchFamily="34" charset="0"/>
-                <a:ea typeface="Yu Gothic" pitchFamily="34" charset="-122"/>
-                <a:cs typeface="Yu Gothic" pitchFamily="34" charset="-120"/>
+                <a:latin typeface="游ゴシック" pitchFamily="34" charset="0"/>
+                <a:ea typeface="游ゴシック" pitchFamily="34" charset="-122"/>
+                <a:cs typeface="游ゴシック" pitchFamily="34" charset="-120"/>
               </a:rPr>
               <a:t>12 – 15</a:t>
             </a:r>
@@ -13026,9 +13026,9 @@
                 <a:solidFill>
                   <a:srgbClr val="17828F"/>
                 </a:solidFill>
-                <a:latin typeface="Yu Gothic" pitchFamily="34" charset="0"/>
-                <a:ea typeface="Yu Gothic" pitchFamily="34" charset="-122"/>
-                <a:cs typeface="Yu Gothic" pitchFamily="34" charset="-120"/>
+                <a:latin typeface="游ゴシック" pitchFamily="34" charset="0"/>
+                <a:ea typeface="游ゴシック" pitchFamily="34" charset="-122"/>
+                <a:cs typeface="游ゴシック" pitchFamily="34" charset="-120"/>
               </a:rPr>
               <a:t>6.</a:t>
             </a:r>
@@ -13065,9 +13065,9 @@
                 <a:solidFill>
                   <a:srgbClr val="333333"/>
                 </a:solidFill>
-                <a:latin typeface="Yu Gothic" pitchFamily="34" charset="0"/>
-                <a:ea typeface="Yu Gothic" pitchFamily="34" charset="-122"/>
-                <a:cs typeface="Yu Gothic" pitchFamily="34" charset="-120"/>
+                <a:latin typeface="游ゴシック" pitchFamily="34" charset="0"/>
+                <a:ea typeface="游ゴシック" pitchFamily="34" charset="-122"/>
+                <a:cs typeface="游ゴシック" pitchFamily="34" charset="-120"/>
               </a:rPr>
               <a:t>クロージング</a:t>
             </a:r>
@@ -13104,9 +13104,9 @@
                 <a:solidFill>
                   <a:srgbClr val="808080"/>
                 </a:solidFill>
-                <a:latin typeface="Yu Gothic" pitchFamily="34" charset="0"/>
-                <a:ea typeface="Yu Gothic" pitchFamily="34" charset="-122"/>
-                <a:cs typeface="Yu Gothic" pitchFamily="34" charset="-120"/>
+                <a:latin typeface="游ゴシック" pitchFamily="34" charset="0"/>
+                <a:ea typeface="游ゴシック" pitchFamily="34" charset="-122"/>
+                <a:cs typeface="游ゴシック" pitchFamily="34" charset="-120"/>
               </a:rPr>
               <a:t>想定されるご懸念への先回りと、次の一歩</a:t>
             </a:r>
@@ -13143,9 +13143,9 @@
                 <a:solidFill>
                   <a:srgbClr val="595959"/>
                 </a:solidFill>
-                <a:latin typeface="Yu Gothic" pitchFamily="34" charset="0"/>
-                <a:ea typeface="Yu Gothic" pitchFamily="34" charset="-122"/>
-                <a:cs typeface="Yu Gothic" pitchFamily="34" charset="-120"/>
+                <a:latin typeface="游ゴシック" pitchFamily="34" charset="0"/>
+                <a:ea typeface="游ゴシック" pitchFamily="34" charset="-122"/>
+                <a:cs typeface="游ゴシック" pitchFamily="34" charset="-120"/>
               </a:rPr>
               <a:t>16 – 17</a:t>
             </a:r>
@@ -13372,9 +13372,9 @@
                 <a:solidFill>
                   <a:srgbClr val="FFFFFF"/>
                 </a:solidFill>
-                <a:latin typeface="Yu Gothic" pitchFamily="34" charset="0"/>
-                <a:ea typeface="Yu Gothic" pitchFamily="34" charset="-122"/>
-                <a:cs typeface="Yu Gothic" pitchFamily="34" charset="-120"/>
+                <a:latin typeface="游ゴシック" pitchFamily="34" charset="0"/>
+                <a:ea typeface="游ゴシック" pitchFamily="34" charset="-122"/>
+                <a:cs typeface="游ゴシック" pitchFamily="34" charset="-120"/>
               </a:rPr>
               <a:t>1．オープニング</a:t>
             </a:r>
@@ -13431,9 +13431,9 @@
                 <a:solidFill>
                   <a:srgbClr val="595959"/>
                 </a:solidFill>
-                <a:latin typeface="Yu Gothic" pitchFamily="34" charset="0"/>
-                <a:ea typeface="Yu Gothic" pitchFamily="34" charset="-122"/>
-                <a:cs typeface="Yu Gothic" pitchFamily="34" charset="-120"/>
+                <a:latin typeface="游ゴシック" pitchFamily="34" charset="0"/>
+                <a:ea typeface="游ゴシック" pitchFamily="34" charset="-122"/>
+                <a:cs typeface="游ゴシック" pitchFamily="34" charset="-120"/>
               </a:rPr>
               <a:t>極　秘</a:t>
             </a:r>
@@ -13470,9 +13470,9 @@
                 <a:solidFill>
                   <a:srgbClr val="333333"/>
                 </a:solidFill>
-                <a:latin typeface="Yu Gothic" pitchFamily="34" charset="0"/>
-                <a:ea typeface="Yu Gothic" pitchFamily="34" charset="-122"/>
-                <a:cs typeface="Yu Gothic" pitchFamily="34" charset="-120"/>
+                <a:latin typeface="游ゴシック" pitchFamily="34" charset="0"/>
+                <a:ea typeface="游ゴシック" pitchFamily="34" charset="-122"/>
+                <a:cs typeface="游ゴシック" pitchFamily="34" charset="-120"/>
               </a:rPr>
               <a:t>ご提案の骨子：コラボではなく、カテゴリーを創る</a:t>
             </a:r>
@@ -13512,9 +13512,9 @@
                 <a:solidFill>
                   <a:srgbClr val="404040"/>
                 </a:solidFill>
-                <a:latin typeface="Yu Gothic" pitchFamily="34" charset="0"/>
-                <a:ea typeface="Yu Gothic" pitchFamily="34" charset="-122"/>
-                <a:cs typeface="Yu Gothic" pitchFamily="34" charset="-120"/>
+                <a:latin typeface="游ゴシック" pitchFamily="34" charset="0"/>
+                <a:ea typeface="游ゴシック" pitchFamily="34" charset="-122"/>
+                <a:cs typeface="游ゴシック" pitchFamily="34" charset="-120"/>
               </a:rPr>
               <a:t>本日の提案は、期間限定のキャラクターコラボではない。ビックリマン・おーいお茶がそうであったように、</a:t>
             </a:r>
@@ -13532,9 +13532,9 @@
                 <a:solidFill>
                   <a:srgbClr val="404040"/>
                 </a:solidFill>
-                <a:latin typeface="Yu Gothic" pitchFamily="34" charset="0"/>
-                <a:ea typeface="Yu Gothic" pitchFamily="34" charset="-122"/>
-                <a:cs typeface="Yu Gothic" pitchFamily="34" charset="-120"/>
+                <a:latin typeface="游ゴシック" pitchFamily="34" charset="0"/>
+                <a:ea typeface="游ゴシック" pitchFamily="34" charset="-122"/>
+                <a:cs typeface="游ゴシック" pitchFamily="34" charset="-120"/>
               </a:rPr>
               <a:t>「新しい習慣」を発明し、売場に新カテゴリーを定義する共同事業の検討をお願いしたい</a:t>
             </a:r>
@@ -13697,9 +13697,9 @@
                           <a:solidFill>
                             <a:srgbClr val="C00000"/>
                           </a:solidFill>
-                          <a:latin typeface="Yu Gothic" pitchFamily="34" charset="0"/>
-                          <a:ea typeface="Yu Gothic" pitchFamily="34" charset="-122"/>
-                          <a:cs typeface="Yu Gothic" pitchFamily="34" charset="-120"/>
+                          <a:latin typeface="游ゴシック" pitchFamily="34" charset="0"/>
+                          <a:ea typeface="游ゴシック" pitchFamily="34" charset="-122"/>
+                          <a:cs typeface="游ゴシック" pitchFamily="34" charset="-120"/>
                         </a:rPr>
                         <a:t>① </a:t>
                       </a:r>
@@ -13711,16 +13711,16 @@
                           <a:solidFill>
                             <a:srgbClr val="333333"/>
                           </a:solidFill>
-                          <a:latin typeface="Yu Gothic" pitchFamily="34" charset="0"/>
-                          <a:ea typeface="Yu Gothic" pitchFamily="34" charset="-122"/>
-                          <a:cs typeface="Yu Gothic" pitchFamily="34" charset="-120"/>
+                          <a:latin typeface="游ゴシック" pitchFamily="34" charset="0"/>
+                          <a:ea typeface="游ゴシック" pitchFamily="34" charset="-122"/>
+                          <a:cs typeface="游ゴシック" pitchFamily="34" charset="-120"/>
                         </a:rPr>
                         <a:t>単発コラボの先へ</a:t>
                       </a:r>
                       <a:endParaRPr lang="en-US" sz="1100" dirty="0">
-                        <a:latin typeface="Yu Gothic" charset="0"/>
-                        <a:ea typeface="Yu Gothic" charset="0"/>
-                        <a:cs typeface="Yu Gothic" charset="0"/>
+                        <a:latin typeface="游ゴシック" charset="0"/>
+                        <a:ea typeface="游ゴシック" charset="0"/>
+                        <a:cs typeface="游ゴシック" charset="0"/>
                       </a:endParaRPr>
                     </a:p>
                   </a:txBody>
@@ -13779,16 +13779,16 @@
                           <a:solidFill>
                             <a:srgbClr val="404040"/>
                           </a:solidFill>
-                          <a:latin typeface="Yu Gothic" pitchFamily="34" charset="0"/>
-                          <a:ea typeface="Yu Gothic" pitchFamily="34" charset="-122"/>
-                          <a:cs typeface="Yu Gothic" pitchFamily="34" charset="-120"/>
+                          <a:latin typeface="游ゴシック" pitchFamily="34" charset="0"/>
+                          <a:ea typeface="游ゴシック" pitchFamily="34" charset="-122"/>
+                          <a:cs typeface="游ゴシック" pitchFamily="34" charset="-120"/>
                         </a:rPr>
                         <a:t>キャラクターを借りた期間限定コラボは、百戦錬磨の御社に不要。両社の資産を掛け合わせ、ビックリマン・おーいお茶級の「新カテゴリー」を発明することを提案する</a:t>
                       </a:r>
                       <a:endParaRPr lang="en-US" sz="1100" dirty="0">
-                        <a:latin typeface="Yu Gothic" charset="0"/>
-                        <a:ea typeface="Yu Gothic" charset="0"/>
-                        <a:cs typeface="Yu Gothic" charset="0"/>
+                        <a:latin typeface="游ゴシック" charset="0"/>
+                        <a:ea typeface="游ゴシック" charset="0"/>
+                        <a:cs typeface="游ゴシック" charset="0"/>
                       </a:endParaRPr>
                     </a:p>
                   </a:txBody>
@@ -13846,9 +13846,9 @@
                           <a:solidFill>
                             <a:srgbClr val="C00000"/>
                           </a:solidFill>
-                          <a:latin typeface="Yu Gothic" pitchFamily="34" charset="0"/>
-                          <a:ea typeface="Yu Gothic" pitchFamily="34" charset="-122"/>
-                          <a:cs typeface="Yu Gothic" pitchFamily="34" charset="-120"/>
+                          <a:latin typeface="游ゴシック" pitchFamily="34" charset="0"/>
+                          <a:ea typeface="游ゴシック" pitchFamily="34" charset="-122"/>
+                          <a:cs typeface="游ゴシック" pitchFamily="34" charset="-120"/>
                         </a:rPr>
                         <a:t>② </a:t>
                       </a:r>
@@ -13860,16 +13860,16 @@
                           <a:solidFill>
                             <a:srgbClr val="333333"/>
                           </a:solidFill>
-                          <a:latin typeface="Yu Gothic" pitchFamily="34" charset="0"/>
-                          <a:ea typeface="Yu Gothic" pitchFamily="34" charset="-122"/>
-                          <a:cs typeface="Yu Gothic" pitchFamily="34" charset="-120"/>
+                          <a:latin typeface="游ゴシック" pitchFamily="34" charset="0"/>
+                          <a:ea typeface="游ゴシック" pitchFamily="34" charset="-122"/>
+                          <a:cs typeface="游ゴシック" pitchFamily="34" charset="-120"/>
                         </a:rPr>
                         <a:t>中核は「3分間」の体験</a:t>
                       </a:r>
                       <a:endParaRPr lang="en-US" sz="1100" dirty="0">
-                        <a:latin typeface="Yu Gothic" charset="0"/>
-                        <a:ea typeface="Yu Gothic" charset="0"/>
-                        <a:cs typeface="Yu Gothic" charset="0"/>
+                        <a:latin typeface="游ゴシック" charset="0"/>
+                        <a:ea typeface="游ゴシック" charset="0"/>
+                        <a:cs typeface="游ゴシック" charset="0"/>
                       </a:endParaRPr>
                     </a:p>
                   </a:txBody>
@@ -13928,16 +13928,16 @@
                           <a:solidFill>
                             <a:srgbClr val="404040"/>
                           </a:solidFill>
-                          <a:latin typeface="Yu Gothic" pitchFamily="34" charset="0"/>
-                          <a:ea typeface="Yu Gothic" pitchFamily="34" charset="-122"/>
-                          <a:cs typeface="Yu Gothic" pitchFamily="34" charset="-120"/>
+                          <a:latin typeface="游ゴシック" pitchFamily="34" charset="0"/>
+                          <a:ea typeface="游ゴシック" pitchFamily="34" charset="-122"/>
+                          <a:cs typeface="游ゴシック" pitchFamily="34" charset="-120"/>
                         </a:rPr>
                         <a:t>本命コンセプト『ULTRA 3MIN.』── 噛んで3分で味と色が変身するガム＆グミ。カラータイマーという国民的体験を、御社の咀嚼研究とフレーバー技術で口の中に再現する</a:t>
                       </a:r>
                       <a:endParaRPr lang="en-US" sz="1100" dirty="0">
-                        <a:latin typeface="Yu Gothic" charset="0"/>
-                        <a:ea typeface="Yu Gothic" charset="0"/>
-                        <a:cs typeface="Yu Gothic" charset="0"/>
+                        <a:latin typeface="游ゴシック" charset="0"/>
+                        <a:ea typeface="游ゴシック" charset="0"/>
+                        <a:cs typeface="游ゴシック" charset="0"/>
                       </a:endParaRPr>
                     </a:p>
                   </a:txBody>
@@ -13995,9 +13995,9 @@
                           <a:solidFill>
                             <a:srgbClr val="C00000"/>
                           </a:solidFill>
-                          <a:latin typeface="Yu Gothic" pitchFamily="34" charset="0"/>
-                          <a:ea typeface="Yu Gothic" pitchFamily="34" charset="-122"/>
-                          <a:cs typeface="Yu Gothic" pitchFamily="34" charset="-120"/>
+                          <a:latin typeface="游ゴシック" pitchFamily="34" charset="0"/>
+                          <a:ea typeface="游ゴシック" pitchFamily="34" charset="-122"/>
+                          <a:cs typeface="游ゴシック" pitchFamily="34" charset="-120"/>
                         </a:rPr>
                         <a:t>③ </a:t>
                       </a:r>
@@ -14009,16 +14009,16 @@
                           <a:solidFill>
                             <a:srgbClr val="333333"/>
                           </a:solidFill>
-                          <a:latin typeface="Yu Gothic" pitchFamily="34" charset="0"/>
-                          <a:ea typeface="Yu Gothic" pitchFamily="34" charset="-122"/>
-                          <a:cs typeface="Yu Gothic" pitchFamily="34" charset="-120"/>
+                          <a:latin typeface="游ゴシック" pitchFamily="34" charset="0"/>
+                          <a:ea typeface="游ゴシック" pitchFamily="34" charset="-122"/>
+                          <a:cs typeface="游ゴシック" pitchFamily="34" charset="-120"/>
                         </a:rPr>
                         <a:t>追い風は今年だけ</a:t>
                       </a:r>
                       <a:endParaRPr lang="en-US" sz="1100" dirty="0">
-                        <a:latin typeface="Yu Gothic" charset="0"/>
-                        <a:ea typeface="Yu Gothic" charset="0"/>
-                        <a:cs typeface="Yu Gothic" charset="0"/>
+                        <a:latin typeface="游ゴシック" charset="0"/>
+                        <a:ea typeface="游ゴシック" charset="0"/>
+                        <a:cs typeface="游ゴシック" charset="0"/>
                       </a:endParaRPr>
                     </a:p>
                   </a:txBody>
@@ -14077,16 +14077,16 @@
                           <a:solidFill>
                             <a:srgbClr val="404040"/>
                           </a:solidFill>
-                          <a:latin typeface="Yu Gothic" pitchFamily="34" charset="0"/>
-                          <a:ea typeface="Yu Gothic" pitchFamily="34" charset="-122"/>
-                          <a:cs typeface="Yu Gothic" pitchFamily="34" charset="-120"/>
+                          <a:latin typeface="游ゴシック" pitchFamily="34" charset="0"/>
+                          <a:ea typeface="游ゴシック" pitchFamily="34" charset="-122"/>
+                          <a:cs typeface="游ゴシック" pitchFamily="34" charset="-120"/>
                         </a:rPr>
                         <a:t>2026年はシリーズ放送開始60周年。記念作『ウルトラマンテオ』が世界同時放送・配信中であり、国内の話題性とグローバル展開の入口が同時に開いている</a:t>
                       </a:r>
                       <a:endParaRPr lang="en-US" sz="1100" dirty="0">
-                        <a:latin typeface="Yu Gothic" charset="0"/>
-                        <a:ea typeface="Yu Gothic" charset="0"/>
-                        <a:cs typeface="Yu Gothic" charset="0"/>
+                        <a:latin typeface="游ゴシック" charset="0"/>
+                        <a:ea typeface="游ゴシック" charset="0"/>
+                        <a:cs typeface="游ゴシック" charset="0"/>
                       </a:endParaRPr>
                     </a:p>
                   </a:txBody>
@@ -14175,16 +14175,16 @@
                           <a:solidFill>
                             <a:srgbClr val="FFFFFF"/>
                           </a:solidFill>
-                          <a:latin typeface="Yu Gothic" pitchFamily="34" charset="0"/>
-                          <a:ea typeface="Yu Gothic" pitchFamily="34" charset="-122"/>
-                          <a:cs typeface="Yu Gothic" pitchFamily="34" charset="-120"/>
+                          <a:latin typeface="游ゴシック" pitchFamily="34" charset="0"/>
+                          <a:ea typeface="游ゴシック" pitchFamily="34" charset="-122"/>
+                          <a:cs typeface="游ゴシック" pitchFamily="34" charset="-120"/>
                         </a:rPr>
                         <a:t>60周年</a:t>
                       </a:r>
                       <a:endParaRPr lang="en-US" sz="1100" dirty="0">
-                        <a:latin typeface="Yu Gothic" charset="0"/>
-                        <a:ea typeface="Yu Gothic" charset="0"/>
-                        <a:cs typeface="Yu Gothic" charset="0"/>
+                        <a:latin typeface="游ゴシック" charset="0"/>
+                        <a:ea typeface="游ゴシック" charset="0"/>
+                        <a:cs typeface="游ゴシック" charset="0"/>
                       </a:endParaRPr>
                     </a:p>
                   </a:txBody>
@@ -14243,16 +14243,16 @@
                           <a:solidFill>
                             <a:srgbClr val="FFFFFF"/>
                           </a:solidFill>
-                          <a:latin typeface="Yu Gothic" pitchFamily="34" charset="0"/>
-                          <a:ea typeface="Yu Gothic" pitchFamily="34" charset="-122"/>
-                          <a:cs typeface="Yu Gothic" pitchFamily="34" charset="-120"/>
+                          <a:latin typeface="游ゴシック" pitchFamily="34" charset="0"/>
+                          <a:ea typeface="游ゴシック" pitchFamily="34" charset="-122"/>
+                          <a:cs typeface="游ゴシック" pitchFamily="34" charset="-120"/>
                         </a:rPr>
                         <a:t>4億個</a:t>
                       </a:r>
                       <a:endParaRPr lang="en-US" sz="1100" dirty="0">
-                        <a:latin typeface="Yu Gothic" charset="0"/>
-                        <a:ea typeface="Yu Gothic" charset="0"/>
-                        <a:cs typeface="Yu Gothic" charset="0"/>
+                        <a:latin typeface="游ゴシック" charset="0"/>
+                        <a:ea typeface="游ゴシック" charset="0"/>
+                        <a:cs typeface="游ゴシック" charset="0"/>
                       </a:endParaRPr>
                     </a:p>
                   </a:txBody>
@@ -14311,16 +14311,16 @@
                           <a:solidFill>
                             <a:srgbClr val="FFFFFF"/>
                           </a:solidFill>
-                          <a:latin typeface="Yu Gothic" pitchFamily="34" charset="0"/>
-                          <a:ea typeface="Yu Gothic" pitchFamily="34" charset="-122"/>
-                          <a:cs typeface="Yu Gothic" pitchFamily="34" charset="-120"/>
+                          <a:latin typeface="游ゴシック" pitchFamily="34" charset="0"/>
+                          <a:ea typeface="游ゴシック" pitchFamily="34" charset="-122"/>
+                          <a:cs typeface="游ゴシック" pitchFamily="34" charset="-120"/>
                         </a:rPr>
                         <a:t>3分</a:t>
                       </a:r>
                       <a:endParaRPr lang="en-US" sz="1100" dirty="0">
-                        <a:latin typeface="Yu Gothic" charset="0"/>
-                        <a:ea typeface="Yu Gothic" charset="0"/>
-                        <a:cs typeface="Yu Gothic" charset="0"/>
+                        <a:latin typeface="游ゴシック" charset="0"/>
+                        <a:ea typeface="游ゴシック" charset="0"/>
+                        <a:cs typeface="游ゴシック" charset="0"/>
                       </a:endParaRPr>
                     </a:p>
                   </a:txBody>
@@ -14381,16 +14381,16 @@
                           <a:solidFill>
                             <a:srgbClr val="808080"/>
                           </a:solidFill>
-                          <a:latin typeface="Yu Gothic" pitchFamily="34" charset="0"/>
-                          <a:ea typeface="Yu Gothic" pitchFamily="34" charset="-122"/>
-                          <a:cs typeface="Yu Gothic" pitchFamily="34" charset="-120"/>
+                          <a:latin typeface="游ゴシック" pitchFamily="34" charset="0"/>
+                          <a:ea typeface="游ゴシック" pitchFamily="34" charset="-122"/>
+                          <a:cs typeface="游ゴシック" pitchFamily="34" charset="-120"/>
                         </a:rPr>
                         <a:t>2026年、ウルトラマンシリーズ放送開始からの節目</a:t>
                       </a:r>
                       <a:endParaRPr lang="en-US" sz="950" dirty="0">
-                        <a:latin typeface="Yu Gothic" charset="0"/>
-                        <a:ea typeface="Yu Gothic" charset="0"/>
-                        <a:cs typeface="Yu Gothic" charset="0"/>
+                        <a:latin typeface="游ゴシック" charset="0"/>
+                        <a:ea typeface="游ゴシック" charset="0"/>
+                        <a:cs typeface="游ゴシック" charset="0"/>
                       </a:endParaRPr>
                     </a:p>
                   </a:txBody>
@@ -14446,16 +14446,16 @@
                           <a:solidFill>
                             <a:srgbClr val="808080"/>
                           </a:solidFill>
-                          <a:latin typeface="Yu Gothic" pitchFamily="34" charset="0"/>
-                          <a:ea typeface="Yu Gothic" pitchFamily="34" charset="-122"/>
-                          <a:cs typeface="Yu Gothic" pitchFamily="34" charset="-120"/>
+                          <a:latin typeface="游ゴシック" pitchFamily="34" charset="0"/>
+                          <a:ea typeface="游ゴシック" pitchFamily="34" charset="-122"/>
+                          <a:cs typeface="游ゴシック" pitchFamily="34" charset="-120"/>
                         </a:rPr>
                         <a:t>ビックリマン最盛期の年間販売個数</a:t>
                       </a:r>
                       <a:endParaRPr lang="en-US" sz="950" dirty="0">
-                        <a:latin typeface="Yu Gothic" charset="0"/>
-                        <a:ea typeface="Yu Gothic" charset="0"/>
-                        <a:cs typeface="Yu Gothic" charset="0"/>
+                        <a:latin typeface="游ゴシック" charset="0"/>
+                        <a:ea typeface="游ゴシック" charset="0"/>
+                        <a:cs typeface="游ゴシック" charset="0"/>
                       </a:endParaRPr>
                     </a:p>
                   </a:txBody>
@@ -14511,16 +14511,16 @@
                           <a:solidFill>
                             <a:srgbClr val="808080"/>
                           </a:solidFill>
-                          <a:latin typeface="Yu Gothic" pitchFamily="34" charset="0"/>
-                          <a:ea typeface="Yu Gothic" pitchFamily="34" charset="-122"/>
-                          <a:cs typeface="Yu Gothic" pitchFamily="34" charset="-120"/>
+                          <a:latin typeface="游ゴシック" pitchFamily="34" charset="0"/>
+                          <a:ea typeface="游ゴシック" pitchFamily="34" charset="-122"/>
+                          <a:cs typeface="游ゴシック" pitchFamily="34" charset="-120"/>
                         </a:rPr>
                         <a:t>カラータイマー ＝ 本提案の中核体験</a:t>
                       </a:r>
                       <a:endParaRPr lang="en-US" sz="950" dirty="0">
-                        <a:latin typeface="Yu Gothic" charset="0"/>
-                        <a:ea typeface="Yu Gothic" charset="0"/>
-                        <a:cs typeface="Yu Gothic" charset="0"/>
+                        <a:latin typeface="游ゴシック" charset="0"/>
+                        <a:ea typeface="游ゴシック" charset="0"/>
+                        <a:cs typeface="游ゴシック" charset="0"/>
                       </a:endParaRPr>
                     </a:p>
                   </a:txBody>
@@ -14619,9 +14619,9 @@
                 <a:solidFill>
                   <a:srgbClr val="C00000"/>
                 </a:solidFill>
-                <a:latin typeface="Yu Gothic" pitchFamily="34" charset="0"/>
-                <a:ea typeface="Yu Gothic" pitchFamily="34" charset="-122"/>
-                <a:cs typeface="Yu Gothic" pitchFamily="34" charset="-120"/>
+                <a:latin typeface="游ゴシック" pitchFamily="34" charset="0"/>
+                <a:ea typeface="游ゴシック" pitchFamily="34" charset="-122"/>
+                <a:cs typeface="游ゴシック" pitchFamily="34" charset="-120"/>
               </a:rPr>
               <a:t>① </a:t>
             </a:r>
@@ -14633,9 +14633,9 @@
                 <a:solidFill>
                   <a:srgbClr val="404040"/>
                 </a:solidFill>
-                <a:latin typeface="Yu Gothic" pitchFamily="34" charset="0"/>
-                <a:ea typeface="Yu Gothic" pitchFamily="34" charset="-122"/>
-                <a:cs typeface="Yu Gothic" pitchFamily="34" charset="-120"/>
+                <a:latin typeface="游ゴシック" pitchFamily="34" charset="0"/>
+                <a:ea typeface="游ゴシック" pitchFamily="34" charset="-122"/>
+                <a:cs typeface="游ゴシック" pitchFamily="34" charset="-120"/>
               </a:rPr>
               <a:t>「3分」── 誰もが体で覚えている、世界で最も有名な時間制限を食体験に翻訳する</a:t>
             </a:r>
@@ -14724,9 +14724,9 @@
                 <a:solidFill>
                   <a:srgbClr val="FFFFFF"/>
                 </a:solidFill>
-                <a:latin typeface="Yu Gothic" pitchFamily="34" charset="0"/>
-                <a:ea typeface="Yu Gothic" pitchFamily="34" charset="-122"/>
-                <a:cs typeface="Yu Gothic" pitchFamily="34" charset="-120"/>
+                <a:latin typeface="游ゴシック" pitchFamily="34" charset="0"/>
+                <a:ea typeface="游ゴシック" pitchFamily="34" charset="-122"/>
+                <a:cs typeface="游ゴシック" pitchFamily="34" charset="-120"/>
               </a:rPr>
               <a:t>2．なぜ、いまか</a:t>
             </a:r>
@@ -14783,9 +14783,9 @@
                 <a:solidFill>
                   <a:srgbClr val="595959"/>
                 </a:solidFill>
-                <a:latin typeface="Yu Gothic" pitchFamily="34" charset="0"/>
-                <a:ea typeface="Yu Gothic" pitchFamily="34" charset="-122"/>
-                <a:cs typeface="Yu Gothic" pitchFamily="34" charset="-120"/>
+                <a:latin typeface="游ゴシック" pitchFamily="34" charset="0"/>
+                <a:ea typeface="游ゴシック" pitchFamily="34" charset="-122"/>
+                <a:cs typeface="游ゴシック" pitchFamily="34" charset="-120"/>
               </a:rPr>
               <a:t>極　秘</a:t>
             </a:r>
@@ -14822,9 +14822,9 @@
                 <a:solidFill>
                   <a:srgbClr val="333333"/>
                 </a:solidFill>
-                <a:latin typeface="Yu Gothic" pitchFamily="34" charset="0"/>
-                <a:ea typeface="Yu Gothic" pitchFamily="34" charset="-122"/>
-                <a:cs typeface="Yu Gothic" pitchFamily="34" charset="-120"/>
+                <a:latin typeface="游ゴシック" pitchFamily="34" charset="0"/>
+                <a:ea typeface="游ゴシック" pitchFamily="34" charset="-122"/>
+                <a:cs typeface="游ゴシック" pitchFamily="34" charset="-120"/>
               </a:rPr>
               <a:t>なぜ「いま」なのか ── 3つの追い風</a:t>
             </a:r>
@@ -14864,9 +14864,9 @@
                 <a:solidFill>
                   <a:srgbClr val="404040"/>
                 </a:solidFill>
-                <a:latin typeface="Yu Gothic" pitchFamily="34" charset="0"/>
-                <a:ea typeface="Yu Gothic" pitchFamily="34" charset="-122"/>
-                <a:cs typeface="Yu Gothic" pitchFamily="34" charset="-120"/>
+                <a:latin typeface="游ゴシック" pitchFamily="34" charset="0"/>
+                <a:ea typeface="游ゴシック" pitchFamily="34" charset="-122"/>
+                <a:cs typeface="游ゴシック" pitchFamily="34" charset="-120"/>
               </a:rPr>
               <a:t>話題性・物語性・売場の構造変化が同時に揃うのは2026〜27年だけ。意思決定のタイミングそのものが本提案の価値である</a:t>
             </a:r>
@@ -15029,16 +15029,16 @@
                           <a:solidFill>
                             <a:srgbClr val="333333"/>
                           </a:solidFill>
-                          <a:latin typeface="Yu Gothic" pitchFamily="34" charset="0"/>
-                          <a:ea typeface="Yu Gothic" pitchFamily="34" charset="-122"/>
-                          <a:cs typeface="Yu Gothic" pitchFamily="34" charset="-120"/>
+                          <a:latin typeface="游ゴシック" pitchFamily="34" charset="0"/>
+                          <a:ea typeface="游ゴシック" pitchFamily="34" charset="-122"/>
+                          <a:cs typeface="游ゴシック" pitchFamily="34" charset="-120"/>
                         </a:rPr>
                         <a:t>① 60周年イヤーの熱量</a:t>
                       </a:r>
                       <a:endParaRPr lang="en-US" sz="1100" dirty="0">
-                        <a:latin typeface="Yu Gothic" charset="0"/>
-                        <a:ea typeface="Yu Gothic" charset="0"/>
-                        <a:cs typeface="Yu Gothic" charset="0"/>
+                        <a:latin typeface="游ゴシック" charset="0"/>
+                        <a:ea typeface="游ゴシック" charset="0"/>
+                        <a:cs typeface="游ゴシック" charset="0"/>
                       </a:endParaRPr>
                     </a:p>
                   </a:txBody>
@@ -15097,16 +15097,16 @@
                           <a:solidFill>
                             <a:srgbClr val="404040"/>
                           </a:solidFill>
-                          <a:latin typeface="Yu Gothic" pitchFamily="34" charset="0"/>
-                          <a:ea typeface="Yu Gothic" pitchFamily="34" charset="-122"/>
-                          <a:cs typeface="Yu Gothic" pitchFamily="34" charset="-120"/>
+                          <a:latin typeface="游ゴシック" pitchFamily="34" charset="0"/>
+                          <a:ea typeface="游ゴシック" pitchFamily="34" charset="-122"/>
+                          <a:cs typeface="游ゴシック" pitchFamily="34" charset="-120"/>
                         </a:rPr>
                         <a:t>2026年はウルトラマンシリーズ放送開始60周年。60周年プロジェクトが進行中で、記念作『ウルトラマンテオ』は世界同時放送・同時配信。露出量・ファンの熱量・小売の棚の注目度が今年から来年にかけて最高潮に達する</a:t>
                       </a:r>
                       <a:endParaRPr lang="en-US" sz="1100" dirty="0">
-                        <a:latin typeface="Yu Gothic" charset="0"/>
-                        <a:ea typeface="Yu Gothic" charset="0"/>
-                        <a:cs typeface="Yu Gothic" charset="0"/>
+                        <a:latin typeface="游ゴシック" charset="0"/>
+                        <a:ea typeface="游ゴシック" charset="0"/>
+                        <a:cs typeface="游ゴシック" charset="0"/>
                       </a:endParaRPr>
                     </a:p>
                   </a:txBody>
@@ -15164,16 +15164,16 @@
                           <a:solidFill>
                             <a:srgbClr val="333333"/>
                           </a:solidFill>
-                          <a:latin typeface="Yu Gothic" pitchFamily="34" charset="0"/>
-                          <a:ea typeface="Yu Gothic" pitchFamily="34" charset="-122"/>
-                          <a:cs typeface="Yu Gothic" pitchFamily="34" charset="-120"/>
+                          <a:latin typeface="游ゴシック" pitchFamily="34" charset="0"/>
+                          <a:ea typeface="游ゴシック" pitchFamily="34" charset="-122"/>
+                          <a:cs typeface="游ゴシック" pitchFamily="34" charset="-120"/>
                         </a:rPr>
                         <a:t>② 半世紀ぶりの再タッグ</a:t>
                       </a:r>
                       <a:endParaRPr lang="en-US" sz="1100" dirty="0">
-                        <a:latin typeface="Yu Gothic" charset="0"/>
-                        <a:ea typeface="Yu Gothic" charset="0"/>
-                        <a:cs typeface="Yu Gothic" charset="0"/>
+                        <a:latin typeface="游ゴシック" charset="0"/>
+                        <a:ea typeface="游ゴシック" charset="0"/>
+                        <a:cs typeface="游ゴシック" charset="0"/>
                       </a:endParaRPr>
                     </a:p>
                   </a:txBody>
@@ -15232,16 +15232,16 @@
                           <a:solidFill>
                             <a:srgbClr val="404040"/>
                           </a:solidFill>
-                          <a:latin typeface="Yu Gothic" pitchFamily="34" charset="0"/>
-                          <a:ea typeface="Yu Gothic" pitchFamily="34" charset="-122"/>
-                          <a:cs typeface="Yu Gothic" pitchFamily="34" charset="-120"/>
+                          <a:latin typeface="游ゴシック" pitchFamily="34" charset="0"/>
+                          <a:ea typeface="游ゴシック" pitchFamily="34" charset="-122"/>
+                          <a:cs typeface="游ゴシック" pitchFamily="34" charset="-120"/>
                         </a:rPr>
                         <a:t>1970年代、ロッテはウルトラマンのアイスを販売していた。「あのロッテとウルトラマンが半世紀ぶりに再会し、今度はカテゴリーを創る」── この物語自体が発表時の大きなニュースになる</a:t>
                       </a:r>
                       <a:endParaRPr lang="en-US" sz="1100" dirty="0">
-                        <a:latin typeface="Yu Gothic" charset="0"/>
-                        <a:ea typeface="Yu Gothic" charset="0"/>
-                        <a:cs typeface="Yu Gothic" charset="0"/>
+                        <a:latin typeface="游ゴシック" charset="0"/>
+                        <a:ea typeface="游ゴシック" charset="0"/>
+                        <a:cs typeface="游ゴシック" charset="0"/>
                       </a:endParaRPr>
                     </a:p>
                   </a:txBody>
@@ -15299,16 +15299,16 @@
                           <a:solidFill>
                             <a:srgbClr val="333333"/>
                           </a:solidFill>
-                          <a:latin typeface="Yu Gothic" pitchFamily="34" charset="0"/>
-                          <a:ea typeface="Yu Gothic" pitchFamily="34" charset="-122"/>
-                          <a:cs typeface="Yu Gothic" pitchFamily="34" charset="-120"/>
+                          <a:latin typeface="游ゴシック" pitchFamily="34" charset="0"/>
+                          <a:ea typeface="游ゴシック" pitchFamily="34" charset="-122"/>
+                          <a:cs typeface="游ゴシック" pitchFamily="34" charset="-120"/>
                         </a:rPr>
                         <a:t>③ 菓子売場の構造変化</a:t>
                       </a:r>
                       <a:endParaRPr lang="en-US" sz="1100" dirty="0">
-                        <a:latin typeface="Yu Gothic" charset="0"/>
-                        <a:ea typeface="Yu Gothic" charset="0"/>
-                        <a:cs typeface="Yu Gothic" charset="0"/>
+                        <a:latin typeface="游ゴシック" charset="0"/>
+                        <a:ea typeface="游ゴシック" charset="0"/>
+                        <a:cs typeface="游ゴシック" charset="0"/>
                       </a:endParaRPr>
                     </a:p>
                   </a:txBody>
@@ -15367,16 +15367,16 @@
                           <a:solidFill>
                             <a:srgbClr val="404040"/>
                           </a:solidFill>
-                          <a:latin typeface="Yu Gothic" pitchFamily="34" charset="0"/>
-                          <a:ea typeface="Yu Gothic" pitchFamily="34" charset="-122"/>
-                          <a:cs typeface="Yu Gothic" pitchFamily="34" charset="-120"/>
+                          <a:latin typeface="游ゴシック" pitchFamily="34" charset="0"/>
+                          <a:ea typeface="游ゴシック" pitchFamily="34" charset="-122"/>
+                          <a:cs typeface="游ゴシック" pitchFamily="34" charset="-120"/>
                         </a:rPr>
                         <a:t>ガム市場はピーク比4割超縮小する一方、グミは拡大しガムを逆転。御社は「噛むこと」の健康価値研究を推進中であり、噛む価値を新しい体験に転換する旗艦カテゴリーが求められる局面にある</a:t>
                       </a:r>
                       <a:endParaRPr lang="en-US" sz="1100" dirty="0">
-                        <a:latin typeface="Yu Gothic" charset="0"/>
-                        <a:ea typeface="Yu Gothic" charset="0"/>
-                        <a:cs typeface="Yu Gothic" charset="0"/>
+                        <a:latin typeface="游ゴシック" charset="0"/>
+                        <a:ea typeface="游ゴシック" charset="0"/>
+                        <a:cs typeface="游ゴシック" charset="0"/>
                       </a:endParaRPr>
                     </a:p>
                   </a:txBody>
@@ -15475,9 +15475,9 @@
                 <a:solidFill>
                   <a:srgbClr val="C00000"/>
                 </a:solidFill>
-                <a:latin typeface="Yu Gothic" pitchFamily="34" charset="0"/>
-                <a:ea typeface="Yu Gothic" pitchFamily="34" charset="-122"/>
-                <a:cs typeface="Yu Gothic" pitchFamily="34" charset="-120"/>
+                <a:latin typeface="游ゴシック" pitchFamily="34" charset="0"/>
+                <a:ea typeface="游ゴシック" pitchFamily="34" charset="-122"/>
+                <a:cs typeface="游ゴシック" pitchFamily="34" charset="-120"/>
               </a:rPr>
               <a:t>③ </a:t>
             </a:r>
@@ -15489,9 +15489,9 @@
                 <a:solidFill>
                   <a:srgbClr val="404040"/>
                 </a:solidFill>
-                <a:latin typeface="Yu Gothic" pitchFamily="34" charset="0"/>
-                <a:ea typeface="Yu Gothic" pitchFamily="34" charset="-122"/>
-                <a:cs typeface="Yu Gothic" pitchFamily="34" charset="-120"/>
+                <a:latin typeface="游ゴシック" pitchFamily="34" charset="0"/>
+                <a:ea typeface="游ゴシック" pitchFamily="34" charset="-122"/>
+                <a:cs typeface="游ゴシック" pitchFamily="34" charset="-120"/>
               </a:rPr>
               <a:t>が本提案の主戦場 ── 縮小するガムの技術資産と、拡大するグミの勢いを「一つの新カテゴリー」に束ね直す</a:t>
             </a:r>
@@ -15528,9 +15528,9 @@
                 <a:solidFill>
                   <a:srgbClr val="808080"/>
                 </a:solidFill>
-                <a:latin typeface="Yu Gothic" pitchFamily="34" charset="0"/>
-                <a:ea typeface="Yu Gothic" pitchFamily="34" charset="-122"/>
-                <a:cs typeface="Yu Gothic" pitchFamily="34" charset="-120"/>
+                <a:latin typeface="游ゴシック" pitchFamily="34" charset="0"/>
+                <a:ea typeface="游ゴシック" pitchFamily="34" charset="-122"/>
+                <a:cs typeface="游ゴシック" pitchFamily="34" charset="-120"/>
               </a:rPr>
               <a:t>出所：ウルトラマンシリーズ60周年記念サイト、東洋経済・日経報道（ガム／グミ市場）、当時のロッテ製品資料より作成</a:t>
             </a:r>
@@ -15619,9 +15619,9 @@
                 <a:solidFill>
                   <a:srgbClr val="FFFFFF"/>
                 </a:solidFill>
-                <a:latin typeface="Yu Gothic" pitchFamily="34" charset="0"/>
-                <a:ea typeface="Yu Gothic" pitchFamily="34" charset="-122"/>
-                <a:cs typeface="Yu Gothic" pitchFamily="34" charset="-120"/>
+                <a:latin typeface="游ゴシック" pitchFamily="34" charset="0"/>
+                <a:ea typeface="游ゴシック" pitchFamily="34" charset="-122"/>
+                <a:cs typeface="游ゴシック" pitchFamily="34" charset="-120"/>
               </a:rPr>
               <a:t>3．カテゴリー創造の方法論</a:t>
             </a:r>
@@ -15678,9 +15678,9 @@
                 <a:solidFill>
                   <a:srgbClr val="595959"/>
                 </a:solidFill>
-                <a:latin typeface="Yu Gothic" pitchFamily="34" charset="0"/>
-                <a:ea typeface="Yu Gothic" pitchFamily="34" charset="-122"/>
-                <a:cs typeface="Yu Gothic" pitchFamily="34" charset="-120"/>
+                <a:latin typeface="游ゴシック" pitchFamily="34" charset="0"/>
+                <a:ea typeface="游ゴシック" pitchFamily="34" charset="-122"/>
+                <a:cs typeface="游ゴシック" pitchFamily="34" charset="-120"/>
               </a:rPr>
               <a:t>極　秘</a:t>
             </a:r>
@@ -15717,9 +15717,9 @@
                 <a:solidFill>
                   <a:srgbClr val="333333"/>
                 </a:solidFill>
-                <a:latin typeface="Yu Gothic" pitchFamily="34" charset="0"/>
-                <a:ea typeface="Yu Gothic" pitchFamily="34" charset="-122"/>
-                <a:cs typeface="Yu Gothic" pitchFamily="34" charset="-120"/>
+                <a:latin typeface="游ゴシック" pitchFamily="34" charset="0"/>
+                <a:ea typeface="游ゴシック" pitchFamily="34" charset="-122"/>
+                <a:cs typeface="游ゴシック" pitchFamily="34" charset="-120"/>
               </a:rPr>
               <a:t>学ぶべきは「コラボ」ではなく「カテゴリー創造」</a:t>
             </a:r>
@@ -15759,9 +15759,9 @@
                 <a:solidFill>
                   <a:srgbClr val="404040"/>
                 </a:solidFill>
-                <a:latin typeface="Yu Gothic" pitchFamily="34" charset="0"/>
-                <a:ea typeface="Yu Gothic" pitchFamily="34" charset="-122"/>
-                <a:cs typeface="Yu Gothic" pitchFamily="34" charset="-120"/>
+                <a:latin typeface="游ゴシック" pitchFamily="34" charset="0"/>
+                <a:ea typeface="游ゴシック" pitchFamily="34" charset="-122"/>
+                <a:cs typeface="游ゴシック" pitchFamily="34" charset="-120"/>
               </a:rPr>
               <a:t>参照すべき先例は2つ。どちらも商品スペックではなく、「新しい習慣」を発明したことで数十年続く市場を作った</a:t>
             </a:r>
@@ -15921,9 +15921,9 @@
                         <a:buNone/>
                       </a:pPr>
                       <a:endParaRPr lang="en-US" sz="1050" dirty="0">
-                        <a:latin typeface="Yu Gothic" charset="0"/>
-                        <a:ea typeface="Yu Gothic" charset="0"/>
-                        <a:cs typeface="Yu Gothic" charset="0"/>
+                        <a:latin typeface="游ゴシック" charset="0"/>
+                        <a:ea typeface="游ゴシック" charset="0"/>
+                        <a:cs typeface="游ゴシック" charset="0"/>
                       </a:endParaRPr>
                     </a:p>
                   </a:txBody>
@@ -15982,16 +15982,16 @@
                           <a:solidFill>
                             <a:srgbClr val="FFFFFF"/>
                           </a:solidFill>
-                          <a:latin typeface="Yu Gothic" pitchFamily="34" charset="0"/>
-                          <a:ea typeface="Yu Gothic" pitchFamily="34" charset="-122"/>
-                          <a:cs typeface="Yu Gothic" pitchFamily="34" charset="-120"/>
+                          <a:latin typeface="游ゴシック" pitchFamily="34" charset="0"/>
+                          <a:ea typeface="游ゴシック" pitchFamily="34" charset="-122"/>
+                          <a:cs typeface="游ゴシック" pitchFamily="34" charset="-120"/>
                         </a:rPr>
                         <a:t>ビックリマンチョコ（ロッテ・1977〜）</a:t>
                       </a:r>
                       <a:endParaRPr lang="en-US" sz="1050" dirty="0">
-                        <a:latin typeface="Yu Gothic" charset="0"/>
-                        <a:ea typeface="Yu Gothic" charset="0"/>
-                        <a:cs typeface="Yu Gothic" charset="0"/>
+                        <a:latin typeface="游ゴシック" charset="0"/>
+                        <a:ea typeface="游ゴシック" charset="0"/>
+                        <a:cs typeface="游ゴシック" charset="0"/>
                       </a:endParaRPr>
                     </a:p>
                   </a:txBody>
@@ -16050,16 +16050,16 @@
                           <a:solidFill>
                             <a:srgbClr val="FFFFFF"/>
                           </a:solidFill>
-                          <a:latin typeface="Yu Gothic" pitchFamily="34" charset="0"/>
-                          <a:ea typeface="Yu Gothic" pitchFamily="34" charset="-122"/>
-                          <a:cs typeface="Yu Gothic" pitchFamily="34" charset="-120"/>
+                          <a:latin typeface="游ゴシック" pitchFamily="34" charset="0"/>
+                          <a:ea typeface="游ゴシック" pitchFamily="34" charset="-122"/>
+                          <a:cs typeface="游ゴシック" pitchFamily="34" charset="-120"/>
                         </a:rPr>
                         <a:t>おーいお茶（伊藤園・1989〜）</a:t>
                       </a:r>
                       <a:endParaRPr lang="en-US" sz="1050" dirty="0">
-                        <a:latin typeface="Yu Gothic" charset="0"/>
-                        <a:ea typeface="Yu Gothic" charset="0"/>
-                        <a:cs typeface="Yu Gothic" charset="0"/>
+                        <a:latin typeface="游ゴシック" charset="0"/>
+                        <a:ea typeface="游ゴシック" charset="0"/>
+                        <a:cs typeface="游ゴシック" charset="0"/>
                       </a:endParaRPr>
                     </a:p>
                   </a:txBody>
@@ -16120,16 +16120,16 @@
                           <a:solidFill>
                             <a:srgbClr val="333333"/>
                           </a:solidFill>
-                          <a:latin typeface="Yu Gothic" pitchFamily="34" charset="0"/>
-                          <a:ea typeface="Yu Gothic" pitchFamily="34" charset="-122"/>
-                          <a:cs typeface="Yu Gothic" pitchFamily="34" charset="-120"/>
+                          <a:latin typeface="游ゴシック" pitchFamily="34" charset="0"/>
+                          <a:ea typeface="游ゴシック" pitchFamily="34" charset="-122"/>
+                          <a:cs typeface="游ゴシック" pitchFamily="34" charset="-120"/>
                         </a:rPr>
                         <a:t>何をしたか</a:t>
                       </a:r>
                       <a:endParaRPr lang="en-US" sz="1050" dirty="0">
-                        <a:latin typeface="Yu Gothic" charset="0"/>
-                        <a:ea typeface="Yu Gothic" charset="0"/>
-                        <a:cs typeface="Yu Gothic" charset="0"/>
+                        <a:latin typeface="游ゴシック" charset="0"/>
+                        <a:ea typeface="游ゴシック" charset="0"/>
+                        <a:cs typeface="游ゴシック" charset="0"/>
                       </a:endParaRPr>
                     </a:p>
                   </a:txBody>
@@ -16188,16 +16188,16 @@
                           <a:solidFill>
                             <a:srgbClr val="404040"/>
                           </a:solidFill>
-                          <a:latin typeface="Yu Gothic" pitchFamily="34" charset="0"/>
-                          <a:ea typeface="Yu Gothic" pitchFamily="34" charset="-122"/>
-                          <a:cs typeface="Yu Gothic" pitchFamily="34" charset="-120"/>
+                          <a:latin typeface="游ゴシック" pitchFamily="34" charset="0"/>
+                          <a:ea typeface="游ゴシック" pitchFamily="34" charset="-122"/>
+                          <a:cs typeface="游ゴシック" pitchFamily="34" charset="-120"/>
                         </a:rPr>
                         <a:t>チョコにおまけを付けたのではなく、「シールを集める」という文化を発明。1985年の悪魔VS天使シールで社会現象化し、最盛期は年間4億個。「お一人様3個まで」が全国に広がった</a:t>
                       </a:r>
                       <a:endParaRPr lang="en-US" sz="1050" dirty="0">
-                        <a:latin typeface="Yu Gothic" charset="0"/>
-                        <a:ea typeface="Yu Gothic" charset="0"/>
-                        <a:cs typeface="Yu Gothic" charset="0"/>
+                        <a:latin typeface="游ゴシック" charset="0"/>
+                        <a:ea typeface="游ゴシック" charset="0"/>
+                        <a:cs typeface="游ゴシック" charset="0"/>
                       </a:endParaRPr>
                     </a:p>
                   </a:txBody>
@@ -16253,16 +16253,16 @@
                           <a:solidFill>
                             <a:srgbClr val="404040"/>
                           </a:solidFill>
-                          <a:latin typeface="Yu Gothic" pitchFamily="34" charset="0"/>
-                          <a:ea typeface="Yu Gothic" pitchFamily="34" charset="-122"/>
-                          <a:cs typeface="Yu Gothic" pitchFamily="34" charset="-120"/>
+                          <a:latin typeface="游ゴシック" pitchFamily="34" charset="0"/>
+                          <a:ea typeface="游ゴシック" pitchFamily="34" charset="-122"/>
+                          <a:cs typeface="游ゴシック" pitchFamily="34" charset="-120"/>
                         </a:rPr>
                         <a:t>お茶という商品を売ったのではなく、「緑茶は缶・ペットボトルで買うもの」という常識を発明。急須の代替ではなく、まったく新しい飲用シーンを創出した</a:t>
                       </a:r>
                       <a:endParaRPr lang="en-US" sz="1050" dirty="0">
-                        <a:latin typeface="Yu Gothic" charset="0"/>
-                        <a:ea typeface="Yu Gothic" charset="0"/>
-                        <a:cs typeface="Yu Gothic" charset="0"/>
+                        <a:latin typeface="游ゴシック" charset="0"/>
+                        <a:ea typeface="游ゴシック" charset="0"/>
+                        <a:cs typeface="游ゴシック" charset="0"/>
                       </a:endParaRPr>
                     </a:p>
                   </a:txBody>
@@ -16320,16 +16320,16 @@
                           <a:solidFill>
                             <a:srgbClr val="333333"/>
                           </a:solidFill>
-                          <a:latin typeface="Yu Gothic" pitchFamily="34" charset="0"/>
-                          <a:ea typeface="Yu Gothic" pitchFamily="34" charset="-122"/>
-                          <a:cs typeface="Yu Gothic" pitchFamily="34" charset="-120"/>
+                          <a:latin typeface="游ゴシック" pitchFamily="34" charset="0"/>
+                          <a:ea typeface="游ゴシック" pitchFamily="34" charset="-122"/>
+                          <a:cs typeface="游ゴシック" pitchFamily="34" charset="-120"/>
                         </a:rPr>
                         <a:t>発明したもの</a:t>
                       </a:r>
                       <a:endParaRPr lang="en-US" sz="1050" dirty="0">
-                        <a:latin typeface="Yu Gothic" charset="0"/>
-                        <a:ea typeface="Yu Gothic" charset="0"/>
-                        <a:cs typeface="Yu Gothic" charset="0"/>
+                        <a:latin typeface="游ゴシック" charset="0"/>
+                        <a:ea typeface="游ゴシック" charset="0"/>
+                        <a:cs typeface="游ゴシック" charset="0"/>
                       </a:endParaRPr>
                     </a:p>
                   </a:txBody>
@@ -16388,16 +16388,16 @@
                           <a:solidFill>
                             <a:srgbClr val="C00000"/>
                           </a:solidFill>
-                          <a:latin typeface="Yu Gothic" pitchFamily="34" charset="0"/>
-                          <a:ea typeface="Yu Gothic" pitchFamily="34" charset="-122"/>
-                          <a:cs typeface="Yu Gothic" pitchFamily="34" charset="-120"/>
+                          <a:latin typeface="游ゴシック" pitchFamily="34" charset="0"/>
+                          <a:ea typeface="游ゴシック" pitchFamily="34" charset="-122"/>
+                          <a:cs typeface="游ゴシック" pitchFamily="34" charset="-120"/>
                         </a:rPr>
                         <a:t>収集の習慣</a:t>
                       </a:r>
                       <a:endParaRPr lang="en-US" sz="1050" dirty="0">
-                        <a:latin typeface="Yu Gothic" charset="0"/>
-                        <a:ea typeface="Yu Gothic" charset="0"/>
-                        <a:cs typeface="Yu Gothic" charset="0"/>
+                        <a:latin typeface="游ゴシック" charset="0"/>
+                        <a:ea typeface="游ゴシック" charset="0"/>
+                        <a:cs typeface="游ゴシック" charset="0"/>
                       </a:endParaRPr>
                     </a:p>
                   </a:txBody>
@@ -16453,16 +16453,16 @@
                           <a:solidFill>
                             <a:srgbClr val="C00000"/>
                           </a:solidFill>
-                          <a:latin typeface="Yu Gothic" pitchFamily="34" charset="0"/>
-                          <a:ea typeface="Yu Gothic" pitchFamily="34" charset="-122"/>
-                          <a:cs typeface="Yu Gothic" pitchFamily="34" charset="-120"/>
+                          <a:latin typeface="游ゴシック" pitchFamily="34" charset="0"/>
+                          <a:ea typeface="游ゴシック" pitchFamily="34" charset="-122"/>
+                          <a:cs typeface="游ゴシック" pitchFamily="34" charset="-120"/>
                         </a:rPr>
                         <a:t>購買の習慣</a:t>
                       </a:r>
                       <a:endParaRPr lang="en-US" sz="1050" dirty="0">
-                        <a:latin typeface="Yu Gothic" charset="0"/>
-                        <a:ea typeface="Yu Gothic" charset="0"/>
-                        <a:cs typeface="Yu Gothic" charset="0"/>
+                        <a:latin typeface="游ゴシック" charset="0"/>
+                        <a:ea typeface="游ゴシック" charset="0"/>
+                        <a:cs typeface="游ゴシック" charset="0"/>
                       </a:endParaRPr>
                     </a:p>
                   </a:txBody>
@@ -16584,9 +16584,9 @@
                 <a:solidFill>
                   <a:srgbClr val="17828F"/>
                 </a:solidFill>
-                <a:latin typeface="Yu Gothic" pitchFamily="34" charset="0"/>
-                <a:ea typeface="Yu Gothic" pitchFamily="34" charset="-122"/>
-                <a:cs typeface="Yu Gothic" pitchFamily="34" charset="-120"/>
+                <a:latin typeface="游ゴシック" pitchFamily="34" charset="0"/>
+                <a:ea typeface="游ゴシック" pitchFamily="34" charset="-122"/>
+                <a:cs typeface="游ゴシック" pitchFamily="34" charset="-120"/>
               </a:rPr>
               <a:t>共通項：</a:t>
             </a:r>
@@ -16601,9 +16601,9 @@
                 <a:solidFill>
                   <a:srgbClr val="404040"/>
                 </a:solidFill>
-                <a:latin typeface="Yu Gothic" pitchFamily="34" charset="0"/>
-                <a:ea typeface="Yu Gothic" pitchFamily="34" charset="-122"/>
-                <a:cs typeface="Yu Gothic" pitchFamily="34" charset="-120"/>
+                <a:latin typeface="游ゴシック" pitchFamily="34" charset="0"/>
+                <a:ea typeface="游ゴシック" pitchFamily="34" charset="-122"/>
+                <a:cs typeface="游ゴシック" pitchFamily="34" charset="-120"/>
               </a:rPr>
               <a:t>新しい習慣と文化の発明。私たちが創るのも「ウルトラマンのお菓子」ではなく、</a:t>
             </a:r>
@@ -16618,9 +16618,9 @@
                 <a:solidFill>
                   <a:srgbClr val="17828F"/>
                 </a:solidFill>
-                <a:latin typeface="Yu Gothic" pitchFamily="34" charset="0"/>
-                <a:ea typeface="Yu Gothic" pitchFamily="34" charset="-122"/>
-                <a:cs typeface="Yu Gothic" pitchFamily="34" charset="-120"/>
+                <a:latin typeface="游ゴシック" pitchFamily="34" charset="0"/>
+                <a:ea typeface="游ゴシック" pitchFamily="34" charset="-122"/>
+                <a:cs typeface="游ゴシック" pitchFamily="34" charset="-120"/>
               </a:rPr>
               <a:t>ウルトラマンでしか成立しない新しい習慣</a:t>
             </a:r>
@@ -16635,9 +16635,9 @@
                 <a:solidFill>
                   <a:srgbClr val="404040"/>
                 </a:solidFill>
-                <a:latin typeface="Yu Gothic" pitchFamily="34" charset="0"/>
-                <a:ea typeface="Yu Gothic" pitchFamily="34" charset="-122"/>
-                <a:cs typeface="Yu Gothic" pitchFamily="34" charset="-120"/>
+                <a:latin typeface="游ゴシック" pitchFamily="34" charset="0"/>
+                <a:ea typeface="游ゴシック" pitchFamily="34" charset="-122"/>
+                <a:cs typeface="游ゴシック" pitchFamily="34" charset="-120"/>
               </a:rPr>
               <a:t>である</a:t>
             </a:r>
@@ -16726,9 +16726,9 @@
                 <a:solidFill>
                   <a:srgbClr val="FFFFFF"/>
                 </a:solidFill>
-                <a:latin typeface="Yu Gothic" pitchFamily="34" charset="0"/>
-                <a:ea typeface="Yu Gothic" pitchFamily="34" charset="-122"/>
-                <a:cs typeface="Yu Gothic" pitchFamily="34" charset="-120"/>
+                <a:latin typeface="游ゴシック" pitchFamily="34" charset="0"/>
+                <a:ea typeface="游ゴシック" pitchFamily="34" charset="-122"/>
+                <a:cs typeface="游ゴシック" pitchFamily="34" charset="-120"/>
               </a:rPr>
               <a:t>3．カテゴリー創造の方法論</a:t>
             </a:r>
@@ -16785,9 +16785,9 @@
                 <a:solidFill>
                   <a:srgbClr val="595959"/>
                 </a:solidFill>
-                <a:latin typeface="Yu Gothic" pitchFamily="34" charset="0"/>
-                <a:ea typeface="Yu Gothic" pitchFamily="34" charset="-122"/>
-                <a:cs typeface="Yu Gothic" pitchFamily="34" charset="-120"/>
+                <a:latin typeface="游ゴシック" pitchFamily="34" charset="0"/>
+                <a:ea typeface="游ゴシック" pitchFamily="34" charset="-122"/>
+                <a:cs typeface="游ゴシック" pitchFamily="34" charset="-120"/>
               </a:rPr>
               <a:t>極　秘</a:t>
             </a:r>
@@ -16824,9 +16824,9 @@
                 <a:solidFill>
                   <a:srgbClr val="333333"/>
                 </a:solidFill>
-                <a:latin typeface="Yu Gothic" pitchFamily="34" charset="0"/>
-                <a:ea typeface="Yu Gothic" pitchFamily="34" charset="-122"/>
-                <a:cs typeface="Yu Gothic" pitchFamily="34" charset="-120"/>
+                <a:latin typeface="游ゴシック" pitchFamily="34" charset="0"/>
+                <a:ea typeface="游ゴシック" pitchFamily="34" charset="-122"/>
+                <a:cs typeface="游ゴシック" pitchFamily="34" charset="-120"/>
               </a:rPr>
               <a:t>御社は約10年ごとに、カテゴリーを発明してきた</a:t>
             </a:r>
@@ -16866,9 +16866,9 @@
                 <a:solidFill>
                   <a:srgbClr val="404040"/>
                 </a:solidFill>
-                <a:latin typeface="Yu Gothic" pitchFamily="34" charset="0"/>
-                <a:ea typeface="Yu Gothic" pitchFamily="34" charset="-122"/>
-                <a:cs typeface="Yu Gothic" pitchFamily="34" charset="-120"/>
+                <a:latin typeface="游ゴシック" pitchFamily="34" charset="0"/>
+                <a:ea typeface="游ゴシック" pitchFamily="34" charset="-122"/>
+                <a:cs typeface="游ゴシック" pitchFamily="34" charset="-120"/>
               </a:rPr>
               <a:t>カテゴリー創造は外部の成功例ではなく、御社自身の勝ちパターンである。本提案はその再現にほかならない</a:t>
             </a:r>
@@ -17032,16 +17032,16 @@
                           <a:solidFill>
                             <a:srgbClr val="FFFFFF"/>
                           </a:solidFill>
-                          <a:latin typeface="Yu Gothic" pitchFamily="34" charset="0"/>
-                          <a:ea typeface="Yu Gothic" pitchFamily="34" charset="-122"/>
-                          <a:cs typeface="Yu Gothic" pitchFamily="34" charset="-120"/>
+                          <a:latin typeface="游ゴシック" pitchFamily="34" charset="0"/>
+                          <a:ea typeface="游ゴシック" pitchFamily="34" charset="-122"/>
+                          <a:cs typeface="游ゴシック" pitchFamily="34" charset="-120"/>
                         </a:rPr>
                         <a:t>年</a:t>
                       </a:r>
                       <a:endParaRPr lang="en-US" sz="1050" dirty="0">
-                        <a:latin typeface="Yu Gothic" charset="0"/>
-                        <a:ea typeface="Yu Gothic" charset="0"/>
-                        <a:cs typeface="Yu Gothic" charset="0"/>
+                        <a:latin typeface="游ゴシック" charset="0"/>
+                        <a:ea typeface="游ゴシック" charset="0"/>
+                        <a:cs typeface="游ゴシック" charset="0"/>
                       </a:endParaRPr>
                     </a:p>
                   </a:txBody>
@@ -17100,16 +17100,16 @@
                           <a:solidFill>
                             <a:srgbClr val="FFFFFF"/>
                           </a:solidFill>
-                          <a:latin typeface="Yu Gothic" pitchFamily="34" charset="0"/>
-                          <a:ea typeface="Yu Gothic" pitchFamily="34" charset="-122"/>
-                          <a:cs typeface="Yu Gothic" pitchFamily="34" charset="-120"/>
+                          <a:latin typeface="游ゴシック" pitchFamily="34" charset="0"/>
+                          <a:ea typeface="游ゴシック" pitchFamily="34" charset="-122"/>
+                          <a:cs typeface="游ゴシック" pitchFamily="34" charset="-120"/>
                         </a:rPr>
                         <a:t>商品</a:t>
                       </a:r>
                       <a:endParaRPr lang="en-US" sz="1050" dirty="0">
-                        <a:latin typeface="Yu Gothic" charset="0"/>
-                        <a:ea typeface="Yu Gothic" charset="0"/>
-                        <a:cs typeface="Yu Gothic" charset="0"/>
+                        <a:latin typeface="游ゴシック" charset="0"/>
+                        <a:ea typeface="游ゴシック" charset="0"/>
+                        <a:cs typeface="游ゴシック" charset="0"/>
                       </a:endParaRPr>
                     </a:p>
                   </a:txBody>
@@ -17168,16 +17168,16 @@
                           <a:solidFill>
                             <a:srgbClr val="FFFFFF"/>
                           </a:solidFill>
-                          <a:latin typeface="Yu Gothic" pitchFamily="34" charset="0"/>
-                          <a:ea typeface="Yu Gothic" pitchFamily="34" charset="-122"/>
-                          <a:cs typeface="Yu Gothic" pitchFamily="34" charset="-120"/>
+                          <a:latin typeface="游ゴシック" pitchFamily="34" charset="0"/>
+                          <a:ea typeface="游ゴシック" pitchFamily="34" charset="-122"/>
+                          <a:cs typeface="游ゴシック" pitchFamily="34" charset="-120"/>
                         </a:rPr>
                         <a:t>発明したカテゴリー</a:t>
                       </a:r>
                       <a:endParaRPr lang="en-US" sz="1050" dirty="0">
-                        <a:latin typeface="Yu Gothic" charset="0"/>
-                        <a:ea typeface="Yu Gothic" charset="0"/>
-                        <a:cs typeface="Yu Gothic" charset="0"/>
+                        <a:latin typeface="游ゴシック" charset="0"/>
+                        <a:ea typeface="游ゴシック" charset="0"/>
+                        <a:cs typeface="游ゴシック" charset="0"/>
                       </a:endParaRPr>
                     </a:p>
                   </a:txBody>
@@ -17238,16 +17238,16 @@
                           <a:solidFill>
                             <a:srgbClr val="404040"/>
                           </a:solidFill>
-                          <a:latin typeface="Yu Gothic" pitchFamily="34" charset="0"/>
-                          <a:ea typeface="Yu Gothic" pitchFamily="34" charset="-122"/>
-                          <a:cs typeface="Yu Gothic" pitchFamily="34" charset="-120"/>
+                          <a:latin typeface="游ゴシック" pitchFamily="34" charset="0"/>
+                          <a:ea typeface="游ゴシック" pitchFamily="34" charset="-122"/>
+                          <a:cs typeface="游ゴシック" pitchFamily="34" charset="-120"/>
                         </a:rPr>
                         <a:t>1957</a:t>
                       </a:r>
                       <a:endParaRPr lang="en-US" sz="1050" dirty="0">
-                        <a:latin typeface="Yu Gothic" charset="0"/>
-                        <a:ea typeface="Yu Gothic" charset="0"/>
-                        <a:cs typeface="Yu Gothic" charset="0"/>
+                        <a:latin typeface="游ゴシック" charset="0"/>
+                        <a:ea typeface="游ゴシック" charset="0"/>
+                        <a:cs typeface="游ゴシック" charset="0"/>
                       </a:endParaRPr>
                     </a:p>
                   </a:txBody>
@@ -17303,16 +17303,16 @@
                           <a:solidFill>
                             <a:srgbClr val="404040"/>
                           </a:solidFill>
-                          <a:latin typeface="Yu Gothic" pitchFamily="34" charset="0"/>
-                          <a:ea typeface="Yu Gothic" pitchFamily="34" charset="-122"/>
-                          <a:cs typeface="Yu Gothic" pitchFamily="34" charset="-120"/>
+                          <a:latin typeface="游ゴシック" pitchFamily="34" charset="0"/>
+                          <a:ea typeface="游ゴシック" pitchFamily="34" charset="-122"/>
+                          <a:cs typeface="游ゴシック" pitchFamily="34" charset="-120"/>
                         </a:rPr>
                         <a:t>グリーンガム</a:t>
                       </a:r>
                       <a:endParaRPr lang="en-US" sz="1050" dirty="0">
-                        <a:latin typeface="Yu Gothic" charset="0"/>
-                        <a:ea typeface="Yu Gothic" charset="0"/>
-                        <a:cs typeface="Yu Gothic" charset="0"/>
+                        <a:latin typeface="游ゴシック" charset="0"/>
+                        <a:ea typeface="游ゴシック" charset="0"/>
+                        <a:cs typeface="游ゴシック" charset="0"/>
                       </a:endParaRPr>
                     </a:p>
                   </a:txBody>
@@ -17368,16 +17368,16 @@
                           <a:solidFill>
                             <a:srgbClr val="404040"/>
                           </a:solidFill>
-                          <a:latin typeface="Yu Gothic" pitchFamily="34" charset="0"/>
-                          <a:ea typeface="Yu Gothic" pitchFamily="34" charset="-122"/>
-                          <a:cs typeface="Yu Gothic" pitchFamily="34" charset="-120"/>
+                          <a:latin typeface="游ゴシック" pitchFamily="34" charset="0"/>
+                          <a:ea typeface="游ゴシック" pitchFamily="34" charset="-122"/>
+                          <a:cs typeface="游ゴシック" pitchFamily="34" charset="-120"/>
                         </a:rPr>
                         <a:t>「ガム＝ロッテ」の確立</a:t>
                       </a:r>
                       <a:endParaRPr lang="en-US" sz="1050" dirty="0">
-                        <a:latin typeface="Yu Gothic" charset="0"/>
-                        <a:ea typeface="Yu Gothic" charset="0"/>
-                        <a:cs typeface="Yu Gothic" charset="0"/>
+                        <a:latin typeface="游ゴシック" charset="0"/>
+                        <a:ea typeface="游ゴシック" charset="0"/>
+                        <a:cs typeface="游ゴシック" charset="0"/>
                       </a:endParaRPr>
                     </a:p>
                   </a:txBody>
@@ -17435,16 +17435,16 @@
                           <a:solidFill>
                             <a:srgbClr val="404040"/>
                           </a:solidFill>
-                          <a:latin typeface="Yu Gothic" pitchFamily="34" charset="0"/>
-                          <a:ea typeface="Yu Gothic" pitchFamily="34" charset="-122"/>
-                          <a:cs typeface="Yu Gothic" pitchFamily="34" charset="-120"/>
+                          <a:latin typeface="游ゴシック" pitchFamily="34" charset="0"/>
+                          <a:ea typeface="游ゴシック" pitchFamily="34" charset="-122"/>
+                          <a:cs typeface="游ゴシック" pitchFamily="34" charset="-120"/>
                         </a:rPr>
                         <a:t>1964</a:t>
                       </a:r>
                       <a:endParaRPr lang="en-US" sz="1050" dirty="0">
-                        <a:latin typeface="Yu Gothic" charset="0"/>
-                        <a:ea typeface="Yu Gothic" charset="0"/>
-                        <a:cs typeface="Yu Gothic" charset="0"/>
+                        <a:latin typeface="游ゴシック" charset="0"/>
+                        <a:ea typeface="游ゴシック" charset="0"/>
+                        <a:cs typeface="游ゴシック" charset="0"/>
                       </a:endParaRPr>
                     </a:p>
                   </a:txBody>
@@ -17500,16 +17500,16 @@
                           <a:solidFill>
                             <a:srgbClr val="404040"/>
                           </a:solidFill>
-                          <a:latin typeface="Yu Gothic" pitchFamily="34" charset="0"/>
-                          <a:ea typeface="Yu Gothic" pitchFamily="34" charset="-122"/>
-                          <a:cs typeface="Yu Gothic" pitchFamily="34" charset="-120"/>
+                          <a:latin typeface="游ゴシック" pitchFamily="34" charset="0"/>
+                          <a:ea typeface="游ゴシック" pitchFamily="34" charset="-122"/>
+                          <a:cs typeface="游ゴシック" pitchFamily="34" charset="-120"/>
                         </a:rPr>
                         <a:t>ガーナミルクチョコレート</a:t>
                       </a:r>
                       <a:endParaRPr lang="en-US" sz="1050" dirty="0">
-                        <a:latin typeface="Yu Gothic" charset="0"/>
-                        <a:ea typeface="Yu Gothic" charset="0"/>
-                        <a:cs typeface="Yu Gothic" charset="0"/>
+                        <a:latin typeface="游ゴシック" charset="0"/>
+                        <a:ea typeface="游ゴシック" charset="0"/>
+                        <a:cs typeface="游ゴシック" charset="0"/>
                       </a:endParaRPr>
                     </a:p>
                   </a:txBody>
@@ -17565,16 +17565,16 @@
                           <a:solidFill>
                             <a:srgbClr val="404040"/>
                           </a:solidFill>
-                          <a:latin typeface="Yu Gothic" pitchFamily="34" charset="0"/>
-                          <a:ea typeface="Yu Gothic" pitchFamily="34" charset="-122"/>
-                          <a:cs typeface="Yu Gothic" pitchFamily="34" charset="-120"/>
+                          <a:latin typeface="游ゴシック" pitchFamily="34" charset="0"/>
+                          <a:ea typeface="游ゴシック" pitchFamily="34" charset="-122"/>
+                          <a:cs typeface="游ゴシック" pitchFamily="34" charset="-120"/>
                         </a:rPr>
                         <a:t>半世紀遅れの後発からチョコの定番へ</a:t>
                       </a:r>
                       <a:endParaRPr lang="en-US" sz="1050" dirty="0">
-                        <a:latin typeface="Yu Gothic" charset="0"/>
-                        <a:ea typeface="Yu Gothic" charset="0"/>
-                        <a:cs typeface="Yu Gothic" charset="0"/>
+                        <a:latin typeface="游ゴシック" charset="0"/>
+                        <a:ea typeface="游ゴシック" charset="0"/>
+                        <a:cs typeface="游ゴシック" charset="0"/>
                       </a:endParaRPr>
                     </a:p>
                   </a:txBody>
@@ -17632,16 +17632,16 @@
                           <a:solidFill>
                             <a:srgbClr val="C00000"/>
                           </a:solidFill>
-                          <a:latin typeface="Yu Gothic" pitchFamily="34" charset="0"/>
-                          <a:ea typeface="Yu Gothic" pitchFamily="34" charset="-122"/>
-                          <a:cs typeface="Yu Gothic" pitchFamily="34" charset="-120"/>
+                          <a:latin typeface="游ゴシック" pitchFamily="34" charset="0"/>
+                          <a:ea typeface="游ゴシック" pitchFamily="34" charset="-122"/>
+                          <a:cs typeface="游ゴシック" pitchFamily="34" charset="-120"/>
                         </a:rPr>
                         <a:t>1977 / 85</a:t>
                       </a:r>
                       <a:endParaRPr lang="en-US" sz="1050" dirty="0">
-                        <a:latin typeface="Yu Gothic" charset="0"/>
-                        <a:ea typeface="Yu Gothic" charset="0"/>
-                        <a:cs typeface="Yu Gothic" charset="0"/>
+                        <a:latin typeface="游ゴシック" charset="0"/>
+                        <a:ea typeface="游ゴシック" charset="0"/>
+                        <a:cs typeface="游ゴシック" charset="0"/>
                       </a:endParaRPr>
                     </a:p>
                   </a:txBody>
@@ -17697,16 +17697,16 @@
                           <a:solidFill>
                             <a:srgbClr val="404040"/>
                           </a:solidFill>
-                          <a:latin typeface="Yu Gothic" pitchFamily="34" charset="0"/>
-                          <a:ea typeface="Yu Gothic" pitchFamily="34" charset="-122"/>
-                          <a:cs typeface="Yu Gothic" pitchFamily="34" charset="-120"/>
+                          <a:latin typeface="游ゴシック" pitchFamily="34" charset="0"/>
+                          <a:ea typeface="游ゴシック" pitchFamily="34" charset="-122"/>
+                          <a:cs typeface="游ゴシック" pitchFamily="34" charset="-120"/>
                         </a:rPr>
                         <a:t>ビックリマンチョコ</a:t>
                       </a:r>
                       <a:endParaRPr lang="en-US" sz="1050" dirty="0">
-                        <a:latin typeface="Yu Gothic" charset="0"/>
-                        <a:ea typeface="Yu Gothic" charset="0"/>
-                        <a:cs typeface="Yu Gothic" charset="0"/>
+                        <a:latin typeface="游ゴシック" charset="0"/>
+                        <a:ea typeface="游ゴシック" charset="0"/>
+                        <a:cs typeface="游ゴシック" charset="0"/>
                       </a:endParaRPr>
                     </a:p>
                   </a:txBody>
@@ -17762,16 +17762,16 @@
                           <a:solidFill>
                             <a:srgbClr val="C00000"/>
                           </a:solidFill>
-                          <a:latin typeface="Yu Gothic" pitchFamily="34" charset="0"/>
-                          <a:ea typeface="Yu Gothic" pitchFamily="34" charset="-122"/>
-                          <a:cs typeface="Yu Gothic" pitchFamily="34" charset="-120"/>
+                          <a:latin typeface="游ゴシック" pitchFamily="34" charset="0"/>
+                          <a:ea typeface="游ゴシック" pitchFamily="34" charset="-122"/>
+                          <a:cs typeface="游ゴシック" pitchFamily="34" charset="-120"/>
                         </a:rPr>
                         <a:t>シール食玩 ── 収集文化の発明</a:t>
                       </a:r>
                       <a:endParaRPr lang="en-US" sz="1050" dirty="0">
-                        <a:latin typeface="Yu Gothic" charset="0"/>
-                        <a:ea typeface="Yu Gothic" charset="0"/>
-                        <a:cs typeface="Yu Gothic" charset="0"/>
+                        <a:latin typeface="游ゴシック" charset="0"/>
+                        <a:ea typeface="游ゴシック" charset="0"/>
+                        <a:cs typeface="游ゴシック" charset="0"/>
                       </a:endParaRPr>
                     </a:p>
                   </a:txBody>
@@ -17829,16 +17829,16 @@
                           <a:solidFill>
                             <a:srgbClr val="404040"/>
                           </a:solidFill>
-                          <a:latin typeface="Yu Gothic" pitchFamily="34" charset="0"/>
-                          <a:ea typeface="Yu Gothic" pitchFamily="34" charset="-122"/>
-                          <a:cs typeface="Yu Gothic" pitchFamily="34" charset="-120"/>
+                          <a:latin typeface="游ゴシック" pitchFamily="34" charset="0"/>
+                          <a:ea typeface="游ゴシック" pitchFamily="34" charset="-122"/>
+                          <a:cs typeface="游ゴシック" pitchFamily="34" charset="-120"/>
                         </a:rPr>
                         <a:t>1978</a:t>
                       </a:r>
                       <a:endParaRPr lang="en-US" sz="1050" dirty="0">
-                        <a:latin typeface="Yu Gothic" charset="0"/>
-                        <a:ea typeface="Yu Gothic" charset="0"/>
-                        <a:cs typeface="Yu Gothic" charset="0"/>
+                        <a:latin typeface="游ゴシック" charset="0"/>
+                        <a:ea typeface="游ゴシック" charset="0"/>
+                        <a:cs typeface="游ゴシック" charset="0"/>
                       </a:endParaRPr>
                     </a:p>
                   </a:txBody>
@@ -17894,16 +17894,16 @@
                           <a:solidFill>
                             <a:srgbClr val="404040"/>
                           </a:solidFill>
-                          <a:latin typeface="Yu Gothic" pitchFamily="34" charset="0"/>
-                          <a:ea typeface="Yu Gothic" pitchFamily="34" charset="-122"/>
-                          <a:cs typeface="Yu Gothic" pitchFamily="34" charset="-120"/>
+                          <a:latin typeface="游ゴシック" pitchFamily="34" charset="0"/>
+                          <a:ea typeface="游ゴシック" pitchFamily="34" charset="-122"/>
+                          <a:cs typeface="游ゴシック" pitchFamily="34" charset="-120"/>
                         </a:rPr>
                         <a:t>ホカロン</a:t>
                       </a:r>
                       <a:endParaRPr lang="en-US" sz="1050" dirty="0">
-                        <a:latin typeface="Yu Gothic" charset="0"/>
-                        <a:ea typeface="Yu Gothic" charset="0"/>
-                        <a:cs typeface="Yu Gothic" charset="0"/>
+                        <a:latin typeface="游ゴシック" charset="0"/>
+                        <a:ea typeface="游ゴシック" charset="0"/>
+                        <a:cs typeface="游ゴシック" charset="0"/>
                       </a:endParaRPr>
                     </a:p>
                   </a:txBody>
@@ -17959,16 +17959,16 @@
                           <a:solidFill>
                             <a:srgbClr val="404040"/>
                           </a:solidFill>
-                          <a:latin typeface="Yu Gothic" pitchFamily="34" charset="0"/>
-                          <a:ea typeface="Yu Gothic" pitchFamily="34" charset="-122"/>
-                          <a:cs typeface="Yu Gothic" pitchFamily="34" charset="-120"/>
+                          <a:latin typeface="游ゴシック" pitchFamily="34" charset="0"/>
+                          <a:ea typeface="游ゴシック" pitchFamily="34" charset="-122"/>
+                          <a:cs typeface="游ゴシック" pitchFamily="34" charset="-120"/>
                         </a:rPr>
                         <a:t>使い捨てカイロ市場の定義</a:t>
                       </a:r>
                       <a:endParaRPr lang="en-US" sz="1050" dirty="0">
-                        <a:latin typeface="Yu Gothic" charset="0"/>
-                        <a:ea typeface="Yu Gothic" charset="0"/>
-                        <a:cs typeface="Yu Gothic" charset="0"/>
+                        <a:latin typeface="游ゴシック" charset="0"/>
+                        <a:ea typeface="游ゴシック" charset="0"/>
+                        <a:cs typeface="游ゴシック" charset="0"/>
                       </a:endParaRPr>
                     </a:p>
                   </a:txBody>
@@ -18026,16 +18026,16 @@
                           <a:solidFill>
                             <a:srgbClr val="404040"/>
                           </a:solidFill>
-                          <a:latin typeface="Yu Gothic" pitchFamily="34" charset="0"/>
-                          <a:ea typeface="Yu Gothic" pitchFamily="34" charset="-122"/>
-                          <a:cs typeface="Yu Gothic" pitchFamily="34" charset="-120"/>
+                          <a:latin typeface="游ゴシック" pitchFamily="34" charset="0"/>
+                          <a:ea typeface="游ゴシック" pitchFamily="34" charset="-122"/>
+                          <a:cs typeface="游ゴシック" pitchFamily="34" charset="-120"/>
                         </a:rPr>
                         <a:t>1981</a:t>
                       </a:r>
                       <a:endParaRPr lang="en-US" sz="1050" dirty="0">
-                        <a:latin typeface="Yu Gothic" charset="0"/>
-                        <a:ea typeface="Yu Gothic" charset="0"/>
-                        <a:cs typeface="Yu Gothic" charset="0"/>
+                        <a:latin typeface="游ゴシック" charset="0"/>
+                        <a:ea typeface="游ゴシック" charset="0"/>
+                        <a:cs typeface="游ゴシック" charset="0"/>
                       </a:endParaRPr>
                     </a:p>
                   </a:txBody>
@@ -18091,16 +18091,16 @@
                           <a:solidFill>
                             <a:srgbClr val="404040"/>
                           </a:solidFill>
-                          <a:latin typeface="Yu Gothic" pitchFamily="34" charset="0"/>
-                          <a:ea typeface="Yu Gothic" pitchFamily="34" charset="-122"/>
-                          <a:cs typeface="Yu Gothic" pitchFamily="34" charset="-120"/>
+                          <a:latin typeface="游ゴシック" pitchFamily="34" charset="0"/>
+                          <a:ea typeface="游ゴシック" pitchFamily="34" charset="-122"/>
+                          <a:cs typeface="游ゴシック" pitchFamily="34" charset="-120"/>
                         </a:rPr>
                         <a:t>雪見だいふく</a:t>
                       </a:r>
                       <a:endParaRPr lang="en-US" sz="1050" dirty="0">
-                        <a:latin typeface="Yu Gothic" charset="0"/>
-                        <a:ea typeface="Yu Gothic" charset="0"/>
-                        <a:cs typeface="Yu Gothic" charset="0"/>
+                        <a:latin typeface="游ゴシック" charset="0"/>
+                        <a:ea typeface="游ゴシック" charset="0"/>
+                        <a:cs typeface="游ゴシック" charset="0"/>
                       </a:endParaRPr>
                     </a:p>
                   </a:txBody>
@@ -18156,16 +18156,16 @@
                           <a:solidFill>
                             <a:srgbClr val="404040"/>
                           </a:solidFill>
-                          <a:latin typeface="Yu Gothic" pitchFamily="34" charset="0"/>
-                          <a:ea typeface="Yu Gothic" pitchFamily="34" charset="-122"/>
-                          <a:cs typeface="Yu Gothic" pitchFamily="34" charset="-120"/>
+                          <a:latin typeface="游ゴシック" pitchFamily="34" charset="0"/>
+                          <a:ea typeface="游ゴシック" pitchFamily="34" charset="-122"/>
+                          <a:cs typeface="游ゴシック" pitchFamily="34" charset="-120"/>
                         </a:rPr>
                         <a:t>冬アイス・餅アイス</a:t>
                       </a:r>
                       <a:endParaRPr lang="en-US" sz="1050" dirty="0">
-                        <a:latin typeface="Yu Gothic" charset="0"/>
-                        <a:ea typeface="Yu Gothic" charset="0"/>
-                        <a:cs typeface="Yu Gothic" charset="0"/>
+                        <a:latin typeface="游ゴシック" charset="0"/>
+                        <a:ea typeface="游ゴシック" charset="0"/>
+                        <a:cs typeface="游ゴシック" charset="0"/>
                       </a:endParaRPr>
                     </a:p>
                   </a:txBody>
@@ -18223,16 +18223,16 @@
                           <a:solidFill>
                             <a:srgbClr val="404040"/>
                           </a:solidFill>
-                          <a:latin typeface="Yu Gothic" pitchFamily="34" charset="0"/>
-                          <a:ea typeface="Yu Gothic" pitchFamily="34" charset="-122"/>
-                          <a:cs typeface="Yu Gothic" pitchFamily="34" charset="-120"/>
+                          <a:latin typeface="游ゴシック" pitchFamily="34" charset="0"/>
+                          <a:ea typeface="游ゴシック" pitchFamily="34" charset="-122"/>
+                          <a:cs typeface="游ゴシック" pitchFamily="34" charset="-120"/>
                         </a:rPr>
                         <a:t>1997</a:t>
                       </a:r>
                       <a:endParaRPr lang="en-US" sz="1050" dirty="0">
-                        <a:latin typeface="Yu Gothic" charset="0"/>
-                        <a:ea typeface="Yu Gothic" charset="0"/>
-                        <a:cs typeface="Yu Gothic" charset="0"/>
+                        <a:latin typeface="游ゴシック" charset="0"/>
+                        <a:ea typeface="游ゴシック" charset="0"/>
+                        <a:cs typeface="游ゴシック" charset="0"/>
                       </a:endParaRPr>
                     </a:p>
                   </a:txBody>
@@ -18288,16 +18288,16 @@
                           <a:solidFill>
                             <a:srgbClr val="404040"/>
                           </a:solidFill>
-                          <a:latin typeface="Yu Gothic" pitchFamily="34" charset="0"/>
-                          <a:ea typeface="Yu Gothic" pitchFamily="34" charset="-122"/>
-                          <a:cs typeface="Yu Gothic" pitchFamily="34" charset="-120"/>
+                          <a:latin typeface="游ゴシック" pitchFamily="34" charset="0"/>
+                          <a:ea typeface="游ゴシック" pitchFamily="34" charset="-122"/>
+                          <a:cs typeface="游ゴシック" pitchFamily="34" charset="-120"/>
                         </a:rPr>
                         <a:t>キシリトールガム</a:t>
                       </a:r>
                       <a:endParaRPr lang="en-US" sz="1050" dirty="0">
-                        <a:latin typeface="Yu Gothic" charset="0"/>
-                        <a:ea typeface="Yu Gothic" charset="0"/>
-                        <a:cs typeface="Yu Gothic" charset="0"/>
+                        <a:latin typeface="游ゴシック" charset="0"/>
+                        <a:ea typeface="游ゴシック" charset="0"/>
+                        <a:cs typeface="游ゴシック" charset="0"/>
                       </a:endParaRPr>
                     </a:p>
                   </a:txBody>
@@ -18353,16 +18353,16 @@
                           <a:solidFill>
                             <a:srgbClr val="404040"/>
                           </a:solidFill>
-                          <a:latin typeface="Yu Gothic" pitchFamily="34" charset="0"/>
-                          <a:ea typeface="Yu Gothic" pitchFamily="34" charset="-122"/>
-                          <a:cs typeface="Yu Gothic" pitchFamily="34" charset="-120"/>
+                          <a:latin typeface="游ゴシック" pitchFamily="34" charset="0"/>
+                          <a:ea typeface="游ゴシック" pitchFamily="34" charset="-122"/>
+                          <a:cs typeface="游ゴシック" pitchFamily="34" charset="-120"/>
                         </a:rPr>
                         <a:t>機能性ガム（現在もシェア6割の源泉）</a:t>
                       </a:r>
                       <a:endParaRPr lang="en-US" sz="1050" dirty="0">
-                        <a:latin typeface="Yu Gothic" charset="0"/>
-                        <a:ea typeface="Yu Gothic" charset="0"/>
-                        <a:cs typeface="Yu Gothic" charset="0"/>
+                        <a:latin typeface="游ゴシック" charset="0"/>
+                        <a:ea typeface="游ゴシック" charset="0"/>
+                        <a:cs typeface="游ゴシック" charset="0"/>
                       </a:endParaRPr>
                     </a:p>
                   </a:txBody>
@@ -18420,16 +18420,16 @@
                           <a:solidFill>
                             <a:srgbClr val="404040"/>
                           </a:solidFill>
-                          <a:latin typeface="Yu Gothic" pitchFamily="34" charset="0"/>
-                          <a:ea typeface="Yu Gothic" pitchFamily="34" charset="-122"/>
-                          <a:cs typeface="Yu Gothic" pitchFamily="34" charset="-120"/>
+                          <a:latin typeface="游ゴシック" pitchFamily="34" charset="0"/>
+                          <a:ea typeface="游ゴシック" pitchFamily="34" charset="-122"/>
+                          <a:cs typeface="游ゴシック" pitchFamily="34" charset="-120"/>
                         </a:rPr>
                         <a:t>2003</a:t>
                       </a:r>
                       <a:endParaRPr lang="en-US" sz="1050" dirty="0">
-                        <a:latin typeface="Yu Gothic" charset="0"/>
-                        <a:ea typeface="Yu Gothic" charset="0"/>
-                        <a:cs typeface="Yu Gothic" charset="0"/>
+                        <a:latin typeface="游ゴシック" charset="0"/>
+                        <a:ea typeface="游ゴシック" charset="0"/>
+                        <a:cs typeface="游ゴシック" charset="0"/>
                       </a:endParaRPr>
                     </a:p>
                   </a:txBody>
@@ -18485,16 +18485,16 @@
                           <a:solidFill>
                             <a:srgbClr val="404040"/>
                           </a:solidFill>
-                          <a:latin typeface="Yu Gothic" pitchFamily="34" charset="0"/>
-                          <a:ea typeface="Yu Gothic" pitchFamily="34" charset="-122"/>
-                          <a:cs typeface="Yu Gothic" pitchFamily="34" charset="-120"/>
+                          <a:latin typeface="游ゴシック" pitchFamily="34" charset="0"/>
+                          <a:ea typeface="游ゴシック" pitchFamily="34" charset="-122"/>
+                          <a:cs typeface="游ゴシック" pitchFamily="34" charset="-120"/>
                         </a:rPr>
                         <a:t>クーリッシュ</a:t>
                       </a:r>
                       <a:endParaRPr lang="en-US" sz="1050" dirty="0">
-                        <a:latin typeface="Yu Gothic" charset="0"/>
-                        <a:ea typeface="Yu Gothic" charset="0"/>
-                        <a:cs typeface="Yu Gothic" charset="0"/>
+                        <a:latin typeface="游ゴシック" charset="0"/>
+                        <a:ea typeface="游ゴシック" charset="0"/>
+                        <a:cs typeface="游ゴシック" charset="0"/>
                       </a:endParaRPr>
                     </a:p>
                   </a:txBody>
@@ -18550,16 +18550,16 @@
                           <a:solidFill>
                             <a:srgbClr val="404040"/>
                           </a:solidFill>
-                          <a:latin typeface="Yu Gothic" pitchFamily="34" charset="0"/>
-                          <a:ea typeface="Yu Gothic" pitchFamily="34" charset="-122"/>
-                          <a:cs typeface="Yu Gothic" pitchFamily="34" charset="-120"/>
+                          <a:latin typeface="游ゴシック" pitchFamily="34" charset="0"/>
+                          <a:ea typeface="游ゴシック" pitchFamily="34" charset="-122"/>
+                          <a:cs typeface="游ゴシック" pitchFamily="34" charset="-120"/>
                         </a:rPr>
                         <a:t>飲むアイス</a:t>
                       </a:r>
                       <a:endParaRPr lang="en-US" sz="1050" dirty="0">
-                        <a:latin typeface="Yu Gothic" charset="0"/>
-                        <a:ea typeface="Yu Gothic" charset="0"/>
-                        <a:cs typeface="Yu Gothic" charset="0"/>
+                        <a:latin typeface="游ゴシック" charset="0"/>
+                        <a:ea typeface="游ゴシック" charset="0"/>
+                        <a:cs typeface="游ゴシック" charset="0"/>
                       </a:endParaRPr>
                     </a:p>
                   </a:txBody>
@@ -18617,16 +18617,16 @@
                           <a:solidFill>
                             <a:srgbClr val="404040"/>
                           </a:solidFill>
-                          <a:latin typeface="Yu Gothic" pitchFamily="34" charset="0"/>
-                          <a:ea typeface="Yu Gothic" pitchFamily="34" charset="-122"/>
-                          <a:cs typeface="Yu Gothic" pitchFamily="34" charset="-120"/>
+                          <a:latin typeface="游ゴシック" pitchFamily="34" charset="0"/>
+                          <a:ea typeface="游ゴシック" pitchFamily="34" charset="-122"/>
+                          <a:cs typeface="游ゴシック" pitchFamily="34" charset="-120"/>
                         </a:rPr>
                         <a:t>2015</a:t>
                       </a:r>
                       <a:endParaRPr lang="en-US" sz="1050" dirty="0">
-                        <a:latin typeface="Yu Gothic" charset="0"/>
-                        <a:ea typeface="Yu Gothic" charset="0"/>
-                        <a:cs typeface="Yu Gothic" charset="0"/>
+                        <a:latin typeface="游ゴシック" charset="0"/>
+                        <a:ea typeface="游ゴシック" charset="0"/>
+                        <a:cs typeface="游ゴシック" charset="0"/>
                       </a:endParaRPr>
                     </a:p>
                   </a:txBody>
@@ -18682,16 +18682,16 @@
                           <a:solidFill>
                             <a:srgbClr val="404040"/>
                           </a:solidFill>
-                          <a:latin typeface="Yu Gothic" pitchFamily="34" charset="0"/>
-                          <a:ea typeface="Yu Gothic" pitchFamily="34" charset="-122"/>
-                          <a:cs typeface="Yu Gothic" pitchFamily="34" charset="-120"/>
+                          <a:latin typeface="游ゴシック" pitchFamily="34" charset="0"/>
+                          <a:ea typeface="游ゴシック" pitchFamily="34" charset="-122"/>
+                          <a:cs typeface="游ゴシック" pitchFamily="34" charset="-120"/>
                         </a:rPr>
                         <a:t>乳酸菌ショコラ</a:t>
                       </a:r>
                       <a:endParaRPr lang="en-US" sz="1050" dirty="0">
-                        <a:latin typeface="Yu Gothic" charset="0"/>
-                        <a:ea typeface="Yu Gothic" charset="0"/>
-                        <a:cs typeface="Yu Gothic" charset="0"/>
+                        <a:latin typeface="游ゴシック" charset="0"/>
+                        <a:ea typeface="游ゴシック" charset="0"/>
+                        <a:cs typeface="游ゴシック" charset="0"/>
                       </a:endParaRPr>
                     </a:p>
                   </a:txBody>
@@ -18747,16 +18747,16 @@
                           <a:solidFill>
                             <a:srgbClr val="404040"/>
                           </a:solidFill>
-                          <a:latin typeface="Yu Gothic" pitchFamily="34" charset="0"/>
-                          <a:ea typeface="Yu Gothic" pitchFamily="34" charset="-122"/>
-                          <a:cs typeface="Yu Gothic" pitchFamily="34" charset="-120"/>
+                          <a:latin typeface="游ゴシック" pitchFamily="34" charset="0"/>
+                          <a:ea typeface="游ゴシック" pitchFamily="34" charset="-122"/>
+                          <a:cs typeface="游ゴシック" pitchFamily="34" charset="-120"/>
                         </a:rPr>
                         <a:t>機能性チョコレート</a:t>
                       </a:r>
                       <a:endParaRPr lang="en-US" sz="1050" dirty="0">
-                        <a:latin typeface="Yu Gothic" charset="0"/>
-                        <a:ea typeface="Yu Gothic" charset="0"/>
-                        <a:cs typeface="Yu Gothic" charset="0"/>
+                        <a:latin typeface="游ゴシック" charset="0"/>
+                        <a:ea typeface="游ゴシック" charset="0"/>
+                        <a:cs typeface="游ゴシック" charset="0"/>
                       </a:endParaRPr>
                     </a:p>
                   </a:txBody>
@@ -18855,9 +18855,9 @@
                 <a:solidFill>
                   <a:srgbClr val="7A4521"/>
                 </a:solidFill>
-                <a:latin typeface="Yu Gothic" pitchFamily="34" charset="0"/>
-                <a:ea typeface="Yu Gothic" pitchFamily="34" charset="-122"/>
-                <a:cs typeface="Yu Gothic" pitchFamily="34" charset="-120"/>
+                <a:latin typeface="游ゴシック" pitchFamily="34" charset="0"/>
+                <a:ea typeface="游ゴシック" pitchFamily="34" charset="-122"/>
+                <a:cs typeface="游ゴシック" pitchFamily="34" charset="-120"/>
               </a:rPr>
               <a:t>クーリッシュから20年。</a:t>
             </a:r>
@@ -18869,9 +18869,9 @@
                 <a:solidFill>
                   <a:srgbClr val="404040"/>
                 </a:solidFill>
-                <a:latin typeface="Yu Gothic" pitchFamily="34" charset="0"/>
-                <a:ea typeface="Yu Gothic" pitchFamily="34" charset="-122"/>
-                <a:cs typeface="Yu Gothic" pitchFamily="34" charset="-120"/>
+                <a:latin typeface="游ゴシック" pitchFamily="34" charset="0"/>
+                <a:ea typeface="游ゴシック" pitchFamily="34" charset="-122"/>
+                <a:cs typeface="游ゴシック" pitchFamily="34" charset="-120"/>
               </a:rPr>
               <a:t>次の10年の発明を、ウルトラマンシリーズ60周年と一緒に打ちませんか</a:t>
             </a:r>
@@ -18960,9 +18960,9 @@
                 <a:solidFill>
                   <a:srgbClr val="FFFFFF"/>
                 </a:solidFill>
-                <a:latin typeface="Yu Gothic" pitchFamily="34" charset="0"/>
-                <a:ea typeface="Yu Gothic" pitchFamily="34" charset="-122"/>
-                <a:cs typeface="Yu Gothic" pitchFamily="34" charset="-120"/>
+                <a:latin typeface="游ゴシック" pitchFamily="34" charset="0"/>
+                <a:ea typeface="游ゴシック" pitchFamily="34" charset="-122"/>
+                <a:cs typeface="游ゴシック" pitchFamily="34" charset="-120"/>
               </a:rPr>
               <a:t>3．カテゴリー創造の方法論</a:t>
             </a:r>
@@ -19019,9 +19019,9 @@
                 <a:solidFill>
                   <a:srgbClr val="595959"/>
                 </a:solidFill>
-                <a:latin typeface="Yu Gothic" pitchFamily="34" charset="0"/>
-                <a:ea typeface="Yu Gothic" pitchFamily="34" charset="-122"/>
-                <a:cs typeface="Yu Gothic" pitchFamily="34" charset="-120"/>
+                <a:latin typeface="游ゴシック" pitchFamily="34" charset="0"/>
+                <a:ea typeface="游ゴシック" pitchFamily="34" charset="-122"/>
+                <a:cs typeface="游ゴシック" pitchFamily="34" charset="-120"/>
               </a:rPr>
               <a:t>極　秘</a:t>
             </a:r>
@@ -19058,9 +19058,9 @@
                 <a:solidFill>
                   <a:srgbClr val="333333"/>
                 </a:solidFill>
-                <a:latin typeface="Yu Gothic" pitchFamily="34" charset="0"/>
-                <a:ea typeface="Yu Gothic" pitchFamily="34" charset="-122"/>
-                <a:cs typeface="Yu Gothic" pitchFamily="34" charset="-120"/>
+                <a:latin typeface="游ゴシック" pitchFamily="34" charset="0"/>
+                <a:ea typeface="游ゴシック" pitchFamily="34" charset="-122"/>
+                <a:cs typeface="游ゴシック" pitchFamily="34" charset="-120"/>
               </a:rPr>
               <a:t>カテゴリー創造の方程式</a:t>
             </a:r>
@@ -19100,9 +19100,9 @@
                 <a:solidFill>
                   <a:srgbClr val="404040"/>
                 </a:solidFill>
-                <a:latin typeface="Yu Gothic" pitchFamily="34" charset="0"/>
-                <a:ea typeface="Yu Gothic" pitchFamily="34" charset="-122"/>
-                <a:cs typeface="Yu Gothic" pitchFamily="34" charset="-120"/>
+                <a:latin typeface="游ゴシック" pitchFamily="34" charset="0"/>
+                <a:ea typeface="游ゴシック" pitchFamily="34" charset="-122"/>
+                <a:cs typeface="游ゴシック" pitchFamily="34" charset="-120"/>
               </a:rPr>
               <a:t>3つの要素が揃ったときだけ、コラボはカテゴリーに変わる。ウルトラマン × ロッテはその全てを最初から持っている</a:t>
             </a:r>
@@ -19265,16 +19265,16 @@
                           <a:solidFill>
                             <a:srgbClr val="333333"/>
                           </a:solidFill>
-                          <a:latin typeface="Yu Gothic" pitchFamily="34" charset="0"/>
-                          <a:ea typeface="Yu Gothic" pitchFamily="34" charset="-122"/>
-                          <a:cs typeface="Yu Gothic" pitchFamily="34" charset="-120"/>
+                          <a:latin typeface="游ゴシック" pitchFamily="34" charset="0"/>
+                          <a:ea typeface="游ゴシック" pitchFamily="34" charset="-122"/>
+                          <a:cs typeface="游ゴシック" pitchFamily="34" charset="-120"/>
                         </a:rPr>
                         <a:t>IPの本質体験</a:t>
                       </a:r>
                       <a:endParaRPr lang="en-US" sz="1100" dirty="0">
-                        <a:latin typeface="Yu Gothic" charset="0"/>
-                        <a:ea typeface="Yu Gothic" charset="0"/>
-                        <a:cs typeface="Yu Gothic" charset="0"/>
+                        <a:latin typeface="游ゴシック" charset="0"/>
+                        <a:ea typeface="游ゴシック" charset="0"/>
+                        <a:cs typeface="游ゴシック" charset="0"/>
                       </a:endParaRPr>
                     </a:p>
                   </a:txBody>
@@ -19333,16 +19333,16 @@
                           <a:solidFill>
                             <a:srgbClr val="404040"/>
                           </a:solidFill>
-                          <a:latin typeface="Yu Gothic" pitchFamily="34" charset="0"/>
-                          <a:ea typeface="Yu Gothic" pitchFamily="34" charset="-122"/>
-                          <a:cs typeface="Yu Gothic" pitchFamily="34" charset="-120"/>
+                          <a:latin typeface="游ゴシック" pitchFamily="34" charset="0"/>
+                          <a:ea typeface="游ゴシック" pitchFamily="34" charset="-122"/>
+                          <a:cs typeface="游ゴシック" pitchFamily="34" charset="-120"/>
                         </a:rPr>
                         <a:t>ウルトラマンの本質は「変身」と「3分間の活動限界」。世代を超えて誰もが体で覚えている、世界で最も有名な時間制限</a:t>
                       </a:r>
                       <a:endParaRPr lang="en-US" sz="1100" dirty="0">
-                        <a:latin typeface="Yu Gothic" charset="0"/>
-                        <a:ea typeface="Yu Gothic" charset="0"/>
-                        <a:cs typeface="Yu Gothic" charset="0"/>
+                        <a:latin typeface="游ゴシック" charset="0"/>
+                        <a:ea typeface="游ゴシック" charset="0"/>
+                        <a:cs typeface="游ゴシック" charset="0"/>
                       </a:endParaRPr>
                     </a:p>
                   </a:txBody>
@@ -19400,16 +19400,16 @@
                           <a:solidFill>
                             <a:srgbClr val="333333"/>
                           </a:solidFill>
-                          <a:latin typeface="Yu Gothic" pitchFamily="34" charset="0"/>
-                          <a:ea typeface="Yu Gothic" pitchFamily="34" charset="-122"/>
-                          <a:cs typeface="Yu Gothic" pitchFamily="34" charset="-120"/>
+                          <a:latin typeface="游ゴシック" pitchFamily="34" charset="0"/>
+                          <a:ea typeface="游ゴシック" pitchFamily="34" charset="-122"/>
+                          <a:cs typeface="游ゴシック" pitchFamily="34" charset="-120"/>
                         </a:rPr>
                         <a:t>食の物理体験</a:t>
                       </a:r>
                       <a:endParaRPr lang="en-US" sz="1100" dirty="0">
-                        <a:latin typeface="Yu Gothic" charset="0"/>
-                        <a:ea typeface="Yu Gothic" charset="0"/>
-                        <a:cs typeface="Yu Gothic" charset="0"/>
+                        <a:latin typeface="游ゴシック" charset="0"/>
+                        <a:ea typeface="游ゴシック" charset="0"/>
+                        <a:cs typeface="游ゴシック" charset="0"/>
                       </a:endParaRPr>
                     </a:p>
                   </a:txBody>
@@ -19468,16 +19468,16 @@
                           <a:solidFill>
                             <a:srgbClr val="404040"/>
                           </a:solidFill>
-                          <a:latin typeface="Yu Gothic" pitchFamily="34" charset="0"/>
-                          <a:ea typeface="Yu Gothic" pitchFamily="34" charset="-122"/>
-                          <a:cs typeface="Yu Gothic" pitchFamily="34" charset="-120"/>
+                          <a:latin typeface="游ゴシック" pitchFamily="34" charset="0"/>
+                          <a:ea typeface="游ゴシック" pitchFamily="34" charset="-122"/>
+                          <a:cs typeface="游ゴシック" pitchFamily="34" charset="-120"/>
                         </a:rPr>
                         <a:t>味・色・食感が時間で変化する菓子設計。御社の咀嚼研究、キシリトールで培った機能性表現、フレーバーカプセル技術で実装可能</a:t>
                       </a:r>
                       <a:endParaRPr lang="en-US" sz="1100" dirty="0">
-                        <a:latin typeface="Yu Gothic" charset="0"/>
-                        <a:ea typeface="Yu Gothic" charset="0"/>
-                        <a:cs typeface="Yu Gothic" charset="0"/>
+                        <a:latin typeface="游ゴシック" charset="0"/>
+                        <a:ea typeface="游ゴシック" charset="0"/>
+                        <a:cs typeface="游ゴシック" charset="0"/>
                       </a:endParaRPr>
                     </a:p>
                   </a:txBody>
@@ -19535,16 +19535,16 @@
                           <a:solidFill>
                             <a:srgbClr val="333333"/>
                           </a:solidFill>
-                          <a:latin typeface="Yu Gothic" pitchFamily="34" charset="0"/>
-                          <a:ea typeface="Yu Gothic" pitchFamily="34" charset="-122"/>
-                          <a:cs typeface="Yu Gothic" pitchFamily="34" charset="-120"/>
+                          <a:latin typeface="游ゴシック" pitchFamily="34" charset="0"/>
+                          <a:ea typeface="游ゴシック" pitchFamily="34" charset="-122"/>
+                          <a:cs typeface="游ゴシック" pitchFamily="34" charset="-120"/>
                         </a:rPr>
                         <a:t>収集・継続の仕掛け</a:t>
                       </a:r>
                       <a:endParaRPr lang="en-US" sz="1100" dirty="0">
-                        <a:latin typeface="Yu Gothic" charset="0"/>
-                        <a:ea typeface="Yu Gothic" charset="0"/>
-                        <a:cs typeface="Yu Gothic" charset="0"/>
+                        <a:latin typeface="游ゴシック" charset="0"/>
+                        <a:ea typeface="游ゴシック" charset="0"/>
+                        <a:cs typeface="游ゴシック" charset="0"/>
                       </a:endParaRPr>
                     </a:p>
                   </a:txBody>
@@ -19603,16 +19603,16 @@
                           <a:solidFill>
                             <a:srgbClr val="404040"/>
                           </a:solidFill>
-                          <a:latin typeface="Yu Gothic" pitchFamily="34" charset="0"/>
-                          <a:ea typeface="Yu Gothic" pitchFamily="34" charset="-122"/>
-                          <a:cs typeface="Yu Gothic" pitchFamily="34" charset="-120"/>
+                          <a:latin typeface="游ゴシック" pitchFamily="34" charset="0"/>
+                          <a:ea typeface="游ゴシック" pitchFamily="34" charset="-122"/>
+                          <a:cs typeface="游ゴシック" pitchFamily="34" charset="-120"/>
                         </a:rPr>
                         <a:t>ビックリマンで磨いた収集エンジンと、デジタル図鑑の連動。1回の驚きを、毎週の習慣に変える装置</a:t>
                       </a:r>
                       <a:endParaRPr lang="en-US" sz="1100" dirty="0">
-                        <a:latin typeface="Yu Gothic" charset="0"/>
-                        <a:ea typeface="Yu Gothic" charset="0"/>
-                        <a:cs typeface="Yu Gothic" charset="0"/>
+                        <a:latin typeface="游ゴシック" charset="0"/>
+                        <a:ea typeface="游ゴシック" charset="0"/>
+                        <a:cs typeface="游ゴシック" charset="0"/>
                       </a:endParaRPr>
                     </a:p>
                   </a:txBody>
@@ -19750,9 +19750,9 @@
                 <a:solidFill>
                   <a:srgbClr val="333333"/>
                 </a:solidFill>
-                <a:latin typeface="Yu Gothic" pitchFamily="34" charset="0"/>
-                <a:ea typeface="Yu Gothic" pitchFamily="34" charset="-122"/>
-                <a:cs typeface="Yu Gothic" pitchFamily="34" charset="-120"/>
+                <a:latin typeface="游ゴシック" pitchFamily="34" charset="0"/>
+                <a:ea typeface="游ゴシック" pitchFamily="34" charset="-122"/>
+                <a:cs typeface="游ゴシック" pitchFamily="34" charset="-120"/>
               </a:rPr>
               <a:t>＝ 新カテゴリー『変身菓子』</a:t>
             </a:r>
@@ -19764,9 +19764,9 @@
                 <a:solidFill>
                   <a:srgbClr val="404040"/>
                 </a:solidFill>
-                <a:latin typeface="Yu Gothic" pitchFamily="34" charset="0"/>
-                <a:ea typeface="Yu Gothic" pitchFamily="34" charset="-122"/>
-                <a:cs typeface="Yu Gothic" pitchFamily="34" charset="-120"/>
+                <a:latin typeface="游ゴシック" pitchFamily="34" charset="0"/>
+                <a:ea typeface="游ゴシック" pitchFamily="34" charset="-122"/>
+                <a:cs typeface="游ゴシック" pitchFamily="34" charset="-120"/>
               </a:rPr>
               <a:t>　── 時間で変わることを楽しむ、世界初のお菓子カテゴリー。名前を握った者が棚を握る</a:t>
             </a:r>
@@ -19803,9 +19803,9 @@
                 <a:solidFill>
                   <a:srgbClr val="808080"/>
                 </a:solidFill>
-                <a:latin typeface="Yu Gothic" pitchFamily="34" charset="0"/>
-                <a:ea typeface="Yu Gothic" pitchFamily="34" charset="-122"/>
-                <a:cs typeface="Yu Gothic" pitchFamily="34" charset="-120"/>
+                <a:latin typeface="游ゴシック" pitchFamily="34" charset="0"/>
+                <a:ea typeface="游ゴシック" pitchFamily="34" charset="-122"/>
+                <a:cs typeface="游ゴシック" pitchFamily="34" charset="-120"/>
               </a:rPr>
               <a:t>※ 「バランス栄養食」（カロリーメイト）「ゼリー飲料」（inゼリー）「飲むアイス」（クーリッシュ）── カテゴリー名を自ら命名した商品が市場を定義してきた</a:t>
             </a:r>
@@ -19894,9 +19894,9 @@
                 <a:solidFill>
                   <a:srgbClr val="FFFFFF"/>
                 </a:solidFill>
-                <a:latin typeface="Yu Gothic" pitchFamily="34" charset="0"/>
-                <a:ea typeface="Yu Gothic" pitchFamily="34" charset="-122"/>
-                <a:cs typeface="Yu Gothic" pitchFamily="34" charset="-120"/>
+                <a:latin typeface="游ゴシック" pitchFamily="34" charset="0"/>
+                <a:ea typeface="游ゴシック" pitchFamily="34" charset="-122"/>
+                <a:cs typeface="游ゴシック" pitchFamily="34" charset="-120"/>
               </a:rPr>
               <a:t>4．本命コンセプト</a:t>
             </a:r>
@@ -19953,9 +19953,9 @@
                 <a:solidFill>
                   <a:srgbClr val="595959"/>
                 </a:solidFill>
-                <a:latin typeface="Yu Gothic" pitchFamily="34" charset="0"/>
-                <a:ea typeface="Yu Gothic" pitchFamily="34" charset="-122"/>
-                <a:cs typeface="Yu Gothic" pitchFamily="34" charset="-120"/>
+                <a:latin typeface="游ゴシック" pitchFamily="34" charset="0"/>
+                <a:ea typeface="游ゴシック" pitchFamily="34" charset="-122"/>
+                <a:cs typeface="游ゴシック" pitchFamily="34" charset="-120"/>
               </a:rPr>
               <a:t>極　秘</a:t>
             </a:r>
@@ -19992,9 +19992,9 @@
                 <a:solidFill>
                   <a:srgbClr val="333333"/>
                 </a:solidFill>
-                <a:latin typeface="Yu Gothic" pitchFamily="34" charset="0"/>
-                <a:ea typeface="Yu Gothic" pitchFamily="34" charset="-122"/>
-                <a:cs typeface="Yu Gothic" pitchFamily="34" charset="-120"/>
+                <a:latin typeface="游ゴシック" pitchFamily="34" charset="0"/>
+                <a:ea typeface="游ゴシック" pitchFamily="34" charset="-122"/>
+                <a:cs typeface="游ゴシック" pitchFamily="34" charset="-120"/>
               </a:rPr>
               <a:t>『ULTRA 3MIN.』── 噛んで3分。味と色が、変身する。</a:t>
             </a:r>
@@ -20034,9 +20034,9 @@
                 <a:solidFill>
                   <a:srgbClr val="404040"/>
                 </a:solidFill>
-                <a:latin typeface="Yu Gothic" pitchFamily="34" charset="0"/>
-                <a:ea typeface="Yu Gothic" pitchFamily="34" charset="-122"/>
-                <a:cs typeface="Yu Gothic" pitchFamily="34" charset="-120"/>
+                <a:latin typeface="游ゴシック" pitchFamily="34" charset="0"/>
+                <a:ea typeface="游ゴシック" pitchFamily="34" charset="-122"/>
+                <a:cs typeface="游ゴシック" pitchFamily="34" charset="-120"/>
               </a:rPr>
               <a:t>カラータイマーの3分間を、口の中で体験するガム＆グミ。IPの中核体験をそのまま食体験に翻訳する</a:t>
             </a:r>
@@ -20188,9 +20188,9 @@
                 <a:solidFill>
                   <a:srgbClr val="333333"/>
                 </a:solidFill>
-                <a:latin typeface="Yu Gothic" pitchFamily="34" charset="0"/>
-                <a:ea typeface="Yu Gothic" pitchFamily="34" charset="-122"/>
-                <a:cs typeface="Yu Gothic" pitchFamily="34" charset="-120"/>
+                <a:latin typeface="游ゴシック" pitchFamily="34" charset="0"/>
+                <a:ea typeface="游ゴシック" pitchFamily="34" charset="-122"/>
+                <a:cs typeface="游ゴシック" pitchFamily="34" charset="-120"/>
               </a:rPr>
               <a:t>体験の中核</a:t>
             </a:r>
@@ -20257,9 +20257,9 @@
                 <a:solidFill>
                   <a:srgbClr val="404040"/>
                 </a:solidFill>
-                <a:latin typeface="Yu Gothic" pitchFamily="34" charset="0"/>
-                <a:ea typeface="Yu Gothic" pitchFamily="34" charset="-122"/>
-                <a:cs typeface="Yu Gothic" pitchFamily="34" charset="-120"/>
+                <a:latin typeface="游ゴシック" pitchFamily="34" charset="0"/>
+                <a:ea typeface="游ゴシック" pitchFamily="34" charset="-122"/>
+                <a:cs typeface="游ゴシック" pitchFamily="34" charset="-120"/>
               </a:rPr>
               <a:t>噛み始めは第1形態。3分経つと味と色が「変身」する時限設計</a:t>
             </a:r>
@@ -20281,9 +20281,9 @@
                 <a:solidFill>
                   <a:srgbClr val="404040"/>
                 </a:solidFill>
-                <a:latin typeface="Yu Gothic" pitchFamily="34" charset="0"/>
-                <a:ea typeface="Yu Gothic" pitchFamily="34" charset="-122"/>
-                <a:cs typeface="Yu Gothic" pitchFamily="34" charset="-120"/>
+                <a:latin typeface="游ゴシック" pitchFamily="34" charset="0"/>
+                <a:ea typeface="游ゴシック" pitchFamily="34" charset="-122"/>
+                <a:cs typeface="游ゴシック" pitchFamily="34" charset="-120"/>
               </a:rPr>
               <a:t>口の中でカラータイマーが点滅する ── 説明不要の商品コンセプト</a:t>
             </a:r>
@@ -20305,9 +20305,9 @@
                 <a:solidFill>
                   <a:srgbClr val="404040"/>
                 </a:solidFill>
-                <a:latin typeface="Yu Gothic" pitchFamily="34" charset="0"/>
-                <a:ea typeface="Yu Gothic" pitchFamily="34" charset="-122"/>
-                <a:cs typeface="Yu Gothic" pitchFamily="34" charset="-120"/>
+                <a:latin typeface="游ゴシック" pitchFamily="34" charset="0"/>
+                <a:ea typeface="游ゴシック" pitchFamily="34" charset="-122"/>
+                <a:cs typeface="游ゴシック" pitchFamily="34" charset="-120"/>
               </a:rPr>
               <a:t>実装は御社の独壇場：咀嚼研究 × 時限フレーバーカプセル × 色素設計</a:t>
             </a:r>
@@ -20329,9 +20329,9 @@
                 <a:solidFill>
                   <a:srgbClr val="404040"/>
                 </a:solidFill>
-                <a:latin typeface="Yu Gothic" pitchFamily="34" charset="0"/>
-                <a:ea typeface="Yu Gothic" pitchFamily="34" charset="-122"/>
-                <a:cs typeface="Yu Gothic" pitchFamily="34" charset="-120"/>
+                <a:latin typeface="游ゴシック" pitchFamily="34" charset="0"/>
+                <a:ea typeface="游ゴシック" pitchFamily="34" charset="-122"/>
+                <a:cs typeface="游ゴシック" pitchFamily="34" charset="-120"/>
               </a:rPr>
               <a:t>ガム（大人）・グミ（子ども）の両形態で同時展開し、家族全員を取る</a:t>
             </a:r>
@@ -20368,9 +20368,9 @@
                 <a:solidFill>
                   <a:srgbClr val="333333"/>
                 </a:solidFill>
-                <a:latin typeface="Yu Gothic" pitchFamily="34" charset="0"/>
-                <a:ea typeface="Yu Gothic" pitchFamily="34" charset="-122"/>
-                <a:cs typeface="Yu Gothic" pitchFamily="34" charset="-120"/>
+                <a:latin typeface="游ゴシック" pitchFamily="34" charset="0"/>
+                <a:ea typeface="游ゴシック" pitchFamily="34" charset="-122"/>
+                <a:cs typeface="游ゴシック" pitchFamily="34" charset="-120"/>
               </a:rPr>
               <a:t>変身の設計</a:t>
             </a:r>
@@ -20438,9 +20438,9 @@
                         <a:buNone/>
                       </a:pPr>
                       <a:endParaRPr lang="en-US" sz="1050" dirty="0">
-                        <a:latin typeface="Yu Gothic" charset="0"/>
-                        <a:ea typeface="Yu Gothic" charset="0"/>
-                        <a:cs typeface="Yu Gothic" charset="0"/>
+                        <a:latin typeface="游ゴシック" charset="0"/>
+                        <a:ea typeface="游ゴシック" charset="0"/>
+                        <a:cs typeface="游ゴシック" charset="0"/>
                       </a:endParaRPr>
                     </a:p>
                   </a:txBody>
@@ -20499,16 +20499,16 @@
                           <a:solidFill>
                             <a:srgbClr val="FFFFFF"/>
                           </a:solidFill>
-                          <a:latin typeface="Yu Gothic" pitchFamily="34" charset="0"/>
-                          <a:ea typeface="Yu Gothic" pitchFamily="34" charset="-122"/>
-                          <a:cs typeface="Yu Gothic" pitchFamily="34" charset="-120"/>
+                          <a:latin typeface="游ゴシック" pitchFamily="34" charset="0"/>
+                          <a:ea typeface="游ゴシック" pitchFamily="34" charset="-122"/>
+                          <a:cs typeface="游ゴシック" pitchFamily="34" charset="-120"/>
                         </a:rPr>
                         <a:t>第1形態</a:t>
                       </a:r>
                       <a:endParaRPr lang="en-US" sz="1050" dirty="0">
-                        <a:latin typeface="Yu Gothic" charset="0"/>
-                        <a:ea typeface="Yu Gothic" charset="0"/>
-                        <a:cs typeface="Yu Gothic" charset="0"/>
+                        <a:latin typeface="游ゴシック" charset="0"/>
+                        <a:ea typeface="游ゴシック" charset="0"/>
+                        <a:cs typeface="游ゴシック" charset="0"/>
                       </a:endParaRPr>
                     </a:p>
                   </a:txBody>
@@ -20567,16 +20567,16 @@
                           <a:solidFill>
                             <a:srgbClr val="FFFFFF"/>
                           </a:solidFill>
-                          <a:latin typeface="Yu Gothic" pitchFamily="34" charset="0"/>
-                          <a:ea typeface="Yu Gothic" pitchFamily="34" charset="-122"/>
-                          <a:cs typeface="Yu Gothic" pitchFamily="34" charset="-120"/>
+                          <a:latin typeface="游ゴシック" pitchFamily="34" charset="0"/>
+                          <a:ea typeface="游ゴシック" pitchFamily="34" charset="-122"/>
+                          <a:cs typeface="游ゴシック" pitchFamily="34" charset="-120"/>
                         </a:rPr>
                         <a:t>変身（3分経過）</a:t>
                       </a:r>
                       <a:endParaRPr lang="en-US" sz="1050" dirty="0">
-                        <a:latin typeface="Yu Gothic" charset="0"/>
-                        <a:ea typeface="Yu Gothic" charset="0"/>
-                        <a:cs typeface="Yu Gothic" charset="0"/>
+                        <a:latin typeface="游ゴシック" charset="0"/>
+                        <a:ea typeface="游ゴシック" charset="0"/>
+                        <a:cs typeface="游ゴシック" charset="0"/>
                       </a:endParaRPr>
                     </a:p>
                   </a:txBody>
@@ -20637,16 +20637,16 @@
                           <a:solidFill>
                             <a:srgbClr val="333333"/>
                           </a:solidFill>
-                          <a:latin typeface="Yu Gothic" pitchFamily="34" charset="0"/>
-                          <a:ea typeface="Yu Gothic" pitchFamily="34" charset="-122"/>
-                          <a:cs typeface="Yu Gothic" pitchFamily="34" charset="-120"/>
+                          <a:latin typeface="游ゴシック" pitchFamily="34" charset="0"/>
+                          <a:ea typeface="游ゴシック" pitchFamily="34" charset="-122"/>
+                          <a:cs typeface="游ゴシック" pitchFamily="34" charset="-120"/>
                         </a:rPr>
                         <a:t>色</a:t>
                       </a:r>
                       <a:endParaRPr lang="en-US" sz="1050" dirty="0">
-                        <a:latin typeface="Yu Gothic" charset="0"/>
-                        <a:ea typeface="Yu Gothic" charset="0"/>
-                        <a:cs typeface="Yu Gothic" charset="0"/>
+                        <a:latin typeface="游ゴシック" charset="0"/>
+                        <a:ea typeface="游ゴシック" charset="0"/>
+                        <a:cs typeface="游ゴシック" charset="0"/>
                       </a:endParaRPr>
                     </a:p>
                   </a:txBody>
@@ -20705,16 +20705,16 @@
                           <a:solidFill>
                             <a:srgbClr val="404040"/>
                           </a:solidFill>
-                          <a:latin typeface="Yu Gothic" pitchFamily="34" charset="0"/>
-                          <a:ea typeface="Yu Gothic" pitchFamily="34" charset="-122"/>
-                          <a:cs typeface="Yu Gothic" pitchFamily="34" charset="-120"/>
+                          <a:latin typeface="游ゴシック" pitchFamily="34" charset="0"/>
+                          <a:ea typeface="游ゴシック" pitchFamily="34" charset="-122"/>
+                          <a:cs typeface="游ゴシック" pitchFamily="34" charset="-120"/>
                         </a:rPr>
                         <a:t>スカイブルー</a:t>
                       </a:r>
                       <a:endParaRPr lang="en-US" sz="1050" dirty="0">
-                        <a:latin typeface="Yu Gothic" charset="0"/>
-                        <a:ea typeface="Yu Gothic" charset="0"/>
-                        <a:cs typeface="Yu Gothic" charset="0"/>
+                        <a:latin typeface="游ゴシック" charset="0"/>
+                        <a:ea typeface="游ゴシック" charset="0"/>
+                        <a:cs typeface="游ゴシック" charset="0"/>
                       </a:endParaRPr>
                     </a:p>
                   </a:txBody>
@@ -20770,16 +20770,16 @@
                           <a:solidFill>
                             <a:srgbClr val="C00000"/>
                           </a:solidFill>
-                          <a:latin typeface="Yu Gothic" pitchFamily="34" charset="0"/>
-                          <a:ea typeface="Yu Gothic" pitchFamily="34" charset="-122"/>
-                          <a:cs typeface="Yu Gothic" pitchFamily="34" charset="-120"/>
+                          <a:latin typeface="游ゴシック" pitchFamily="34" charset="0"/>
+                          <a:ea typeface="游ゴシック" pitchFamily="34" charset="-122"/>
+                          <a:cs typeface="游ゴシック" pitchFamily="34" charset="-120"/>
                         </a:rPr>
                         <a:t>バーニングレッド</a:t>
                       </a:r>
                       <a:endParaRPr lang="en-US" sz="1050" dirty="0">
-                        <a:latin typeface="Yu Gothic" charset="0"/>
-                        <a:ea typeface="Yu Gothic" charset="0"/>
-                        <a:cs typeface="Yu Gothic" charset="0"/>
+                        <a:latin typeface="游ゴシック" charset="0"/>
+                        <a:ea typeface="游ゴシック" charset="0"/>
+                        <a:cs typeface="游ゴシック" charset="0"/>
                       </a:endParaRPr>
                     </a:p>
                   </a:txBody>
@@ -20837,16 +20837,16 @@
                           <a:solidFill>
                             <a:srgbClr val="333333"/>
                           </a:solidFill>
-                          <a:latin typeface="Yu Gothic" pitchFamily="34" charset="0"/>
-                          <a:ea typeface="Yu Gothic" pitchFamily="34" charset="-122"/>
-                          <a:cs typeface="Yu Gothic" pitchFamily="34" charset="-120"/>
+                          <a:latin typeface="游ゴシック" pitchFamily="34" charset="0"/>
+                          <a:ea typeface="游ゴシック" pitchFamily="34" charset="-122"/>
+                          <a:cs typeface="游ゴシック" pitchFamily="34" charset="-120"/>
                         </a:rPr>
                         <a:t>味</a:t>
                       </a:r>
                       <a:endParaRPr lang="en-US" sz="1050" dirty="0">
-                        <a:latin typeface="Yu Gothic" charset="0"/>
-                        <a:ea typeface="Yu Gothic" charset="0"/>
-                        <a:cs typeface="Yu Gothic" charset="0"/>
+                        <a:latin typeface="游ゴシック" charset="0"/>
+                        <a:ea typeface="游ゴシック" charset="0"/>
+                        <a:cs typeface="游ゴシック" charset="0"/>
                       </a:endParaRPr>
                     </a:p>
                   </a:txBody>
@@ -20905,16 +20905,16 @@
                           <a:solidFill>
                             <a:srgbClr val="404040"/>
                           </a:solidFill>
-                          <a:latin typeface="Yu Gothic" pitchFamily="34" charset="0"/>
-                          <a:ea typeface="Yu Gothic" pitchFamily="34" charset="-122"/>
-                          <a:cs typeface="Yu Gothic" pitchFamily="34" charset="-120"/>
+                          <a:latin typeface="游ゴシック" pitchFamily="34" charset="0"/>
+                          <a:ea typeface="游ゴシック" pitchFamily="34" charset="-122"/>
+                          <a:cs typeface="游ゴシック" pitchFamily="34" charset="-120"/>
                         </a:rPr>
                         <a:t>クールソーダ</a:t>
                       </a:r>
                       <a:endParaRPr lang="en-US" sz="1050" dirty="0">
-                        <a:latin typeface="Yu Gothic" charset="0"/>
-                        <a:ea typeface="Yu Gothic" charset="0"/>
-                        <a:cs typeface="Yu Gothic" charset="0"/>
+                        <a:latin typeface="游ゴシック" charset="0"/>
+                        <a:ea typeface="游ゴシック" charset="0"/>
+                        <a:cs typeface="游ゴシック" charset="0"/>
                       </a:endParaRPr>
                     </a:p>
                   </a:txBody>
@@ -20970,16 +20970,16 @@
                           <a:solidFill>
                             <a:srgbClr val="C00000"/>
                           </a:solidFill>
-                          <a:latin typeface="Yu Gothic" pitchFamily="34" charset="0"/>
-                          <a:ea typeface="Yu Gothic" pitchFamily="34" charset="-122"/>
-                          <a:cs typeface="Yu Gothic" pitchFamily="34" charset="-120"/>
+                          <a:latin typeface="游ゴシック" pitchFamily="34" charset="0"/>
+                          <a:ea typeface="游ゴシック" pitchFamily="34" charset="-122"/>
+                          <a:cs typeface="游ゴシック" pitchFamily="34" charset="-120"/>
                         </a:rPr>
                         <a:t>エナジーフレーバー</a:t>
                       </a:r>
                       <a:endParaRPr lang="en-US" sz="1050" dirty="0">
-                        <a:latin typeface="Yu Gothic" charset="0"/>
-                        <a:ea typeface="Yu Gothic" charset="0"/>
-                        <a:cs typeface="Yu Gothic" charset="0"/>
+                        <a:latin typeface="游ゴシック" charset="0"/>
+                        <a:ea typeface="游ゴシック" charset="0"/>
+                        <a:cs typeface="游ゴシック" charset="0"/>
                       </a:endParaRPr>
                     </a:p>
                   </a:txBody>
@@ -21037,16 +21037,16 @@
                           <a:solidFill>
                             <a:srgbClr val="333333"/>
                           </a:solidFill>
-                          <a:latin typeface="Yu Gothic" pitchFamily="34" charset="0"/>
-                          <a:ea typeface="Yu Gothic" pitchFamily="34" charset="-122"/>
-                          <a:cs typeface="Yu Gothic" pitchFamily="34" charset="-120"/>
+                          <a:latin typeface="游ゴシック" pitchFamily="34" charset="0"/>
+                          <a:ea typeface="游ゴシック" pitchFamily="34" charset="-122"/>
+                          <a:cs typeface="游ゴシック" pitchFamily="34" charset="-120"/>
                         </a:rPr>
                         <a:t>意味</a:t>
                       </a:r>
                       <a:endParaRPr lang="en-US" sz="1050" dirty="0">
-                        <a:latin typeface="Yu Gothic" charset="0"/>
-                        <a:ea typeface="Yu Gothic" charset="0"/>
-                        <a:cs typeface="Yu Gothic" charset="0"/>
+                        <a:latin typeface="游ゴシック" charset="0"/>
+                        <a:ea typeface="游ゴシック" charset="0"/>
+                        <a:cs typeface="游ゴシック" charset="0"/>
                       </a:endParaRPr>
                     </a:p>
                   </a:txBody>
@@ -21105,16 +21105,16 @@
                           <a:solidFill>
                             <a:srgbClr val="404040"/>
                           </a:solidFill>
-                          <a:latin typeface="Yu Gothic" pitchFamily="34" charset="0"/>
-                          <a:ea typeface="Yu Gothic" pitchFamily="34" charset="-122"/>
-                          <a:cs typeface="Yu Gothic" pitchFamily="34" charset="-120"/>
+                          <a:latin typeface="游ゴシック" pitchFamily="34" charset="0"/>
+                          <a:ea typeface="游ゴシック" pitchFamily="34" charset="-122"/>
+                          <a:cs typeface="游ゴシック" pitchFamily="34" charset="-120"/>
                         </a:rPr>
                         <a:t>集中スイッチON</a:t>
                       </a:r>
                       <a:endParaRPr lang="en-US" sz="1050" dirty="0">
-                        <a:latin typeface="Yu Gothic" charset="0"/>
-                        <a:ea typeface="Yu Gothic" charset="0"/>
-                        <a:cs typeface="Yu Gothic" charset="0"/>
+                        <a:latin typeface="游ゴシック" charset="0"/>
+                        <a:ea typeface="游ゴシック" charset="0"/>
+                        <a:cs typeface="游ゴシック" charset="0"/>
                       </a:endParaRPr>
                     </a:p>
                   </a:txBody>
@@ -21170,16 +21170,16 @@
                           <a:solidFill>
                             <a:srgbClr val="404040"/>
                           </a:solidFill>
-                          <a:latin typeface="Yu Gothic" pitchFamily="34" charset="0"/>
-                          <a:ea typeface="Yu Gothic" pitchFamily="34" charset="-122"/>
-                          <a:cs typeface="Yu Gothic" pitchFamily="34" charset="-120"/>
+                          <a:latin typeface="游ゴシック" pitchFamily="34" charset="0"/>
+                          <a:ea typeface="游ゴシック" pitchFamily="34" charset="-122"/>
+                          <a:cs typeface="游ゴシック" pitchFamily="34" charset="-120"/>
                         </a:rPr>
                         <a:t>ヒーロータイムの完走</a:t>
                       </a:r>
                       <a:endParaRPr lang="en-US" sz="1050" dirty="0">
-                        <a:latin typeface="Yu Gothic" charset="0"/>
-                        <a:ea typeface="Yu Gothic" charset="0"/>
-                        <a:cs typeface="Yu Gothic" charset="0"/>
+                        <a:latin typeface="游ゴシック" charset="0"/>
+                        <a:ea typeface="游ゴシック" charset="0"/>
+                        <a:cs typeface="游ゴシック" charset="0"/>
                       </a:endParaRPr>
                     </a:p>
                   </a:txBody>
@@ -21281,9 +21281,9 @@
                 <a:solidFill>
                   <a:srgbClr val="C00000"/>
                 </a:solidFill>
-                <a:latin typeface="Yu Gothic" pitchFamily="34" charset="0"/>
-                <a:ea typeface="Yu Gothic" pitchFamily="34" charset="-122"/>
-                <a:cs typeface="Yu Gothic" pitchFamily="34" charset="-120"/>
+                <a:latin typeface="游ゴシック" pitchFamily="34" charset="0"/>
+                <a:ea typeface="游ゴシック" pitchFamily="34" charset="-122"/>
+                <a:cs typeface="游ゴシック" pitchFamily="34" charset="-120"/>
               </a:rPr>
               <a:t>① </a:t>
             </a:r>
@@ -21298,9 +21298,9 @@
                 <a:solidFill>
                   <a:srgbClr val="404040"/>
                 </a:solidFill>
-                <a:latin typeface="Yu Gothic" pitchFamily="34" charset="0"/>
-                <a:ea typeface="Yu Gothic" pitchFamily="34" charset="-122"/>
-                <a:cs typeface="Yu Gothic" pitchFamily="34" charset="-120"/>
+                <a:latin typeface="游ゴシック" pitchFamily="34" charset="0"/>
+                <a:ea typeface="游ゴシック" pitchFamily="34" charset="-122"/>
+                <a:cs typeface="游ゴシック" pitchFamily="34" charset="-120"/>
               </a:rPr>
               <a:t>「3分後の変身」がこの商品の発明。1日3分のヒーロータイムという新しい習慣を作る</a:t>
             </a:r>
@@ -21337,9 +21337,9 @@
                 <a:solidFill>
                   <a:srgbClr val="808080"/>
                 </a:solidFill>
-                <a:latin typeface="Yu Gothic" pitchFamily="34" charset="0"/>
-                <a:ea typeface="Yu Gothic" pitchFamily="34" charset="-122"/>
-                <a:cs typeface="Yu Gothic" pitchFamily="34" charset="-120"/>
+                <a:latin typeface="游ゴシック" pitchFamily="34" charset="0"/>
+                <a:ea typeface="游ゴシック" pitchFamily="34" charset="-122"/>
+                <a:cs typeface="游ゴシック" pitchFamily="34" charset="-120"/>
               </a:rPr>
               <a:t>※ 商品名・フレーバーはすべて仮称。時限変化の実装方式は御社中央研究所との共同検討事項</a:t>
             </a:r>
@@ -21428,9 +21428,9 @@
                 <a:solidFill>
                   <a:srgbClr val="FFFFFF"/>
                 </a:solidFill>
-                <a:latin typeface="Yu Gothic" pitchFamily="34" charset="0"/>
-                <a:ea typeface="Yu Gothic" pitchFamily="34" charset="-122"/>
-                <a:cs typeface="Yu Gothic" pitchFamily="34" charset="-120"/>
+                <a:latin typeface="游ゴシック" pitchFamily="34" charset="0"/>
+                <a:ea typeface="游ゴシック" pitchFamily="34" charset="-122"/>
+                <a:cs typeface="游ゴシック" pitchFamily="34" charset="-120"/>
               </a:rPr>
               <a:t>4．本命コンセプト</a:t>
             </a:r>
@@ -21487,9 +21487,9 @@
                 <a:solidFill>
                   <a:srgbClr val="595959"/>
                 </a:solidFill>
-                <a:latin typeface="Yu Gothic" pitchFamily="34" charset="0"/>
-                <a:ea typeface="Yu Gothic" pitchFamily="34" charset="-122"/>
-                <a:cs typeface="Yu Gothic" pitchFamily="34" charset="-120"/>
+                <a:latin typeface="游ゴシック" pitchFamily="34" charset="0"/>
+                <a:ea typeface="游ゴシック" pitchFamily="34" charset="-122"/>
+                <a:cs typeface="游ゴシック" pitchFamily="34" charset="-120"/>
               </a:rPr>
               <a:t>極　秘</a:t>
             </a:r>
@@ -21526,9 +21526,9 @@
                 <a:solidFill>
                   <a:srgbClr val="333333"/>
                 </a:solidFill>
-                <a:latin typeface="Yu Gothic" pitchFamily="34" charset="0"/>
-                <a:ea typeface="Yu Gothic" pitchFamily="34" charset="-122"/>
-                <a:cs typeface="Yu Gothic" pitchFamily="34" charset="-120"/>
+                <a:latin typeface="游ゴシック" pitchFamily="34" charset="0"/>
+                <a:ea typeface="游ゴシック" pitchFamily="34" charset="-122"/>
+                <a:cs typeface="游ゴシック" pitchFamily="34" charset="-120"/>
               </a:rPr>
               <a:t>体験設計 ──「1日3分のヒーロータイム」という習慣</a:t>
             </a:r>
@@ -21568,9 +21568,9 @@
                 <a:solidFill>
                   <a:srgbClr val="404040"/>
                 </a:solidFill>
-                <a:latin typeface="Yu Gothic" pitchFamily="34" charset="0"/>
-                <a:ea typeface="Yu Gothic" pitchFamily="34" charset="-122"/>
-                <a:cs typeface="Yu Gothic" pitchFamily="34" charset="-120"/>
+                <a:latin typeface="游ゴシック" pitchFamily="34" charset="0"/>
+                <a:ea typeface="游ゴシック" pitchFamily="34" charset="-122"/>
+                <a:cs typeface="游ゴシック" pitchFamily="34" charset="-120"/>
               </a:rPr>
               <a:t>飲料のような日常頻度に近づけるため、機能・共有・健康・儀式の4方向から「毎日噛む理由」を設計する</a:t>
             </a:r>
@@ -21733,16 +21733,16 @@
                           <a:solidFill>
                             <a:srgbClr val="333333"/>
                           </a:solidFill>
-                          <a:latin typeface="Yu Gothic" pitchFamily="34" charset="0"/>
-                          <a:ea typeface="Yu Gothic" pitchFamily="34" charset="-122"/>
-                          <a:cs typeface="Yu Gothic" pitchFamily="34" charset="-120"/>
+                          <a:latin typeface="游ゴシック" pitchFamily="34" charset="0"/>
+                          <a:ea typeface="游ゴシック" pitchFamily="34" charset="-122"/>
+                          <a:cs typeface="游ゴシック" pitchFamily="34" charset="-120"/>
                         </a:rPr>
                         <a:t>集中のスイッチ</a:t>
                       </a:r>
                       <a:endParaRPr lang="en-US" sz="1100" dirty="0">
-                        <a:latin typeface="Yu Gothic" charset="0"/>
-                        <a:ea typeface="Yu Gothic" charset="0"/>
-                        <a:cs typeface="Yu Gothic" charset="0"/>
+                        <a:latin typeface="游ゴシック" charset="0"/>
+                        <a:ea typeface="游ゴシック" charset="0"/>
+                        <a:cs typeface="游ゴシック" charset="0"/>
                       </a:endParaRPr>
                     </a:p>
                   </a:txBody>
@@ -21801,16 +21801,16 @@
                           <a:solidFill>
                             <a:srgbClr val="404040"/>
                           </a:solidFill>
-                          <a:latin typeface="Yu Gothic" pitchFamily="34" charset="0"/>
-                          <a:ea typeface="Yu Gothic" pitchFamily="34" charset="-122"/>
-                          <a:cs typeface="Yu Gothic" pitchFamily="34" charset="-120"/>
+                          <a:latin typeface="游ゴシック" pitchFamily="34" charset="0"/>
+                          <a:ea typeface="游ゴシック" pitchFamily="34" charset="-122"/>
+                          <a:cs typeface="游ゴシック" pitchFamily="34" charset="-120"/>
                         </a:rPr>
                         <a:t>勉強前・会議前・試合前の「3分間ルーティン」として設計。噛むことによる集中・リフレッシュ効果の知見（御社の噛むこと研究）をそのまま価値訴求に接続できる</a:t>
                       </a:r>
                       <a:endParaRPr lang="en-US" sz="1100" dirty="0">
-                        <a:latin typeface="Yu Gothic" charset="0"/>
-                        <a:ea typeface="Yu Gothic" charset="0"/>
-                        <a:cs typeface="Yu Gothic" charset="0"/>
+                        <a:latin typeface="游ゴシック" charset="0"/>
+                        <a:ea typeface="游ゴシック" charset="0"/>
+                        <a:cs typeface="游ゴシック" charset="0"/>
                       </a:endParaRPr>
                     </a:p>
                   </a:txBody>
@@ -21868,16 +21868,16 @@
                           <a:solidFill>
                             <a:srgbClr val="333333"/>
                           </a:solidFill>
-                          <a:latin typeface="Yu Gothic" pitchFamily="34" charset="0"/>
-                          <a:ea typeface="Yu Gothic" pitchFamily="34" charset="-122"/>
-                          <a:cs typeface="Yu Gothic" pitchFamily="34" charset="-120"/>
+                          <a:latin typeface="游ゴシック" pitchFamily="34" charset="0"/>
+                          <a:ea typeface="游ゴシック" pitchFamily="34" charset="-122"/>
+                          <a:cs typeface="游ゴシック" pitchFamily="34" charset="-120"/>
                         </a:rPr>
                         <a:t>見せたくなる変化</a:t>
                       </a:r>
                       <a:endParaRPr lang="en-US" sz="1100" dirty="0">
-                        <a:latin typeface="Yu Gothic" charset="0"/>
-                        <a:ea typeface="Yu Gothic" charset="0"/>
-                        <a:cs typeface="Yu Gothic" charset="0"/>
+                        <a:latin typeface="游ゴシック" charset="0"/>
+                        <a:ea typeface="游ゴシック" charset="0"/>
+                        <a:cs typeface="游ゴシック" charset="0"/>
                       </a:endParaRPr>
                     </a:p>
                   </a:txBody>
@@ -21936,16 +21936,16 @@
                           <a:solidFill>
                             <a:srgbClr val="404040"/>
                           </a:solidFill>
-                          <a:latin typeface="Yu Gothic" pitchFamily="34" charset="0"/>
-                          <a:ea typeface="Yu Gothic" pitchFamily="34" charset="-122"/>
-                          <a:cs typeface="Yu Gothic" pitchFamily="34" charset="-120"/>
+                          <a:latin typeface="游ゴシック" pitchFamily="34" charset="0"/>
+                          <a:ea typeface="游ゴシック" pitchFamily="34" charset="-122"/>
+                          <a:cs typeface="游ゴシック" pitchFamily="34" charset="-120"/>
                         </a:rPr>
                         <a:t>菓子と舌の色が変わる様子はショート動画と相性抜群。「変身チャレンジ」としてSNSで自走する仕掛けを初期設計に組み込む</a:t>
                       </a:r>
                       <a:endParaRPr lang="en-US" sz="1100" dirty="0">
-                        <a:latin typeface="Yu Gothic" charset="0"/>
-                        <a:ea typeface="Yu Gothic" charset="0"/>
-                        <a:cs typeface="Yu Gothic" charset="0"/>
+                        <a:latin typeface="游ゴシック" charset="0"/>
+                        <a:ea typeface="游ゴシック" charset="0"/>
+                        <a:cs typeface="游ゴシック" charset="0"/>
                       </a:endParaRPr>
                     </a:p>
                   </a:txBody>
@@ -22003,16 +22003,16 @@
                           <a:solidFill>
                             <a:srgbClr val="333333"/>
                           </a:solidFill>
-                          <a:latin typeface="Yu Gothic" pitchFamily="34" charset="0"/>
-                          <a:ea typeface="Yu Gothic" pitchFamily="34" charset="-122"/>
-                          <a:cs typeface="Yu Gothic" pitchFamily="34" charset="-120"/>
+                          <a:latin typeface="游ゴシック" pitchFamily="34" charset="0"/>
+                          <a:ea typeface="游ゴシック" pitchFamily="34" charset="-122"/>
+                          <a:cs typeface="游ゴシック" pitchFamily="34" charset="-120"/>
                         </a:rPr>
                         <a:t>健康・育成の文脈</a:t>
                       </a:r>
                       <a:endParaRPr lang="en-US" sz="1100" dirty="0">
-                        <a:latin typeface="Yu Gothic" charset="0"/>
-                        <a:ea typeface="Yu Gothic" charset="0"/>
-                        <a:cs typeface="Yu Gothic" charset="0"/>
+                        <a:latin typeface="游ゴシック" charset="0"/>
+                        <a:ea typeface="游ゴシック" charset="0"/>
+                        <a:cs typeface="游ゴシック" charset="0"/>
                       </a:endParaRPr>
                     </a:p>
                   </a:txBody>
@@ -22071,16 +22071,16 @@
                           <a:solidFill>
                             <a:srgbClr val="404040"/>
                           </a:solidFill>
-                          <a:latin typeface="Yu Gothic" pitchFamily="34" charset="0"/>
-                          <a:ea typeface="Yu Gothic" pitchFamily="34" charset="-122"/>
-                          <a:cs typeface="Yu Gothic" pitchFamily="34" charset="-120"/>
+                          <a:latin typeface="游ゴシック" pitchFamily="34" charset="0"/>
+                          <a:ea typeface="游ゴシック" pitchFamily="34" charset="-122"/>
+                          <a:cs typeface="游ゴシック" pitchFamily="34" charset="-120"/>
                         </a:rPr>
                         <a:t>ガムの健康価値訴求と完全に整合。子どもの咀嚼力育成、大人のオーラルケア・ストレスケアまで、家族全員に「噛む理由」を提供する</a:t>
                       </a:r>
                       <a:endParaRPr lang="en-US" sz="1100" dirty="0">
-                        <a:latin typeface="Yu Gothic" charset="0"/>
-                        <a:ea typeface="Yu Gothic" charset="0"/>
-                        <a:cs typeface="Yu Gothic" charset="0"/>
+                        <a:latin typeface="游ゴシック" charset="0"/>
+                        <a:ea typeface="游ゴシック" charset="0"/>
+                        <a:cs typeface="游ゴシック" charset="0"/>
                       </a:endParaRPr>
                     </a:p>
                   </a:txBody>
@@ -22138,16 +22138,16 @@
                           <a:solidFill>
                             <a:srgbClr val="333333"/>
                           </a:solidFill>
-                          <a:latin typeface="Yu Gothic" pitchFamily="34" charset="0"/>
-                          <a:ea typeface="Yu Gothic" pitchFamily="34" charset="-122"/>
-                          <a:cs typeface="Yu Gothic" pitchFamily="34" charset="-120"/>
+                          <a:latin typeface="游ゴシック" pitchFamily="34" charset="0"/>
+                          <a:ea typeface="游ゴシック" pitchFamily="34" charset="-122"/>
+                          <a:cs typeface="游ゴシック" pitchFamily="34" charset="-120"/>
                         </a:rPr>
                         <a:t>変身の儀式性</a:t>
                       </a:r>
                       <a:endParaRPr lang="en-US" sz="1100" dirty="0">
-                        <a:latin typeface="Yu Gothic" charset="0"/>
-                        <a:ea typeface="Yu Gothic" charset="0"/>
-                        <a:cs typeface="Yu Gothic" charset="0"/>
+                        <a:latin typeface="游ゴシック" charset="0"/>
+                        <a:ea typeface="游ゴシック" charset="0"/>
+                        <a:cs typeface="游ゴシック" charset="0"/>
                       </a:endParaRPr>
                     </a:p>
                   </a:txBody>
@@ -22206,16 +22206,16 @@
                           <a:solidFill>
                             <a:srgbClr val="404040"/>
                           </a:solidFill>
-                          <a:latin typeface="Yu Gothic" pitchFamily="34" charset="0"/>
-                          <a:ea typeface="Yu Gothic" pitchFamily="34" charset="-122"/>
-                          <a:cs typeface="Yu Gothic" pitchFamily="34" charset="-120"/>
+                          <a:latin typeface="游ゴシック" pitchFamily="34" charset="0"/>
+                          <a:ea typeface="游ゴシック" pitchFamily="34" charset="-122"/>
+                          <a:cs typeface="游ゴシック" pitchFamily="34" charset="-120"/>
                         </a:rPr>
                         <a:t>パッケージは「開ける＝変身する」演出（変身音・カラータイマー窓など）。3分の儀式を毎日の相棒にする</a:t>
                       </a:r>
                       <a:endParaRPr lang="en-US" sz="1100" dirty="0">
-                        <a:latin typeface="Yu Gothic" charset="0"/>
-                        <a:ea typeface="Yu Gothic" charset="0"/>
-                        <a:cs typeface="Yu Gothic" charset="0"/>
+                        <a:latin typeface="游ゴシック" charset="0"/>
+                        <a:ea typeface="游ゴシック" charset="0"/>
+                        <a:cs typeface="游ゴシック" charset="0"/>
                       </a:endParaRPr>
                     </a:p>
                   </a:txBody>
@@ -22292,9 +22292,9 @@
                 <a:solidFill>
                   <a:srgbClr val="808080"/>
                 </a:solidFill>
-                <a:latin typeface="Yu Gothic" pitchFamily="34" charset="0"/>
-                <a:ea typeface="Yu Gothic" pitchFamily="34" charset="-122"/>
-                <a:cs typeface="Yu Gothic" pitchFamily="34" charset="-120"/>
+                <a:latin typeface="游ゴシック" pitchFamily="34" charset="0"/>
+                <a:ea typeface="游ゴシック" pitchFamily="34" charset="-122"/>
+                <a:cs typeface="游ゴシック" pitchFamily="34" charset="-120"/>
               </a:rPr>
               <a:t>※ 効能に関する表現は、噛むこと健康研究会の知見と食品表示規制の範囲内で設計する（詳細はP.16）</a:t>
             </a:r>
@@ -22354,7 +22354,7 @@
     <a:fontScheme name="Office">
       <a:majorFont>
         <a:latin typeface="Calibri Light" panose="020F0302020204030204"/>
-        <a:ea typeface=""/>
+        <a:ea typeface="游ゴシック"/>
         <a:cs typeface=""/>
         <a:font script="Jpan" typeface="游ゴシック Light"/>
         <a:font script="Hang" typeface="맑은 고딕"/>
@@ -22406,7 +22406,7 @@
       </a:majorFont>
       <a:minorFont>
         <a:latin typeface="Calibri" panose="020F0502020204030204"/>
-        <a:ea typeface=""/>
+        <a:ea typeface="游ゴシック"/>
         <a:cs typeface=""/>
         <a:font script="Jpan" typeface="游ゴシック"/>
         <a:font script="Hang" typeface="맑은 고딕"/>

--- a/docs/proposals/lotte-ultraman-category-proposal.pptx
+++ b/docs/proposals/lotte-ultraman-category-proposal.pptx
@@ -2466,7 +2466,7 @@
                 <a:ea typeface="游ゴシック" pitchFamily="34" charset="-122"/>
                 <a:cs typeface="游ゴシック" pitchFamily="34" charset="-120"/>
               </a:rPr>
-              <a:t>── 「変身を、たべよう。」 ウルトラマン × ロッテ 新カテゴリー創造の検討 ──</a:t>
+              <a:t>── 「3分間を、たべよう。」 ウルトラマン × ロッテ 新カテゴリー創造の検討 ──</a:t>
             </a:r>
             <a:endParaRPr lang="en-US" sz="1500" dirty="0"/>
           </a:p>
@@ -10209,7 +10209,7 @@
                 <a:ea typeface="游ゴシック" pitchFamily="34" charset="-122"/>
                 <a:cs typeface="游ゴシック" pitchFamily="34" charset="-120"/>
               </a:rPr>
-              <a:t>IPコラボの典型的な失敗は研究済み。4つの懸念に、構造で答える</a:t>
+              <a:t>IPコラボの典型的な失敗は研究済み。5つの懸念に、構造で答える</a:t>
             </a:r>
             <a:endParaRPr lang="en-US" sz="1250" dirty="0"/>
           </a:p>
@@ -10366,7 +10366,7 @@
                         <a:buNone/>
                       </a:pPr>
                       <a:r>
-                        <a:rPr lang="en-US" sz="1050" b="1" dirty="0">
+                        <a:rPr lang="en-US" sz="1000" b="1" dirty="0">
                           <a:solidFill>
                             <a:srgbClr val="FFFFFF"/>
                           </a:solidFill>
@@ -10376,7 +10376,7 @@
                         </a:rPr>
                         <a:t>想定されるご懸念</a:t>
                       </a:r>
-                      <a:endParaRPr lang="en-US" sz="1050" dirty="0">
+                      <a:endParaRPr lang="en-US" sz="1000" dirty="0">
                         <a:latin typeface="游ゴシック" charset="0"/>
                         <a:ea typeface="游ゴシック" charset="0"/>
                         <a:cs typeface="游ゴシック" charset="0"/>
@@ -10434,7 +10434,7 @@
                         <a:buNone/>
                       </a:pPr>
                       <a:r>
-                        <a:rPr lang="en-US" sz="1050" b="1" dirty="0">
+                        <a:rPr lang="en-US" sz="1000" b="1" dirty="0">
                           <a:solidFill>
                             <a:srgbClr val="FFFFFF"/>
                           </a:solidFill>
@@ -10444,7 +10444,7 @@
                         </a:rPr>
                         <a:t>私たちの答え</a:t>
                       </a:r>
-                      <a:endParaRPr lang="en-US" sz="1050" dirty="0">
+                      <a:endParaRPr lang="en-US" sz="1000" dirty="0">
                         <a:latin typeface="游ゴシック" charset="0"/>
                         <a:ea typeface="游ゴシック" charset="0"/>
                         <a:cs typeface="游ゴシック" charset="0"/>
@@ -10494,7 +10494,7 @@
                   </a:tcPr>
                 </a:tc>
               </a:tr>
-              <a:tr h="868680">
+              <a:tr h="749808">
                 <a:tc>
                   <a:txBody>
                     <a:bodyPr/>
@@ -10504,7 +10504,7 @@
                         <a:buNone/>
                       </a:pPr>
                       <a:r>
-                        <a:rPr lang="en-US" sz="1050" b="1" dirty="0">
+                        <a:rPr lang="en-US" sz="1000" b="1" dirty="0">
                           <a:solidFill>
                             <a:srgbClr val="333333"/>
                           </a:solidFill>
@@ -10512,9 +10512,9 @@
                           <a:ea typeface="游ゴシック" pitchFamily="34" charset="-122"/>
                           <a:cs typeface="游ゴシック" pitchFamily="34" charset="-120"/>
                         </a:rPr>
-                        <a:t>「IPコラボは水物では？」</a:t>
+                        <a:t>「変身なら仮面ライダーでは？」</a:t>
                       </a:r>
-                      <a:endParaRPr lang="en-US" sz="1050" dirty="0">
+                      <a:endParaRPr lang="en-US" sz="1000" dirty="0">
                         <a:latin typeface="游ゴシック" charset="0"/>
                         <a:ea typeface="游ゴシック" charset="0"/>
                         <a:cs typeface="游ゴシック" charset="0"/>
@@ -10572,7 +10572,7 @@
                         <a:buNone/>
                       </a:pPr>
                       <a:r>
-                        <a:rPr lang="en-US" sz="1050" dirty="0">
+                        <a:rPr lang="en-US" sz="1000" dirty="0">
                           <a:solidFill>
                             <a:srgbClr val="404040"/>
                           </a:solidFill>
@@ -10580,9 +10580,9 @@
                           <a:ea typeface="游ゴシック" pitchFamily="34" charset="-122"/>
                           <a:cs typeface="游ゴシック" pitchFamily="34" charset="-120"/>
                         </a:rPr>
-                        <a:t>妖怪メダルは単一タイトル依存でピークの9分の1に。ウルトラマンは毎年新ヒーロー × 歴代60年資産の「終わらないコンテンツ」構造で、プロ野球チップス型の長寿設計が可能</a:t>
+                        <a:t>変身の瞬間の文化はライダーが本家。だが本商品の中核は「3分間の時限変化」であり、カラータイマーを持つウルトラマンにしか語れない。菓子でのライダーはカルビーの記憶であり、中国・東南アジアの人気もウルトラマンが圧倒的</a:t>
                       </a:r>
-                      <a:endParaRPr lang="en-US" sz="1050" dirty="0">
+                      <a:endParaRPr lang="en-US" sz="1000" dirty="0">
                         <a:latin typeface="游ゴシック" charset="0"/>
                         <a:ea typeface="游ゴシック" charset="0"/>
                         <a:cs typeface="游ゴシック" charset="0"/>
@@ -10629,7 +10629,7 @@
                   </a:tcPr>
                 </a:tc>
               </a:tr>
-              <a:tr h="868680">
+              <a:tr h="749808">
                 <a:tc>
                   <a:txBody>
                     <a:bodyPr/>
@@ -10639,7 +10639,7 @@
                         <a:buNone/>
                       </a:pPr>
                       <a:r>
-                        <a:rPr lang="en-US" sz="1050" b="1" dirty="0">
+                        <a:rPr lang="en-US" sz="1000" b="1" dirty="0">
                           <a:solidFill>
                             <a:srgbClr val="333333"/>
                           </a:solidFill>
@@ -10647,9 +10647,9 @@
                           <a:ea typeface="游ゴシック" pitchFamily="34" charset="-122"/>
                           <a:cs typeface="游ゴシック" pitchFamily="34" charset="-120"/>
                         </a:rPr>
-                        <a:t>「ビックリマンの規制の記憶」</a:t>
+                        <a:t>「IPコラボは水物では？」</a:t>
                       </a:r>
-                      <a:endParaRPr lang="en-US" sz="1050" dirty="0">
+                      <a:endParaRPr lang="en-US" sz="1000" dirty="0">
                         <a:latin typeface="游ゴシック" charset="0"/>
                         <a:ea typeface="游ゴシック" charset="0"/>
                         <a:cs typeface="游ゴシック" charset="0"/>
@@ -10707,7 +10707,7 @@
                         <a:buNone/>
                       </a:pPr>
                       <a:r>
-                        <a:rPr lang="en-US" sz="1050" dirty="0">
+                        <a:rPr lang="en-US" sz="1000" dirty="0">
                           <a:solidFill>
                             <a:srgbClr val="404040"/>
                           </a:solidFill>
@@ -10715,9 +10715,9 @@
                           <a:ea typeface="游ゴシック" pitchFamily="34" charset="-122"/>
                           <a:cs typeface="游ゴシック" pitchFamily="34" charset="-120"/>
                         </a:rPr>
-                        <a:t>1988年の公取委勧告は研究済み。レアは射幸性でなく物語性に置き、封入率の透明化とデジタル図鑑での重複救済など、令和の健全設計を初期から組み込む</a:t>
+                        <a:t>妖怪メダルは単一タイトル依存でピークの9分の1に。ウルトラマンは毎年新ヒーロー × 歴代60年資産の「終わらないコンテンツ」構造で、プロ野球チップス型の長寿設計が可能</a:t>
                       </a:r>
-                      <a:endParaRPr lang="en-US" sz="1050" dirty="0">
+                      <a:endParaRPr lang="en-US" sz="1000" dirty="0">
                         <a:latin typeface="游ゴシック" charset="0"/>
                         <a:ea typeface="游ゴシック" charset="0"/>
                         <a:cs typeface="游ゴシック" charset="0"/>
@@ -10764,7 +10764,7 @@
                   </a:tcPr>
                 </a:tc>
               </a:tr>
-              <a:tr h="868680">
+              <a:tr h="749808">
                 <a:tc>
                   <a:txBody>
                     <a:bodyPr/>
@@ -10774,7 +10774,7 @@
                         <a:buNone/>
                       </a:pPr>
                       <a:r>
-                        <a:rPr lang="en-US" sz="1050" b="1" dirty="0">
+                        <a:rPr lang="en-US" sz="1000" b="1" dirty="0">
                           <a:solidFill>
                             <a:srgbClr val="333333"/>
                           </a:solidFill>
@@ -10782,9 +10782,9 @@
                           <a:ea typeface="游ゴシック" pitchFamily="34" charset="-122"/>
                           <a:cs typeface="游ゴシック" pitchFamily="34" charset="-120"/>
                         </a:rPr>
-                        <a:t>「海外権利は大丈夫か」</a:t>
+                        <a:t>「ビックリマンの規制の記憶」</a:t>
                       </a:r>
-                      <a:endParaRPr lang="en-US" sz="1050" dirty="0">
+                      <a:endParaRPr lang="en-US" sz="1000" dirty="0">
                         <a:latin typeface="游ゴシック" charset="0"/>
                         <a:ea typeface="游ゴシック" charset="0"/>
                         <a:cs typeface="游ゴシック" charset="0"/>
@@ -10842,7 +10842,7 @@
                         <a:buNone/>
                       </a:pPr>
                       <a:r>
-                        <a:rPr lang="en-US" sz="1050" dirty="0">
+                        <a:rPr lang="en-US" sz="1000" dirty="0">
                           <a:solidFill>
                             <a:srgbClr val="404040"/>
                           </a:solidFill>
@@ -10850,9 +10850,9 @@
                           <a:ea typeface="游ゴシック" pitchFamily="34" charset="-122"/>
                           <a:cs typeface="游ゴシック" pitchFamily="34" charset="-120"/>
                         </a:rPr>
-                        <a:t>約30年に及んだ海外版権紛争は2019年の米控訴審で完全決着。現在は全世界で権利関係がクリーンで、御社に法務リスクを持ち込まない。むしろアジアは手つかずの伸びしろ</a:t>
+                        <a:t>1988年の公取委勧告は研究済み。レアは射幸性でなく物語性に置き、封入率の透明化とデジタル図鑑での重複救済など、令和の健全設計を初期から組み込む</a:t>
                       </a:r>
-                      <a:endParaRPr lang="en-US" sz="1050" dirty="0">
+                      <a:endParaRPr lang="en-US" sz="1000" dirty="0">
                         <a:latin typeface="游ゴシック" charset="0"/>
                         <a:ea typeface="游ゴシック" charset="0"/>
                         <a:cs typeface="游ゴシック" charset="0"/>
@@ -10899,7 +10899,7 @@
                   </a:tcPr>
                 </a:tc>
               </a:tr>
-              <a:tr h="868680">
+              <a:tr h="749808">
                 <a:tc>
                   <a:txBody>
                     <a:bodyPr/>
@@ -10909,7 +10909,7 @@
                         <a:buNone/>
                       </a:pPr>
                       <a:r>
-                        <a:rPr lang="en-US" sz="1050" b="1" dirty="0">
+                        <a:rPr lang="en-US" sz="1000" b="1" dirty="0">
                           <a:solidFill>
                             <a:srgbClr val="333333"/>
                           </a:solidFill>
@@ -10917,9 +10917,9 @@
                           <a:ea typeface="游ゴシック" pitchFamily="34" charset="-122"/>
                           <a:cs typeface="游ゴシック" pitchFamily="34" charset="-120"/>
                         </a:rPr>
-                        <a:t>「機能訴求の表示リスク」</a:t>
+                        <a:t>「海外権利は大丈夫か」</a:t>
                       </a:r>
-                      <a:endParaRPr lang="en-US" sz="1050" dirty="0">
+                      <a:endParaRPr lang="en-US" sz="1000" dirty="0">
                         <a:latin typeface="游ゴシック" charset="0"/>
                         <a:ea typeface="游ゴシック" charset="0"/>
                         <a:cs typeface="游ゴシック" charset="0"/>
@@ -10977,7 +10977,142 @@
                         <a:buNone/>
                       </a:pPr>
                       <a:r>
-                        <a:rPr lang="en-US" sz="1050" dirty="0">
+                        <a:rPr lang="en-US" sz="1000" dirty="0">
+                          <a:solidFill>
+                            <a:srgbClr val="404040"/>
+                          </a:solidFill>
+                          <a:latin typeface="游ゴシック" pitchFamily="34" charset="0"/>
+                          <a:ea typeface="游ゴシック" pitchFamily="34" charset="-122"/>
+                          <a:cs typeface="游ゴシック" pitchFamily="34" charset="-120"/>
+                        </a:rPr>
+                        <a:t>約30年に及んだ海外版権紛争は2019年の米控訴審で完全決着。現在は全世界で権利関係がクリーンで、御社に法務リスクを持ち込まない。むしろアジアは手つかずの伸びしろ</a:t>
+                      </a:r>
+                      <a:endParaRPr lang="en-US" sz="1000" dirty="0">
+                        <a:latin typeface="游ゴシック" charset="0"/>
+                        <a:ea typeface="游ゴシック" charset="0"/>
+                        <a:cs typeface="游ゴシック" charset="0"/>
+                      </a:endParaRPr>
+                    </a:p>
+                  </a:txBody>
+                  <a:tcPr marL="64008" marR="64008" marT="64008" marB="64008" anchor="ctr">
+                    <a:lnL w="6350" cap="flat" cmpd="sng" algn="ctr">
+                      <a:solidFill>
+                        <a:srgbClr val="BFBFBF"/>
+                      </a:solidFill>
+                      <a:prstDash val="solid"/>
+                      <a:round/>
+                      <a:headEnd type="none" w="med" len="med"/>
+                      <a:tailEnd type="none" w="med" len="med"/>
+                    </a:lnL>
+                    <a:lnR w="6350" cap="flat" cmpd="sng" algn="ctr">
+                      <a:solidFill>
+                        <a:srgbClr val="BFBFBF"/>
+                      </a:solidFill>
+                      <a:prstDash val="solid"/>
+                      <a:round/>
+                      <a:headEnd type="none" w="med" len="med"/>
+                      <a:tailEnd type="none" w="med" len="med"/>
+                    </a:lnR>
+                    <a:lnT w="6350" cap="flat" cmpd="sng" algn="ctr">
+                      <a:solidFill>
+                        <a:srgbClr val="BFBFBF"/>
+                      </a:solidFill>
+                      <a:prstDash val="solid"/>
+                      <a:round/>
+                      <a:headEnd type="none" w="med" len="med"/>
+                      <a:tailEnd type="none" w="med" len="med"/>
+                    </a:lnT>
+                    <a:lnB w="6350" cap="flat" cmpd="sng" algn="ctr">
+                      <a:solidFill>
+                        <a:srgbClr val="BFBFBF"/>
+                      </a:solidFill>
+                      <a:prstDash val="solid"/>
+                      <a:round/>
+                      <a:headEnd type="none" w="med" len="med"/>
+                      <a:tailEnd type="none" w="med" len="med"/>
+                    </a:lnB>
+                  </a:tcPr>
+                </a:tc>
+              </a:tr>
+              <a:tr h="749808">
+                <a:tc>
+                  <a:txBody>
+                    <a:bodyPr/>
+                    <a:lstStyle/>
+                    <a:p>
+                      <a:pPr algn="ctr" indent="0" marL="0">
+                        <a:buNone/>
+                      </a:pPr>
+                      <a:r>
+                        <a:rPr lang="en-US" sz="1000" b="1" dirty="0">
+                          <a:solidFill>
+                            <a:srgbClr val="333333"/>
+                          </a:solidFill>
+                          <a:latin typeface="游ゴシック" pitchFamily="34" charset="0"/>
+                          <a:ea typeface="游ゴシック" pitchFamily="34" charset="-122"/>
+                          <a:cs typeface="游ゴシック" pitchFamily="34" charset="-120"/>
+                        </a:rPr>
+                        <a:t>「機能訴求の表示リスク」</a:t>
+                      </a:r>
+                      <a:endParaRPr lang="en-US" sz="1000" dirty="0">
+                        <a:latin typeface="游ゴシック" charset="0"/>
+                        <a:ea typeface="游ゴシック" charset="0"/>
+                        <a:cs typeface="游ゴシック" charset="0"/>
+                      </a:endParaRPr>
+                    </a:p>
+                  </a:txBody>
+                  <a:tcPr marL="64008" marR="64008" marT="64008" marB="64008" anchor="ctr">
+                    <a:lnL w="6350" cap="flat" cmpd="sng" algn="ctr">
+                      <a:solidFill>
+                        <a:srgbClr val="BFBFBF"/>
+                      </a:solidFill>
+                      <a:prstDash val="solid"/>
+                      <a:round/>
+                      <a:headEnd type="none" w="med" len="med"/>
+                      <a:tailEnd type="none" w="med" len="med"/>
+                    </a:lnL>
+                    <a:lnR w="6350" cap="flat" cmpd="sng" algn="ctr">
+                      <a:solidFill>
+                        <a:srgbClr val="BFBFBF"/>
+                      </a:solidFill>
+                      <a:prstDash val="solid"/>
+                      <a:round/>
+                      <a:headEnd type="none" w="med" len="med"/>
+                      <a:tailEnd type="none" w="med" len="med"/>
+                    </a:lnR>
+                    <a:lnT w="6350" cap="flat" cmpd="sng" algn="ctr">
+                      <a:solidFill>
+                        <a:srgbClr val="BFBFBF"/>
+                      </a:solidFill>
+                      <a:prstDash val="solid"/>
+                      <a:round/>
+                      <a:headEnd type="none" w="med" len="med"/>
+                      <a:tailEnd type="none" w="med" len="med"/>
+                    </a:lnT>
+                    <a:lnB w="6350" cap="flat" cmpd="sng" algn="ctr">
+                      <a:solidFill>
+                        <a:srgbClr val="BFBFBF"/>
+                      </a:solidFill>
+                      <a:prstDash val="solid"/>
+                      <a:round/>
+                      <a:headEnd type="none" w="med" len="med"/>
+                      <a:tailEnd type="none" w="med" len="med"/>
+                    </a:lnB>
+                    <a:solidFill>
+                      <a:srgbClr val="F7F5F1"/>
+                    </a:solidFill>
+                  </a:tcPr>
+                </a:tc>
+                <a:tc>
+                  <a:txBody>
+                    <a:bodyPr/>
+                    <a:lstStyle/>
+                    <a:p>
+                      <a:pPr indent="0" marL="0">
+                        <a:buNone/>
+                      </a:pPr>
+                      <a:r>
+                        <a:rPr lang="en-US" sz="1000" dirty="0">
                           <a:solidFill>
                             <a:srgbClr val="404040"/>
                           </a:solidFill>
@@ -10987,7 +11122,7 @@
                         </a:rPr>
                         <a:t>機能表現は御社の噛むこと研究のエビデンスと表示規制の範囲で設計し、円谷は世界観表現に徹する。科学はロッテ、物語は円谷という役割分担を契約で明確化する</a:t>
                       </a:r>
-                      <a:endParaRPr lang="en-US" sz="1050" dirty="0">
+                      <a:endParaRPr lang="en-US" sz="1000" dirty="0">
                         <a:latin typeface="游ゴシック" charset="0"/>
                         <a:ea typeface="游ゴシック" charset="0"/>
                         <a:cs typeface="游ゴシック" charset="0"/>
@@ -11038,6 +11173,28 @@
           </a:graphicData>
         </a:graphic>
       </p:graphicFrame>
+      <p:sp>
+        <p:nvSpPr>
+          <p:cNvPr id="12" name="Shape 9"/>
+          <p:cNvSpPr/>
+          <p:nvPr/>
+        </p:nvSpPr>
+        <p:spPr>
+          <a:xfrm>
+            <a:off x="630936" y="2523744"/>
+            <a:ext cx="10927080" cy="859536"/>
+          </a:xfrm>
+          <a:prstGeom prst="rect">
+            <a:avLst/>
+          </a:prstGeom>
+          <a:ln w="15875">
+            <a:solidFill>
+              <a:srgbClr val="C00000"/>
+            </a:solidFill>
+            <a:prstDash val="dash"/>
+          </a:ln>
+        </p:spPr>
+      </p:sp>
     </p:spTree>
   </p:cSld>
   <p:clrMapOvr>

--- a/docs/proposals/lotte-ultraman-category-proposal.pptx
+++ b/docs/proposals/lotte-ultraman-category-proposal.pptx
@@ -2328,9 +2328,9 @@
                 <a:solidFill>
                   <a:srgbClr val="3B3028"/>
                 </a:solidFill>
-                <a:latin typeface="Times New Roman" pitchFamily="34" charset="0"/>
-                <a:ea typeface="Times New Roman" pitchFamily="34" charset="-122"/>
-                <a:cs typeface="Times New Roman" pitchFamily="34" charset="-120"/>
+                <a:latin typeface="游ゴシック" pitchFamily="34" charset="0"/>
+                <a:ea typeface="游ゴシック" pitchFamily="34" charset="-122"/>
+                <a:cs typeface="游ゴシック" pitchFamily="34" charset="-120"/>
               </a:rPr>
               <a:t>TSUBURAYA PRODUCTIONS</a:t>
             </a:r>
@@ -2367,9 +2367,9 @@
                 <a:solidFill>
                   <a:srgbClr val="595959"/>
                 </a:solidFill>
-                <a:latin typeface="Arial" pitchFamily="34" charset="0"/>
-                <a:ea typeface="Arial" pitchFamily="34" charset="-122"/>
-                <a:cs typeface="Arial" pitchFamily="34" charset="-120"/>
+                <a:latin typeface="游ゴシック" pitchFamily="34" charset="0"/>
+                <a:ea typeface="游ゴシック" pitchFamily="34" charset="-122"/>
+                <a:cs typeface="游ゴシック" pitchFamily="34" charset="-120"/>
               </a:rPr>
               <a:t>LOTTE</a:t>
             </a:r>
@@ -2384,9 +2384,9 @@
                 <a:solidFill>
                   <a:srgbClr val="808080"/>
                 </a:solidFill>
-                <a:latin typeface="Arial" pitchFamily="34" charset="0"/>
-                <a:ea typeface="Arial" pitchFamily="34" charset="-122"/>
-                <a:cs typeface="Arial" pitchFamily="34" charset="-120"/>
+                <a:latin typeface="游ゴシック" pitchFamily="34" charset="0"/>
+                <a:ea typeface="游ゴシック" pitchFamily="34" charset="-122"/>
+                <a:cs typeface="游ゴシック" pitchFamily="34" charset="-120"/>
               </a:rPr>
               <a:t>LOTTE HOLDINGS</a:t>
             </a:r>
@@ -2873,9 +2873,9 @@
                 <a:solidFill>
                   <a:srgbClr val="333333"/>
                 </a:solidFill>
-                <a:latin typeface="Times New Roman" pitchFamily="34" charset="0"/>
-                <a:ea typeface="Times New Roman" pitchFamily="34" charset="-122"/>
-                <a:cs typeface="Times New Roman" pitchFamily="34" charset="-120"/>
+                <a:latin typeface="游ゴシック" pitchFamily="34" charset="0"/>
+                <a:ea typeface="游ゴシック" pitchFamily="34" charset="-122"/>
+                <a:cs typeface="游ゴシック" pitchFamily="34" charset="-120"/>
               </a:rPr>
               <a:t>TSUBURAYA PRODUCTIONS</a:t>
             </a:r>
@@ -2912,9 +2912,9 @@
                 <a:solidFill>
                   <a:srgbClr val="808080"/>
                 </a:solidFill>
-                <a:latin typeface="Arial" pitchFamily="34" charset="0"/>
-                <a:ea typeface="Arial" pitchFamily="34" charset="-122"/>
-                <a:cs typeface="Arial" pitchFamily="34" charset="-120"/>
+                <a:latin typeface="游ゴシック" pitchFamily="34" charset="0"/>
+                <a:ea typeface="游ゴシック" pitchFamily="34" charset="-122"/>
+                <a:cs typeface="游ゴシック" pitchFamily="34" charset="-120"/>
               </a:rPr>
               <a:t>ULTRA 3MIN.</a:t>
             </a:r>
@@ -2926,9 +2926,9 @@
                 <a:solidFill>
                   <a:srgbClr val="595959"/>
                 </a:solidFill>
-                <a:latin typeface="Arial" pitchFamily="34" charset="0"/>
-                <a:ea typeface="Arial" pitchFamily="34" charset="-122"/>
-                <a:cs typeface="Arial" pitchFamily="34" charset="-120"/>
+                <a:latin typeface="游ゴシック" pitchFamily="34" charset="0"/>
+                <a:ea typeface="游ゴシック" pitchFamily="34" charset="-122"/>
+                <a:cs typeface="游ゴシック" pitchFamily="34" charset="-120"/>
               </a:rPr>
               <a:t>    10</a:t>
             </a:r>
@@ -3766,9 +3766,9 @@
                 <a:solidFill>
                   <a:srgbClr val="333333"/>
                 </a:solidFill>
-                <a:latin typeface="Times New Roman" pitchFamily="34" charset="0"/>
-                <a:ea typeface="Times New Roman" pitchFamily="34" charset="-122"/>
-                <a:cs typeface="Times New Roman" pitchFamily="34" charset="-120"/>
+                <a:latin typeface="游ゴシック" pitchFamily="34" charset="0"/>
+                <a:ea typeface="游ゴシック" pitchFamily="34" charset="-122"/>
+                <a:cs typeface="游ゴシック" pitchFamily="34" charset="-120"/>
               </a:rPr>
               <a:t>TSUBURAYA PRODUCTIONS</a:t>
             </a:r>
@@ -3805,9 +3805,9 @@
                 <a:solidFill>
                   <a:srgbClr val="808080"/>
                 </a:solidFill>
-                <a:latin typeface="Arial" pitchFamily="34" charset="0"/>
-                <a:ea typeface="Arial" pitchFamily="34" charset="-122"/>
-                <a:cs typeface="Arial" pitchFamily="34" charset="-120"/>
+                <a:latin typeface="游ゴシック" pitchFamily="34" charset="0"/>
+                <a:ea typeface="游ゴシック" pitchFamily="34" charset="-122"/>
+                <a:cs typeface="游ゴシック" pitchFamily="34" charset="-120"/>
               </a:rPr>
               <a:t>ULTRA 3MIN.</a:t>
             </a:r>
@@ -3819,9 +3819,9 @@
                 <a:solidFill>
                   <a:srgbClr val="595959"/>
                 </a:solidFill>
-                <a:latin typeface="Arial" pitchFamily="34" charset="0"/>
-                <a:ea typeface="Arial" pitchFamily="34" charset="-122"/>
-                <a:cs typeface="Arial" pitchFamily="34" charset="-120"/>
+                <a:latin typeface="游ゴシック" pitchFamily="34" charset="0"/>
+                <a:ea typeface="游ゴシック" pitchFamily="34" charset="-122"/>
+                <a:cs typeface="游ゴシック" pitchFamily="34" charset="-120"/>
               </a:rPr>
               <a:t>    11</a:t>
             </a:r>
@@ -4757,9 +4757,9 @@
                 <a:solidFill>
                   <a:srgbClr val="333333"/>
                 </a:solidFill>
-                <a:latin typeface="Times New Roman" pitchFamily="34" charset="0"/>
-                <a:ea typeface="Times New Roman" pitchFamily="34" charset="-122"/>
-                <a:cs typeface="Times New Roman" pitchFamily="34" charset="-120"/>
+                <a:latin typeface="游ゴシック" pitchFamily="34" charset="0"/>
+                <a:ea typeface="游ゴシック" pitchFamily="34" charset="-122"/>
+                <a:cs typeface="游ゴシック" pitchFamily="34" charset="-120"/>
               </a:rPr>
               <a:t>TSUBURAYA PRODUCTIONS</a:t>
             </a:r>
@@ -4796,9 +4796,9 @@
                 <a:solidFill>
                   <a:srgbClr val="808080"/>
                 </a:solidFill>
-                <a:latin typeface="Arial" pitchFamily="34" charset="0"/>
-                <a:ea typeface="Arial" pitchFamily="34" charset="-122"/>
-                <a:cs typeface="Arial" pitchFamily="34" charset="-120"/>
+                <a:latin typeface="游ゴシック" pitchFamily="34" charset="0"/>
+                <a:ea typeface="游ゴシック" pitchFamily="34" charset="-122"/>
+                <a:cs typeface="游ゴシック" pitchFamily="34" charset="-120"/>
               </a:rPr>
               <a:t>ULTRA 3MIN.</a:t>
             </a:r>
@@ -4810,9 +4810,9 @@
                 <a:solidFill>
                   <a:srgbClr val="595959"/>
                 </a:solidFill>
-                <a:latin typeface="Arial" pitchFamily="34" charset="0"/>
-                <a:ea typeface="Arial" pitchFamily="34" charset="-122"/>
-                <a:cs typeface="Arial" pitchFamily="34" charset="-120"/>
+                <a:latin typeface="游ゴシック" pitchFamily="34" charset="0"/>
+                <a:ea typeface="游ゴシック" pitchFamily="34" charset="-122"/>
+                <a:cs typeface="游ゴシック" pitchFamily="34" charset="-120"/>
               </a:rPr>
               <a:t>    12</a:t>
             </a:r>
@@ -5804,9 +5804,9 @@
                 <a:solidFill>
                   <a:srgbClr val="333333"/>
                 </a:solidFill>
-                <a:latin typeface="Times New Roman" pitchFamily="34" charset="0"/>
-                <a:ea typeface="Times New Roman" pitchFamily="34" charset="-122"/>
-                <a:cs typeface="Times New Roman" pitchFamily="34" charset="-120"/>
+                <a:latin typeface="游ゴシック" pitchFamily="34" charset="0"/>
+                <a:ea typeface="游ゴシック" pitchFamily="34" charset="-122"/>
+                <a:cs typeface="游ゴシック" pitchFamily="34" charset="-120"/>
               </a:rPr>
               <a:t>TSUBURAYA PRODUCTIONS</a:t>
             </a:r>
@@ -5843,9 +5843,9 @@
                 <a:solidFill>
                   <a:srgbClr val="808080"/>
                 </a:solidFill>
-                <a:latin typeface="Arial" pitchFamily="34" charset="0"/>
-                <a:ea typeface="Arial" pitchFamily="34" charset="-122"/>
-                <a:cs typeface="Arial" pitchFamily="34" charset="-120"/>
+                <a:latin typeface="游ゴシック" pitchFamily="34" charset="0"/>
+                <a:ea typeface="游ゴシック" pitchFamily="34" charset="-122"/>
+                <a:cs typeface="游ゴシック" pitchFamily="34" charset="-120"/>
               </a:rPr>
               <a:t>ULTRA 3MIN.</a:t>
             </a:r>
@@ -5857,9 +5857,9 @@
                 <a:solidFill>
                   <a:srgbClr val="595959"/>
                 </a:solidFill>
-                <a:latin typeface="Arial" pitchFamily="34" charset="0"/>
-                <a:ea typeface="Arial" pitchFamily="34" charset="-122"/>
-                <a:cs typeface="Arial" pitchFamily="34" charset="-120"/>
+                <a:latin typeface="游ゴシック" pitchFamily="34" charset="0"/>
+                <a:ea typeface="游ゴシック" pitchFamily="34" charset="-122"/>
+                <a:cs typeface="游ゴシック" pitchFamily="34" charset="-120"/>
               </a:rPr>
               <a:t>    13</a:t>
             </a:r>
@@ -7098,9 +7098,9 @@
                 <a:solidFill>
                   <a:srgbClr val="333333"/>
                 </a:solidFill>
-                <a:latin typeface="Times New Roman" pitchFamily="34" charset="0"/>
-                <a:ea typeface="Times New Roman" pitchFamily="34" charset="-122"/>
-                <a:cs typeface="Times New Roman" pitchFamily="34" charset="-120"/>
+                <a:latin typeface="游ゴシック" pitchFamily="34" charset="0"/>
+                <a:ea typeface="游ゴシック" pitchFamily="34" charset="-122"/>
+                <a:cs typeface="游ゴシック" pitchFamily="34" charset="-120"/>
               </a:rPr>
               <a:t>TSUBURAYA PRODUCTIONS</a:t>
             </a:r>
@@ -7137,9 +7137,9 @@
                 <a:solidFill>
                   <a:srgbClr val="808080"/>
                 </a:solidFill>
-                <a:latin typeface="Arial" pitchFamily="34" charset="0"/>
-                <a:ea typeface="Arial" pitchFamily="34" charset="-122"/>
-                <a:cs typeface="Arial" pitchFamily="34" charset="-120"/>
+                <a:latin typeface="游ゴシック" pitchFamily="34" charset="0"/>
+                <a:ea typeface="游ゴシック" pitchFamily="34" charset="-122"/>
+                <a:cs typeface="游ゴシック" pitchFamily="34" charset="-120"/>
               </a:rPr>
               <a:t>ULTRA 3MIN.</a:t>
             </a:r>
@@ -7151,9 +7151,9 @@
                 <a:solidFill>
                   <a:srgbClr val="595959"/>
                 </a:solidFill>
-                <a:latin typeface="Arial" pitchFamily="34" charset="0"/>
-                <a:ea typeface="Arial" pitchFamily="34" charset="-122"/>
-                <a:cs typeface="Arial" pitchFamily="34" charset="-120"/>
+                <a:latin typeface="游ゴシック" pitchFamily="34" charset="0"/>
+                <a:ea typeface="游ゴシック" pitchFamily="34" charset="-122"/>
+                <a:cs typeface="游ゴシック" pitchFamily="34" charset="-120"/>
               </a:rPr>
               <a:t>    14</a:t>
             </a:r>
@@ -8187,9 +8187,9 @@
                 <a:solidFill>
                   <a:srgbClr val="333333"/>
                 </a:solidFill>
-                <a:latin typeface="Times New Roman" pitchFamily="34" charset="0"/>
-                <a:ea typeface="Times New Roman" pitchFamily="34" charset="-122"/>
-                <a:cs typeface="Times New Roman" pitchFamily="34" charset="-120"/>
+                <a:latin typeface="游ゴシック" pitchFamily="34" charset="0"/>
+                <a:ea typeface="游ゴシック" pitchFamily="34" charset="-122"/>
+                <a:cs typeface="游ゴシック" pitchFamily="34" charset="-120"/>
               </a:rPr>
               <a:t>TSUBURAYA PRODUCTIONS</a:t>
             </a:r>
@@ -8226,9 +8226,9 @@
                 <a:solidFill>
                   <a:srgbClr val="808080"/>
                 </a:solidFill>
-                <a:latin typeface="Arial" pitchFamily="34" charset="0"/>
-                <a:ea typeface="Arial" pitchFamily="34" charset="-122"/>
-                <a:cs typeface="Arial" pitchFamily="34" charset="-120"/>
+                <a:latin typeface="游ゴシック" pitchFamily="34" charset="0"/>
+                <a:ea typeface="游ゴシック" pitchFamily="34" charset="-122"/>
+                <a:cs typeface="游ゴシック" pitchFamily="34" charset="-120"/>
               </a:rPr>
               <a:t>ULTRA 3MIN.</a:t>
             </a:r>
@@ -8240,9 +8240,9 @@
                 <a:solidFill>
                   <a:srgbClr val="595959"/>
                 </a:solidFill>
-                <a:latin typeface="Arial" pitchFamily="34" charset="0"/>
-                <a:ea typeface="Arial" pitchFamily="34" charset="-122"/>
-                <a:cs typeface="Arial" pitchFamily="34" charset="-120"/>
+                <a:latin typeface="游ゴシック" pitchFamily="34" charset="0"/>
+                <a:ea typeface="游ゴシック" pitchFamily="34" charset="-122"/>
+                <a:cs typeface="游ゴシック" pitchFamily="34" charset="-120"/>
               </a:rPr>
               <a:t>    15</a:t>
             </a:r>
@@ -10267,9 +10267,9 @@
                 <a:solidFill>
                   <a:srgbClr val="333333"/>
                 </a:solidFill>
-                <a:latin typeface="Times New Roman" pitchFamily="34" charset="0"/>
-                <a:ea typeface="Times New Roman" pitchFamily="34" charset="-122"/>
-                <a:cs typeface="Times New Roman" pitchFamily="34" charset="-120"/>
+                <a:latin typeface="游ゴシック" pitchFamily="34" charset="0"/>
+                <a:ea typeface="游ゴシック" pitchFamily="34" charset="-122"/>
+                <a:cs typeface="游ゴシック" pitchFamily="34" charset="-120"/>
               </a:rPr>
               <a:t>TSUBURAYA PRODUCTIONS</a:t>
             </a:r>
@@ -10306,9 +10306,9 @@
                 <a:solidFill>
                   <a:srgbClr val="808080"/>
                 </a:solidFill>
-                <a:latin typeface="Arial" pitchFamily="34" charset="0"/>
-                <a:ea typeface="Arial" pitchFamily="34" charset="-122"/>
-                <a:cs typeface="Arial" pitchFamily="34" charset="-120"/>
+                <a:latin typeface="游ゴシック" pitchFamily="34" charset="0"/>
+                <a:ea typeface="游ゴシック" pitchFamily="34" charset="-122"/>
+                <a:cs typeface="游ゴシック" pitchFamily="34" charset="-120"/>
               </a:rPr>
               <a:t>ULTRA 3MIN.</a:t>
             </a:r>
@@ -10320,9 +10320,9 @@
                 <a:solidFill>
                   <a:srgbClr val="595959"/>
                 </a:solidFill>
-                <a:latin typeface="Arial" pitchFamily="34" charset="0"/>
-                <a:ea typeface="Arial" pitchFamily="34" charset="-122"/>
-                <a:cs typeface="Arial" pitchFamily="34" charset="-120"/>
+                <a:latin typeface="游ゴシック" pitchFamily="34" charset="0"/>
+                <a:ea typeface="游ゴシック" pitchFamily="34" charset="-122"/>
+                <a:cs typeface="游ゴシック" pitchFamily="34" charset="-120"/>
               </a:rPr>
               <a:t>    16</a:t>
             </a:r>
@@ -11478,9 +11478,9 @@
                 <a:solidFill>
                   <a:srgbClr val="333333"/>
                 </a:solidFill>
-                <a:latin typeface="Times New Roman" pitchFamily="34" charset="0"/>
-                <a:ea typeface="Times New Roman" pitchFamily="34" charset="-122"/>
-                <a:cs typeface="Times New Roman" pitchFamily="34" charset="-120"/>
+                <a:latin typeface="游ゴシック" pitchFamily="34" charset="0"/>
+                <a:ea typeface="游ゴシック" pitchFamily="34" charset="-122"/>
+                <a:cs typeface="游ゴシック" pitchFamily="34" charset="-120"/>
               </a:rPr>
               <a:t>TSUBURAYA PRODUCTIONS</a:t>
             </a:r>
@@ -11517,9 +11517,9 @@
                 <a:solidFill>
                   <a:srgbClr val="808080"/>
                 </a:solidFill>
-                <a:latin typeface="Arial" pitchFamily="34" charset="0"/>
-                <a:ea typeface="Arial" pitchFamily="34" charset="-122"/>
-                <a:cs typeface="Arial" pitchFamily="34" charset="-120"/>
+                <a:latin typeface="游ゴシック" pitchFamily="34" charset="0"/>
+                <a:ea typeface="游ゴシック" pitchFamily="34" charset="-122"/>
+                <a:cs typeface="游ゴシック" pitchFamily="34" charset="-120"/>
               </a:rPr>
               <a:t>ULTRA 3MIN.</a:t>
             </a:r>
@@ -11531,9 +11531,9 @@
                 <a:solidFill>
                   <a:srgbClr val="595959"/>
                 </a:solidFill>
-                <a:latin typeface="Arial" pitchFamily="34" charset="0"/>
-                <a:ea typeface="Arial" pitchFamily="34" charset="-122"/>
-                <a:cs typeface="Arial" pitchFamily="34" charset="-120"/>
+                <a:latin typeface="游ゴシック" pitchFamily="34" charset="0"/>
+                <a:ea typeface="游ゴシック" pitchFamily="34" charset="-122"/>
+                <a:cs typeface="游ゴシック" pitchFamily="34" charset="-120"/>
               </a:rPr>
               <a:t>    17</a:t>
             </a:r>
@@ -13385,9 +13385,9 @@
                 <a:solidFill>
                   <a:srgbClr val="333333"/>
                 </a:solidFill>
-                <a:latin typeface="Times New Roman" pitchFamily="34" charset="0"/>
-                <a:ea typeface="Times New Roman" pitchFamily="34" charset="-122"/>
-                <a:cs typeface="Times New Roman" pitchFamily="34" charset="-120"/>
+                <a:latin typeface="游ゴシック" pitchFamily="34" charset="0"/>
+                <a:ea typeface="游ゴシック" pitchFamily="34" charset="-122"/>
+                <a:cs typeface="游ゴシック" pitchFamily="34" charset="-120"/>
               </a:rPr>
               <a:t>TSUBURAYA PRODUCTIONS</a:t>
             </a:r>
@@ -13424,9 +13424,9 @@
                 <a:solidFill>
                   <a:srgbClr val="808080"/>
                 </a:solidFill>
-                <a:latin typeface="Arial" pitchFamily="34" charset="0"/>
-                <a:ea typeface="Arial" pitchFamily="34" charset="-122"/>
-                <a:cs typeface="Arial" pitchFamily="34" charset="-120"/>
+                <a:latin typeface="游ゴシック" pitchFamily="34" charset="0"/>
+                <a:ea typeface="游ゴシック" pitchFamily="34" charset="-122"/>
+                <a:cs typeface="游ゴシック" pitchFamily="34" charset="-120"/>
               </a:rPr>
               <a:t>ULTRA 3MIN.</a:t>
             </a:r>
@@ -13438,9 +13438,9 @@
                 <a:solidFill>
                   <a:srgbClr val="595959"/>
                 </a:solidFill>
-                <a:latin typeface="Arial" pitchFamily="34" charset="0"/>
-                <a:ea typeface="Arial" pitchFamily="34" charset="-122"/>
-                <a:cs typeface="Arial" pitchFamily="34" charset="-120"/>
+                <a:latin typeface="游ゴシック" pitchFamily="34" charset="0"/>
+                <a:ea typeface="游ゴシック" pitchFamily="34" charset="-122"/>
+                <a:cs typeface="游ゴシック" pitchFamily="34" charset="-120"/>
               </a:rPr>
               <a:t>    2</a:t>
             </a:r>
@@ -13751,9 +13751,9 @@
                 <a:solidFill>
                   <a:srgbClr val="333333"/>
                 </a:solidFill>
-                <a:latin typeface="Times New Roman" pitchFamily="34" charset="0"/>
-                <a:ea typeface="Times New Roman" pitchFamily="34" charset="-122"/>
-                <a:cs typeface="Times New Roman" pitchFamily="34" charset="-120"/>
+                <a:latin typeface="游ゴシック" pitchFamily="34" charset="0"/>
+                <a:ea typeface="游ゴシック" pitchFamily="34" charset="-122"/>
+                <a:cs typeface="游ゴシック" pitchFamily="34" charset="-120"/>
               </a:rPr>
               <a:t>TSUBURAYA PRODUCTIONS</a:t>
             </a:r>
@@ -13790,9 +13790,9 @@
                 <a:solidFill>
                   <a:srgbClr val="808080"/>
                 </a:solidFill>
-                <a:latin typeface="Arial" pitchFamily="34" charset="0"/>
-                <a:ea typeface="Arial" pitchFamily="34" charset="-122"/>
-                <a:cs typeface="Arial" pitchFamily="34" charset="-120"/>
+                <a:latin typeface="游ゴシック" pitchFamily="34" charset="0"/>
+                <a:ea typeface="游ゴシック" pitchFamily="34" charset="-122"/>
+                <a:cs typeface="游ゴシック" pitchFamily="34" charset="-120"/>
               </a:rPr>
               <a:t>ULTRA 3MIN.</a:t>
             </a:r>
@@ -13804,9 +13804,9 @@
                 <a:solidFill>
                   <a:srgbClr val="595959"/>
                 </a:solidFill>
-                <a:latin typeface="Arial" pitchFamily="34" charset="0"/>
-                <a:ea typeface="Arial" pitchFamily="34" charset="-122"/>
-                <a:cs typeface="Arial" pitchFamily="34" charset="-120"/>
+                <a:latin typeface="游ゴシック" pitchFamily="34" charset="0"/>
+                <a:ea typeface="游ゴシック" pitchFamily="34" charset="-122"/>
+                <a:cs typeface="游ゴシック" pitchFamily="34" charset="-120"/>
               </a:rPr>
               <a:t>    3</a:t>
             </a:r>
@@ -15083,9 +15083,9 @@
                 <a:solidFill>
                   <a:srgbClr val="333333"/>
                 </a:solidFill>
-                <a:latin typeface="Times New Roman" pitchFamily="34" charset="0"/>
-                <a:ea typeface="Times New Roman" pitchFamily="34" charset="-122"/>
-                <a:cs typeface="Times New Roman" pitchFamily="34" charset="-120"/>
+                <a:latin typeface="游ゴシック" pitchFamily="34" charset="0"/>
+                <a:ea typeface="游ゴシック" pitchFamily="34" charset="-122"/>
+                <a:cs typeface="游ゴシック" pitchFamily="34" charset="-120"/>
               </a:rPr>
               <a:t>TSUBURAYA PRODUCTIONS</a:t>
             </a:r>
@@ -15122,9 +15122,9 @@
                 <a:solidFill>
                   <a:srgbClr val="808080"/>
                 </a:solidFill>
-                <a:latin typeface="Arial" pitchFamily="34" charset="0"/>
-                <a:ea typeface="Arial" pitchFamily="34" charset="-122"/>
-                <a:cs typeface="Arial" pitchFamily="34" charset="-120"/>
+                <a:latin typeface="游ゴシック" pitchFamily="34" charset="0"/>
+                <a:ea typeface="游ゴシック" pitchFamily="34" charset="-122"/>
+                <a:cs typeface="游ゴシック" pitchFamily="34" charset="-120"/>
               </a:rPr>
               <a:t>ULTRA 3MIN.</a:t>
             </a:r>
@@ -15136,9 +15136,9 @@
                 <a:solidFill>
                   <a:srgbClr val="595959"/>
                 </a:solidFill>
-                <a:latin typeface="Arial" pitchFamily="34" charset="0"/>
-                <a:ea typeface="Arial" pitchFamily="34" charset="-122"/>
-                <a:cs typeface="Arial" pitchFamily="34" charset="-120"/>
+                <a:latin typeface="游ゴシック" pitchFamily="34" charset="0"/>
+                <a:ea typeface="游ゴシック" pitchFamily="34" charset="-122"/>
+                <a:cs typeface="游ゴシック" pitchFamily="34" charset="-120"/>
               </a:rPr>
               <a:t>    4</a:t>
             </a:r>
@@ -15978,9 +15978,9 @@
                 <a:solidFill>
                   <a:srgbClr val="333333"/>
                 </a:solidFill>
-                <a:latin typeface="Times New Roman" pitchFamily="34" charset="0"/>
-                <a:ea typeface="Times New Roman" pitchFamily="34" charset="-122"/>
-                <a:cs typeface="Times New Roman" pitchFamily="34" charset="-120"/>
+                <a:latin typeface="游ゴシック" pitchFamily="34" charset="0"/>
+                <a:ea typeface="游ゴシック" pitchFamily="34" charset="-122"/>
+                <a:cs typeface="游ゴシック" pitchFamily="34" charset="-120"/>
               </a:rPr>
               <a:t>TSUBURAYA PRODUCTIONS</a:t>
             </a:r>
@@ -16017,9 +16017,9 @@
                 <a:solidFill>
                   <a:srgbClr val="808080"/>
                 </a:solidFill>
-                <a:latin typeface="Arial" pitchFamily="34" charset="0"/>
-                <a:ea typeface="Arial" pitchFamily="34" charset="-122"/>
-                <a:cs typeface="Arial" pitchFamily="34" charset="-120"/>
+                <a:latin typeface="游ゴシック" pitchFamily="34" charset="0"/>
+                <a:ea typeface="游ゴシック" pitchFamily="34" charset="-122"/>
+                <a:cs typeface="游ゴシック" pitchFamily="34" charset="-120"/>
               </a:rPr>
               <a:t>ULTRA 3MIN.</a:t>
             </a:r>
@@ -16031,9 +16031,9 @@
                 <a:solidFill>
                   <a:srgbClr val="595959"/>
                 </a:solidFill>
-                <a:latin typeface="Arial" pitchFamily="34" charset="0"/>
-                <a:ea typeface="Arial" pitchFamily="34" charset="-122"/>
-                <a:cs typeface="Arial" pitchFamily="34" charset="-120"/>
+                <a:latin typeface="游ゴシック" pitchFamily="34" charset="0"/>
+                <a:ea typeface="游ゴシック" pitchFamily="34" charset="-122"/>
+                <a:cs typeface="游ゴシック" pitchFamily="34" charset="-120"/>
               </a:rPr>
               <a:t>    5</a:t>
             </a:r>
@@ -17085,9 +17085,9 @@
                 <a:solidFill>
                   <a:srgbClr val="333333"/>
                 </a:solidFill>
-                <a:latin typeface="Times New Roman" pitchFamily="34" charset="0"/>
-                <a:ea typeface="Times New Roman" pitchFamily="34" charset="-122"/>
-                <a:cs typeface="Times New Roman" pitchFamily="34" charset="-120"/>
+                <a:latin typeface="游ゴシック" pitchFamily="34" charset="0"/>
+                <a:ea typeface="游ゴシック" pitchFamily="34" charset="-122"/>
+                <a:cs typeface="游ゴシック" pitchFamily="34" charset="-120"/>
               </a:rPr>
               <a:t>TSUBURAYA PRODUCTIONS</a:t>
             </a:r>
@@ -17124,9 +17124,9 @@
                 <a:solidFill>
                   <a:srgbClr val="808080"/>
                 </a:solidFill>
-                <a:latin typeface="Arial" pitchFamily="34" charset="0"/>
-                <a:ea typeface="Arial" pitchFamily="34" charset="-122"/>
-                <a:cs typeface="Arial" pitchFamily="34" charset="-120"/>
+                <a:latin typeface="游ゴシック" pitchFamily="34" charset="0"/>
+                <a:ea typeface="游ゴシック" pitchFamily="34" charset="-122"/>
+                <a:cs typeface="游ゴシック" pitchFamily="34" charset="-120"/>
               </a:rPr>
               <a:t>ULTRA 3MIN.</a:t>
             </a:r>
@@ -17138,9 +17138,9 @@
                 <a:solidFill>
                   <a:srgbClr val="595959"/>
                 </a:solidFill>
-                <a:latin typeface="Arial" pitchFamily="34" charset="0"/>
-                <a:ea typeface="Arial" pitchFamily="34" charset="-122"/>
-                <a:cs typeface="Arial" pitchFamily="34" charset="-120"/>
+                <a:latin typeface="游ゴシック" pitchFamily="34" charset="0"/>
+                <a:ea typeface="游ゴシック" pitchFamily="34" charset="-122"/>
+                <a:cs typeface="游ゴシック" pitchFamily="34" charset="-120"/>
               </a:rPr>
               <a:t>    6</a:t>
             </a:r>
@@ -19319,9 +19319,9 @@
                 <a:solidFill>
                   <a:srgbClr val="333333"/>
                 </a:solidFill>
-                <a:latin typeface="Times New Roman" pitchFamily="34" charset="0"/>
-                <a:ea typeface="Times New Roman" pitchFamily="34" charset="-122"/>
-                <a:cs typeface="Times New Roman" pitchFamily="34" charset="-120"/>
+                <a:latin typeface="游ゴシック" pitchFamily="34" charset="0"/>
+                <a:ea typeface="游ゴシック" pitchFamily="34" charset="-122"/>
+                <a:cs typeface="游ゴシック" pitchFamily="34" charset="-120"/>
               </a:rPr>
               <a:t>TSUBURAYA PRODUCTIONS</a:t>
             </a:r>
@@ -19358,9 +19358,9 @@
                 <a:solidFill>
                   <a:srgbClr val="808080"/>
                 </a:solidFill>
-                <a:latin typeface="Arial" pitchFamily="34" charset="0"/>
-                <a:ea typeface="Arial" pitchFamily="34" charset="-122"/>
-                <a:cs typeface="Arial" pitchFamily="34" charset="-120"/>
+                <a:latin typeface="游ゴシック" pitchFamily="34" charset="0"/>
+                <a:ea typeface="游ゴシック" pitchFamily="34" charset="-122"/>
+                <a:cs typeface="游ゴシック" pitchFamily="34" charset="-120"/>
               </a:rPr>
               <a:t>ULTRA 3MIN.</a:t>
             </a:r>
@@ -19372,9 +19372,9 @@
                 <a:solidFill>
                   <a:srgbClr val="595959"/>
                 </a:solidFill>
-                <a:latin typeface="Arial" pitchFamily="34" charset="0"/>
-                <a:ea typeface="Arial" pitchFamily="34" charset="-122"/>
-                <a:cs typeface="Arial" pitchFamily="34" charset="-120"/>
+                <a:latin typeface="游ゴシック" pitchFamily="34" charset="0"/>
+                <a:ea typeface="游ゴシック" pitchFamily="34" charset="-122"/>
+                <a:cs typeface="游ゴシック" pitchFamily="34" charset="-120"/>
               </a:rPr>
               <a:t>    7</a:t>
             </a:r>
@@ -20253,9 +20253,9 @@
                 <a:solidFill>
                   <a:srgbClr val="333333"/>
                 </a:solidFill>
-                <a:latin typeface="Times New Roman" pitchFamily="34" charset="0"/>
-                <a:ea typeface="Times New Roman" pitchFamily="34" charset="-122"/>
-                <a:cs typeface="Times New Roman" pitchFamily="34" charset="-120"/>
+                <a:latin typeface="游ゴシック" pitchFamily="34" charset="0"/>
+                <a:ea typeface="游ゴシック" pitchFamily="34" charset="-122"/>
+                <a:cs typeface="游ゴシック" pitchFamily="34" charset="-120"/>
               </a:rPr>
               <a:t>TSUBURAYA PRODUCTIONS</a:t>
             </a:r>
@@ -20292,9 +20292,9 @@
                 <a:solidFill>
                   <a:srgbClr val="808080"/>
                 </a:solidFill>
-                <a:latin typeface="Arial" pitchFamily="34" charset="0"/>
-                <a:ea typeface="Arial" pitchFamily="34" charset="-122"/>
-                <a:cs typeface="Arial" pitchFamily="34" charset="-120"/>
+                <a:latin typeface="游ゴシック" pitchFamily="34" charset="0"/>
+                <a:ea typeface="游ゴシック" pitchFamily="34" charset="-122"/>
+                <a:cs typeface="游ゴシック" pitchFamily="34" charset="-120"/>
               </a:rPr>
               <a:t>ULTRA 3MIN.</a:t>
             </a:r>
@@ -20306,9 +20306,9 @@
                 <a:solidFill>
                   <a:srgbClr val="595959"/>
                 </a:solidFill>
-                <a:latin typeface="Arial" pitchFamily="34" charset="0"/>
-                <a:ea typeface="Arial" pitchFamily="34" charset="-122"/>
-                <a:cs typeface="Arial" pitchFamily="34" charset="-120"/>
+                <a:latin typeface="游ゴシック" pitchFamily="34" charset="0"/>
+                <a:ea typeface="游ゴシック" pitchFamily="34" charset="-122"/>
+                <a:cs typeface="游ゴシック" pitchFamily="34" charset="-120"/>
               </a:rPr>
               <a:t>    8</a:t>
             </a:r>
@@ -21787,9 +21787,9 @@
                 <a:solidFill>
                   <a:srgbClr val="333333"/>
                 </a:solidFill>
-                <a:latin typeface="Times New Roman" pitchFamily="34" charset="0"/>
-                <a:ea typeface="Times New Roman" pitchFamily="34" charset="-122"/>
-                <a:cs typeface="Times New Roman" pitchFamily="34" charset="-120"/>
+                <a:latin typeface="游ゴシック" pitchFamily="34" charset="0"/>
+                <a:ea typeface="游ゴシック" pitchFamily="34" charset="-122"/>
+                <a:cs typeface="游ゴシック" pitchFamily="34" charset="-120"/>
               </a:rPr>
               <a:t>TSUBURAYA PRODUCTIONS</a:t>
             </a:r>
@@ -21826,9 +21826,9 @@
                 <a:solidFill>
                   <a:srgbClr val="808080"/>
                 </a:solidFill>
-                <a:latin typeface="Arial" pitchFamily="34" charset="0"/>
-                <a:ea typeface="Arial" pitchFamily="34" charset="-122"/>
-                <a:cs typeface="Arial" pitchFamily="34" charset="-120"/>
+                <a:latin typeface="游ゴシック" pitchFamily="34" charset="0"/>
+                <a:ea typeface="游ゴシック" pitchFamily="34" charset="-122"/>
+                <a:cs typeface="游ゴシック" pitchFamily="34" charset="-120"/>
               </a:rPr>
               <a:t>ULTRA 3MIN.</a:t>
             </a:r>
@@ -21840,9 +21840,9 @@
                 <a:solidFill>
                   <a:srgbClr val="595959"/>
                 </a:solidFill>
-                <a:latin typeface="Arial" pitchFamily="34" charset="0"/>
-                <a:ea typeface="Arial" pitchFamily="34" charset="-122"/>
-                <a:cs typeface="Arial" pitchFamily="34" charset="-120"/>
+                <a:latin typeface="游ゴシック" pitchFamily="34" charset="0"/>
+                <a:ea typeface="游ゴシック" pitchFamily="34" charset="-122"/>
+                <a:cs typeface="游ゴシック" pitchFamily="34" charset="-120"/>
               </a:rPr>
               <a:t>    9</a:t>
             </a:r>
